--- a/preview_v7/cn/l-cn-bs-u1-7.pptx
+++ b/preview_v7/cn/l-cn-bs-u1-7.pptx
@@ -3142,14 +3142,102 @@
       </p:sp>
       <p:sp>
         <p:nvSpPr>
-          <p:cNvPr id="3" name="TextBox 2"/>
+          <p:cNvPr id="3" name="Rectangle 2"/>
+          <p:cNvSpPr/>
+          <p:nvPr/>
+        </p:nvSpPr>
+        <p:spPr>
+          <a:xfrm>
+            <a:off x="0" y="0"/>
+            <a:ext cx="12191695" cy="1371600"/>
+          </a:xfrm>
+          <a:prstGeom prst="rect">
+            <a:avLst/>
+          </a:prstGeom>
+          <a:solidFill>
+            <a:srgbClr val="1C2A33"/>
+          </a:solidFill>
+          <a:ln>
+            <a:noFill/>
+          </a:ln>
+          <a:effectLst/>
+        </p:spPr>
+        <p:style>
+          <a:lnRef idx="1">
+            <a:schemeClr val="accent1"/>
+          </a:lnRef>
+          <a:fillRef idx="3">
+            <a:schemeClr val="accent1"/>
+          </a:fillRef>
+          <a:effectRef idx="2">
+            <a:schemeClr val="accent1"/>
+          </a:effectRef>
+          <a:fontRef idx="minor">
+            <a:schemeClr val="lt1"/>
+          </a:fontRef>
+        </p:style>
+        <p:txBody>
+          <a:bodyPr rtlCol="0" anchor="ctr"/>
+          <a:lstStyle/>
+          <a:p>
+            <a:pPr algn="ctr"/>
+          </a:p>
+        </p:txBody>
+      </p:sp>
+      <p:sp>
+        <p:nvSpPr>
+          <p:cNvPr id="4" name="Rectangle 3"/>
+          <p:cNvSpPr/>
+          <p:nvPr/>
+        </p:nvSpPr>
+        <p:spPr>
+          <a:xfrm>
+            <a:off x="640080" y="365760"/>
+            <a:ext cx="822960" cy="38100"/>
+          </a:xfrm>
+          <a:prstGeom prst="rect">
+            <a:avLst/>
+          </a:prstGeom>
+          <a:solidFill>
+            <a:srgbClr val="C8A86B"/>
+          </a:solidFill>
+          <a:ln>
+            <a:noFill/>
+          </a:ln>
+          <a:effectLst/>
+        </p:spPr>
+        <p:style>
+          <a:lnRef idx="1">
+            <a:schemeClr val="accent1"/>
+          </a:lnRef>
+          <a:fillRef idx="3">
+            <a:schemeClr val="accent1"/>
+          </a:fillRef>
+          <a:effectRef idx="2">
+            <a:schemeClr val="accent1"/>
+          </a:effectRef>
+          <a:fontRef idx="minor">
+            <a:schemeClr val="lt1"/>
+          </a:fontRef>
+        </p:style>
+        <p:txBody>
+          <a:bodyPr rtlCol="0" anchor="ctr"/>
+          <a:lstStyle/>
+          <a:p>
+            <a:pPr algn="ctr"/>
+          </a:p>
+        </p:txBody>
+      </p:sp>
+      <p:sp>
+        <p:nvSpPr>
+          <p:cNvPr id="5" name="TextBox 4"/>
           <p:cNvSpPr txBox="1"/>
           <p:nvPr/>
         </p:nvSpPr>
         <p:spPr>
           <a:xfrm>
-            <a:off x="640080" y="640080"/>
-            <a:ext cx="10911535" cy="502920"/>
+            <a:off x="640080" y="475488"/>
+            <a:ext cx="10911535" cy="457200"/>
           </a:xfrm>
           <a:prstGeom prst="rect">
             <a:avLst/>
@@ -3163,34 +3251,169 @@
           <a:lstStyle/>
           <a:p>
             <a:pPr algn="l">
-              <a:spcAft>
-                <a:spcPts val="0"/>
-              </a:spcAft>
-            </a:pPr>
-            <a:r>
-              <a:rPr sz="1200" b="1">
-                <a:solidFill>
-                  <a:srgbClr val="B23A2A"/>
+              <a:lnSpc>
+                <a:spcPct val="145000"/>
+              </a:lnSpc>
+              <a:spcAft>
+                <a:spcPts val="400"/>
+              </a:spcAft>
+            </a:pPr>
+            <a:r>
+              <a:rPr sz="1400" b="1">
+                <a:solidFill>
+                  <a:srgbClr val="C8A86B"/>
                 </a:solidFill>
                 <a:latin typeface="微软雅黑"/>
                 <a:ea typeface="微软雅黑"/>
                 <a:cs typeface="微软雅黑"/>
               </a:rPr>
-              <a:t>语文 · 必修上册 · 第1单元 青春的价值</a:t>
-            </a:r>
-          </a:p>
-        </p:txBody>
-      </p:sp>
-      <p:sp>
-        <p:nvSpPr>
-          <p:cNvPr id="4" name="Rectangle 3"/>
+              <a:t>语文 · 必修上册 · 第1单元（青春的价值）</a:t>
+            </a:r>
+          </a:p>
+        </p:txBody>
+      </p:sp>
+      <p:sp>
+        <p:nvSpPr>
+          <p:cNvPr id="6" name="TextBox 5"/>
+          <p:cNvSpPr txBox="1"/>
+          <p:nvPr/>
+        </p:nvSpPr>
+        <p:spPr>
+          <a:xfrm>
+            <a:off x="640080" y="914400"/>
+            <a:ext cx="10911535" cy="411480"/>
+          </a:xfrm>
+          <a:prstGeom prst="rect">
+            <a:avLst/>
+          </a:prstGeom>
+          <a:noFill/>
+        </p:spPr>
+        <p:txBody>
+          <a:bodyPr wrap="square" anchor="t" lIns="0" rIns="0" tIns="0" bIns="0">
+            <a:spAutoFit/>
+          </a:bodyPr>
+          <a:lstStyle/>
+          <a:p>
+            <a:pPr algn="l">
+              <a:lnSpc>
+                <a:spcPct val="145000"/>
+              </a:lnSpc>
+              <a:spcAft>
+                <a:spcPts val="400"/>
+              </a:spcAft>
+            </a:pPr>
+            <a:r>
+              <a:rPr sz="1300" b="0">
+                <a:solidFill>
+                  <a:srgbClr val="FFFFFF"/>
+                </a:solidFill>
+                <a:latin typeface="微软雅黑"/>
+                <a:ea typeface="微软雅黑"/>
+                <a:cs typeface="微软雅黑"/>
+              </a:rPr>
+              <a:t>第7课时 · 写作实践</a:t>
+            </a:r>
+          </a:p>
+        </p:txBody>
+      </p:sp>
+      <p:sp>
+        <p:nvSpPr>
+          <p:cNvPr id="7" name="Rectangle 6"/>
           <p:cNvSpPr/>
           <p:nvPr/>
         </p:nvSpPr>
         <p:spPr>
           <a:xfrm>
-            <a:off x="640080" y="1207008"/>
-            <a:ext cx="822960" cy="30480"/>
+            <a:off x="11185855" y="320040"/>
+            <a:ext cx="640080" cy="640080"/>
+          </a:xfrm>
+          <a:prstGeom prst="rect">
+            <a:avLst/>
+          </a:prstGeom>
+          <a:solidFill>
+            <a:srgbClr val="2E7D6B"/>
+          </a:solidFill>
+          <a:ln>
+            <a:noFill/>
+          </a:ln>
+          <a:effectLst/>
+        </p:spPr>
+        <p:style>
+          <a:lnRef idx="1">
+            <a:schemeClr val="accent1"/>
+          </a:lnRef>
+          <a:fillRef idx="3">
+            <a:schemeClr val="accent1"/>
+          </a:fillRef>
+          <a:effectRef idx="2">
+            <a:schemeClr val="accent1"/>
+          </a:effectRef>
+          <a:fontRef idx="minor">
+            <a:schemeClr val="lt1"/>
+          </a:fontRef>
+        </p:style>
+        <p:txBody>
+          <a:bodyPr rtlCol="0" anchor="ctr"/>
+          <a:lstStyle/>
+          <a:p>
+            <a:pPr algn="ctr"/>
+          </a:p>
+        </p:txBody>
+      </p:sp>
+      <p:sp>
+        <p:nvSpPr>
+          <p:cNvPr id="8" name="TextBox 7"/>
+          <p:cNvSpPr txBox="1"/>
+          <p:nvPr/>
+        </p:nvSpPr>
+        <p:spPr>
+          <a:xfrm>
+            <a:off x="640080" y="1965960"/>
+            <a:ext cx="10911535" cy="2377440"/>
+          </a:xfrm>
+          <a:prstGeom prst="rect">
+            <a:avLst/>
+          </a:prstGeom>
+          <a:noFill/>
+        </p:spPr>
+        <p:txBody>
+          <a:bodyPr wrap="square" anchor="t" lIns="0" rIns="0" tIns="0" bIns="0">
+            <a:spAutoFit/>
+          </a:bodyPr>
+          <a:lstStyle/>
+          <a:p>
+            <a:pPr algn="l">
+              <a:lnSpc>
+                <a:spcPct val="125000"/>
+              </a:lnSpc>
+              <a:spcAft>
+                <a:spcPts val="400"/>
+              </a:spcAft>
+            </a:pPr>
+            <a:r>
+              <a:rPr sz="3400" b="1">
+                <a:solidFill>
+                  <a:srgbClr val="1C2A33"/>
+                </a:solidFill>
+                <a:latin typeface="楷体"/>
+                <a:ea typeface="楷体"/>
+                <a:cs typeface="楷体"/>
+              </a:rPr>
+              <a:t>写作实践与讲评——新诗修改与提升</a:t>
+            </a:r>
+          </a:p>
+        </p:txBody>
+      </p:sp>
+      <p:sp>
+        <p:nvSpPr>
+          <p:cNvPr id="9" name="Rectangle 8"/>
+          <p:cNvSpPr/>
+          <p:nvPr/>
+        </p:nvSpPr>
+        <p:spPr>
+          <a:xfrm>
+            <a:off x="640080" y="4343400"/>
+            <a:ext cx="822960" cy="38100"/>
           </a:xfrm>
           <a:prstGeom prst="rect">
             <a:avLst/>
@@ -3227,14 +3450,14 @@
       </p:sp>
       <p:sp>
         <p:nvSpPr>
-          <p:cNvPr id="5" name="TextBox 4"/>
+          <p:cNvPr id="10" name="TextBox 9"/>
           <p:cNvSpPr txBox="1"/>
           <p:nvPr/>
         </p:nvSpPr>
         <p:spPr>
           <a:xfrm>
-            <a:off x="640080" y="1737360"/>
-            <a:ext cx="10911535" cy="2011680"/>
+            <a:off x="640080" y="4572000"/>
+            <a:ext cx="10911535" cy="1005840"/>
           </a:xfrm>
           <a:prstGeom prst="rect">
             <a:avLst/>
@@ -3249,76 +3472,42 @@
           <a:p>
             <a:pPr algn="l">
               <a:lnSpc>
-                <a:spcPct val="115000"/>
+                <a:spcPct val="145000"/>
               </a:lnSpc>
-            </a:pPr>
-            <a:r>
-              <a:rPr sz="4000" b="1">
-                <a:solidFill>
-                  <a:srgbClr val="1C2A33"/>
+              <a:spcAft>
+                <a:spcPts val="400"/>
+              </a:spcAft>
+            </a:pPr>
+            <a:r>
+              <a:rPr sz="1700" b="0">
+                <a:solidFill>
+                  <a:srgbClr val="6B6258"/>
                 </a:solidFill>
                 <a:latin typeface="楷体"/>
                 <a:ea typeface="楷体"/>
                 <a:cs typeface="楷体"/>
               </a:rPr>
-              <a:t>写作实践与讲评——新诗修改与提升</a:t>
-            </a:r>
-          </a:p>
-        </p:txBody>
-      </p:sp>
-      <p:sp>
-        <p:nvSpPr>
-          <p:cNvPr id="6" name="TextBox 5"/>
-          <p:cNvSpPr txBox="1"/>
-          <p:nvPr/>
-        </p:nvSpPr>
-        <p:spPr>
-          <a:xfrm>
-            <a:off x="640080" y="3840480"/>
-            <a:ext cx="10911535" cy="457200"/>
-          </a:xfrm>
-          <a:prstGeom prst="rect">
-            <a:avLst/>
-          </a:prstGeom>
-          <a:noFill/>
-        </p:spPr>
-        <p:txBody>
-          <a:bodyPr wrap="square" anchor="t" lIns="0" rIns="0" tIns="0" bIns="0">
-            <a:spAutoFit/>
-          </a:bodyPr>
-          <a:lstStyle/>
-          <a:p>
-            <a:pPr algn="l"/>
-            <a:r>
-              <a:rPr sz="1700" b="1">
-                <a:solidFill>
-                  <a:srgbClr val="B23A2A"/>
-                </a:solidFill>
-                <a:latin typeface="微软雅黑"/>
-                <a:ea typeface="微软雅黑"/>
-                <a:cs typeface="微软雅黑"/>
-              </a:rPr>
-              <a:t>写作实践  ·  第7课时  ·  45分钟</a:t>
-            </a:r>
-          </a:p>
-        </p:txBody>
-      </p:sp>
-      <p:sp>
-        <p:nvSpPr>
-          <p:cNvPr id="7" name="Rectangle 6"/>
+              <a:t>读诗，也写诗；看他人的青春，想自己的成长。</a:t>
+            </a:r>
+          </a:p>
+        </p:txBody>
+      </p:sp>
+      <p:sp>
+        <p:nvSpPr>
+          <p:cNvPr id="11" name="Rectangle 10"/>
           <p:cNvSpPr/>
           <p:nvPr/>
         </p:nvSpPr>
         <p:spPr>
           <a:xfrm>
-            <a:off x="640080" y="5394960"/>
-            <a:ext cx="2011680" cy="33020"/>
+            <a:off x="0" y="6656832"/>
+            <a:ext cx="12191695" cy="201168"/>
           </a:xfrm>
           <a:prstGeom prst="rect">
             <a:avLst/>
           </a:prstGeom>
           <a:solidFill>
-            <a:srgbClr val="C8A86B"/>
+            <a:srgbClr val="B23A2A"/>
           </a:solidFill>
           <a:ln>
             <a:noFill/>
@@ -3349,14 +3538,14 @@
       </p:sp>
       <p:sp>
         <p:nvSpPr>
-          <p:cNvPr id="8" name="TextBox 7"/>
+          <p:cNvPr id="12" name="TextBox 11"/>
           <p:cNvSpPr txBox="1"/>
           <p:nvPr/>
         </p:nvSpPr>
         <p:spPr>
           <a:xfrm>
-            <a:off x="640080" y="5623560"/>
-            <a:ext cx="10911535" cy="548640"/>
+            <a:off x="640080" y="6400800"/>
+            <a:ext cx="10911535" cy="274320"/>
           </a:xfrm>
           <a:prstGeom prst="rect">
             <a:avLst/>
@@ -3369,9 +3558,16 @@
           </a:bodyPr>
           <a:lstStyle/>
           <a:p>
-            <a:pPr algn="l"/>
-            <a:r>
-              <a:rPr sz="1400" b="0">
+            <a:pPr algn="l">
+              <a:lnSpc>
+                <a:spcPct val="145000"/>
+              </a:lnSpc>
+              <a:spcAft>
+                <a:spcPts val="400"/>
+              </a:spcAft>
+            </a:pPr>
+            <a:r>
+              <a:rPr sz="1100" b="0">
                 <a:solidFill>
                   <a:srgbClr val="6B6258"/>
                 </a:solidFill>
@@ -3379,14 +3575,14 @@
                 <a:ea typeface="微软雅黑"/>
                 <a:cs typeface="微软雅黑"/>
               </a:rPr>
-              <a:t>学习任务群：文学阅读与写作    |    年级：高一</a:t>
-            </a:r>
-          </a:p>
-        </p:txBody>
-      </p:sp>
-      <p:sp>
-        <p:nvSpPr>
-          <p:cNvPr id="9" name="TextBox 8"/>
+              <a:t>本课件未使用无关配图 · 学科色块兜底</a:t>
+            </a:r>
+          </a:p>
+        </p:txBody>
+      </p:sp>
+      <p:sp>
+        <p:nvSpPr>
+          <p:cNvPr id="13" name="TextBox 12"/>
           <p:cNvSpPr txBox="1"/>
           <p:nvPr/>
         </p:nvSpPr>
@@ -3570,14 +3766,58 @@
       </p:sp>
       <p:sp>
         <p:nvSpPr>
-          <p:cNvPr id="5" name="Rounded Rectangle 4"/>
+          <p:cNvPr id="5" name="TextBox 4"/>
+          <p:cNvSpPr txBox="1"/>
+          <p:nvPr/>
+        </p:nvSpPr>
+        <p:spPr>
+          <a:xfrm>
+            <a:off x="640080" y="1325880"/>
+            <a:ext cx="10911535" cy="640080"/>
+          </a:xfrm>
+          <a:prstGeom prst="rect">
+            <a:avLst/>
+          </a:prstGeom>
+          <a:noFill/>
+        </p:spPr>
+        <p:txBody>
+          <a:bodyPr wrap="square" anchor="t" lIns="0" rIns="0" tIns="0" bIns="0">
+            <a:spAutoFit/>
+          </a:bodyPr>
+          <a:lstStyle/>
+          <a:p>
+            <a:pPr algn="l">
+              <a:lnSpc>
+                <a:spcPct val="145000"/>
+              </a:lnSpc>
+              <a:spcAft>
+                <a:spcPts val="400"/>
+              </a:spcAft>
+            </a:pPr>
+            <a:r>
+              <a:rPr sz="3000" b="1">
+                <a:solidFill>
+                  <a:srgbClr val="1C2A33"/>
+                </a:solidFill>
+                <a:latin typeface="楷体"/>
+                <a:ea typeface="楷体"/>
+                <a:cs typeface="楷体"/>
+              </a:rPr>
+              <a:t>四向学习目标</a:t>
+            </a:r>
+          </a:p>
+        </p:txBody>
+      </p:sp>
+      <p:sp>
+        <p:nvSpPr>
+          <p:cNvPr id="6" name="Rounded Rectangle 5"/>
           <p:cNvSpPr/>
           <p:nvPr/>
         </p:nvSpPr>
         <p:spPr>
           <a:xfrm>
-            <a:off x="640080" y="1417320"/>
-            <a:ext cx="5349240" cy="2057400"/>
+            <a:off x="640080" y="2377440"/>
+            <a:ext cx="2453563" cy="3566160"/>
           </a:xfrm>
           <a:prstGeom prst="roundRect">
             <a:avLst/>
@@ -3585,7 +3825,7 @@
           <a:solidFill>
             <a:srgbClr val="FFFFFF"/>
           </a:solidFill>
-          <a:ln w="22860">
+          <a:ln w="20320">
             <a:solidFill>
               <a:srgbClr val="B23A2A"/>
             </a:solidFill>
@@ -3616,23 +3856,113 @@
       </p:sp>
       <p:sp>
         <p:nvSpPr>
-          <p:cNvPr id="6" name="Oval 5"/>
+          <p:cNvPr id="7" name="TextBox 6"/>
+          <p:cNvSpPr txBox="1"/>
+          <p:nvPr/>
+        </p:nvSpPr>
+        <p:spPr>
+          <a:xfrm>
+            <a:off x="914400" y="2578608"/>
+            <a:ext cx="1950643" cy="822960"/>
+          </a:xfrm>
+          <a:prstGeom prst="rect">
+            <a:avLst/>
+          </a:prstGeom>
+          <a:noFill/>
+        </p:spPr>
+        <p:txBody>
+          <a:bodyPr wrap="square" anchor="t" lIns="0" rIns="0" tIns="0" bIns="0">
+            <a:spAutoFit/>
+          </a:bodyPr>
+          <a:lstStyle/>
+          <a:p>
+            <a:pPr algn="l">
+              <a:lnSpc>
+                <a:spcPct val="130000"/>
+              </a:lnSpc>
+              <a:spcAft>
+                <a:spcPts val="400"/>
+              </a:spcAft>
+            </a:pPr>
+            <a:r>
+              <a:rPr sz="1600" b="1">
+                <a:solidFill>
+                  <a:srgbClr val="B23A2A"/>
+                </a:solidFill>
+                <a:latin typeface="微软雅黑"/>
+                <a:ea typeface="微软雅黑"/>
+                <a:cs typeface="微软雅黑"/>
+              </a:rPr>
+              <a:t>语言能力</a:t>
+            </a:r>
+          </a:p>
+        </p:txBody>
+      </p:sp>
+      <p:sp>
+        <p:nvSpPr>
+          <p:cNvPr id="8" name="TextBox 7"/>
+          <p:cNvSpPr txBox="1"/>
+          <p:nvPr/>
+        </p:nvSpPr>
+        <p:spPr>
+          <a:xfrm>
+            <a:off x="868680" y="3337560"/>
+            <a:ext cx="1996363" cy="2423160"/>
+          </a:xfrm>
+          <a:prstGeom prst="rect">
+            <a:avLst/>
+          </a:prstGeom>
+          <a:noFill/>
+        </p:spPr>
+        <p:txBody>
+          <a:bodyPr wrap="square" anchor="t" lIns="0" rIns="0" tIns="0" bIns="0">
+            <a:spAutoFit/>
+          </a:bodyPr>
+          <a:lstStyle/>
+          <a:p>
+            <a:pPr algn="l">
+              <a:lnSpc>
+                <a:spcPct val="145000"/>
+              </a:lnSpc>
+              <a:spcAft>
+                <a:spcPts val="400"/>
+              </a:spcAft>
+            </a:pPr>
+            <a:r>
+              <a:rPr sz="1250" b="0">
+                <a:solidFill>
+                  <a:srgbClr val="1C2A33"/>
+                </a:solidFill>
+                <a:latin typeface="楷体"/>
+                <a:ea typeface="楷体"/>
+                <a:cs typeface="楷体"/>
+              </a:rPr>
+              <a:t>根据讲评反馈修改新诗终稿，做到意象鲜明、情感真挚、语言有节奏感。</a:t>
+            </a:r>
+          </a:p>
+        </p:txBody>
+      </p:sp>
+      <p:sp>
+        <p:nvSpPr>
+          <p:cNvPr id="9" name="Rounded Rectangle 8"/>
           <p:cNvSpPr/>
           <p:nvPr/>
         </p:nvSpPr>
         <p:spPr>
           <a:xfrm>
-            <a:off x="804672" y="1581912"/>
-            <a:ext cx="457200" cy="457200"/>
-          </a:xfrm>
-          <a:prstGeom prst="ellipse">
+            <a:off x="3459403" y="2377440"/>
+            <a:ext cx="2453563" cy="3566160"/>
+          </a:xfrm>
+          <a:prstGeom prst="roundRect">
             <a:avLst/>
           </a:prstGeom>
           <a:solidFill>
-            <a:srgbClr val="B23A2A"/>
+            <a:srgbClr val="FFFFFF"/>
           </a:solidFill>
-          <a:ln>
-            <a:noFill/>
+          <a:ln w="20320">
+            <a:solidFill>
+              <a:srgbClr val="2E7D6B"/>
+            </a:solidFill>
           </a:ln>
           <a:effectLst/>
         </p:spPr>
@@ -3660,14 +3990,14 @@
       </p:sp>
       <p:sp>
         <p:nvSpPr>
-          <p:cNvPr id="7" name="TextBox 6"/>
+          <p:cNvPr id="10" name="TextBox 9"/>
           <p:cNvSpPr txBox="1"/>
           <p:nvPr/>
         </p:nvSpPr>
         <p:spPr>
           <a:xfrm>
-            <a:off x="804672" y="1636776"/>
-            <a:ext cx="457200" cy="384048"/>
+            <a:off x="3733723" y="2578608"/>
+            <a:ext cx="1950643" cy="822960"/>
           </a:xfrm>
           <a:prstGeom prst="rect">
             <a:avLst/>
@@ -3680,31 +4010,38 @@
           </a:bodyPr>
           <a:lstStyle/>
           <a:p>
-            <a:pPr algn="ctr"/>
+            <a:pPr algn="l">
+              <a:lnSpc>
+                <a:spcPct val="130000"/>
+              </a:lnSpc>
+              <a:spcAft>
+                <a:spcPts val="400"/>
+              </a:spcAft>
+            </a:pPr>
             <a:r>
               <a:rPr sz="1600" b="1">
                 <a:solidFill>
-                  <a:srgbClr val="FFFFFF"/>
+                  <a:srgbClr val="2E7D6B"/>
                 </a:solidFill>
                 <a:latin typeface="微软雅黑"/>
                 <a:ea typeface="微软雅黑"/>
                 <a:cs typeface="微软雅黑"/>
               </a:rPr>
-              <a:t>1</a:t>
-            </a:r>
-          </a:p>
-        </p:txBody>
-      </p:sp>
-      <p:sp>
-        <p:nvSpPr>
-          <p:cNvPr id="8" name="TextBox 7"/>
+              <a:t>文化意识</a:t>
+            </a:r>
+          </a:p>
+        </p:txBody>
+      </p:sp>
+      <p:sp>
+        <p:nvSpPr>
+          <p:cNvPr id="11" name="TextBox 10"/>
           <p:cNvSpPr txBox="1"/>
           <p:nvPr/>
         </p:nvSpPr>
         <p:spPr>
           <a:xfrm>
-            <a:off x="1371600" y="1527048"/>
-            <a:ext cx="4434840" cy="457200"/>
+            <a:off x="3688003" y="3337560"/>
+            <a:ext cx="1996363" cy="2423160"/>
           </a:xfrm>
           <a:prstGeom prst="rect">
             <a:avLst/>
@@ -3719,52 +4056,14 @@
           <a:p>
             <a:pPr algn="l">
               <a:lnSpc>
-                <a:spcPct val="110000"/>
+                <a:spcPct val="145000"/>
               </a:lnSpc>
-            </a:pPr>
-            <a:r>
-              <a:rPr sz="1600" b="1">
-                <a:solidFill>
-                  <a:srgbClr val="1C2A33"/>
-                </a:solidFill>
-                <a:latin typeface="微软雅黑"/>
-                <a:ea typeface="微软雅黑"/>
-                <a:cs typeface="微软雅黑"/>
-              </a:rPr>
-              <a:t>目标</a:t>
-            </a:r>
-          </a:p>
-        </p:txBody>
-      </p:sp>
-      <p:sp>
-        <p:nvSpPr>
-          <p:cNvPr id="9" name="TextBox 8"/>
-          <p:cNvSpPr txBox="1"/>
-          <p:nvPr/>
-        </p:nvSpPr>
-        <p:spPr>
-          <a:xfrm>
-            <a:off x="1371600" y="1965960"/>
-            <a:ext cx="4434840" cy="1417320"/>
-          </a:xfrm>
-          <a:prstGeom prst="rect">
-            <a:avLst/>
-          </a:prstGeom>
-          <a:noFill/>
-        </p:spPr>
-        <p:txBody>
-          <a:bodyPr wrap="square" anchor="t" lIns="0" rIns="0" tIns="0" bIns="0">
-            <a:spAutoFit/>
-          </a:bodyPr>
-          <a:lstStyle/>
-          <a:p>
-            <a:pPr algn="l">
-              <a:lnSpc>
-                <a:spcPct val="128000"/>
-              </a:lnSpc>
-            </a:pPr>
-            <a:r>
-              <a:rPr sz="1400" b="0">
+              <a:spcAft>
+                <a:spcPts val="400"/>
+              </a:spcAft>
+            </a:pPr>
+            <a:r>
+              <a:rPr sz="1250" b="0">
                 <a:solidFill>
                   <a:srgbClr val="1C2A33"/>
                 </a:solidFill>
@@ -3772,21 +4071,21 @@
                 <a:ea typeface="楷体"/>
                 <a:cs typeface="楷体"/>
               </a:rPr>
-              <a:t>语言能力：根据讲评反馈修改新诗终稿，做到意象鲜明、情感真挚、语言有节奏感。</a:t>
-            </a:r>
-          </a:p>
-        </p:txBody>
-      </p:sp>
-      <p:sp>
-        <p:nvSpPr>
-          <p:cNvPr id="10" name="Rounded Rectangle 9"/>
+              <a:t>在公开讲评中学会欣赏他人作品，培养尊重与包容的文学交流态度。</a:t>
+            </a:r>
+          </a:p>
+        </p:txBody>
+      </p:sp>
+      <p:sp>
+        <p:nvSpPr>
+          <p:cNvPr id="12" name="Rounded Rectangle 11"/>
           <p:cNvSpPr/>
           <p:nvPr/>
         </p:nvSpPr>
         <p:spPr>
           <a:xfrm>
-            <a:off x="6263640" y="1417320"/>
-            <a:ext cx="5349240" cy="2057400"/>
+            <a:off x="6278727" y="2377440"/>
+            <a:ext cx="2453563" cy="3566160"/>
           </a:xfrm>
           <a:prstGeom prst="roundRect">
             <a:avLst/>
@@ -3794,9 +4093,9 @@
           <a:solidFill>
             <a:srgbClr val="FFFFFF"/>
           </a:solidFill>
-          <a:ln w="22860">
+          <a:ln w="20320">
             <a:solidFill>
-              <a:srgbClr val="B23A2A"/>
+              <a:srgbClr val="C8A86B"/>
             </a:solidFill>
           </a:ln>
           <a:effectLst/>
@@ -3825,23 +4124,113 @@
       </p:sp>
       <p:sp>
         <p:nvSpPr>
-          <p:cNvPr id="11" name="Oval 10"/>
+          <p:cNvPr id="13" name="TextBox 12"/>
+          <p:cNvSpPr txBox="1"/>
+          <p:nvPr/>
+        </p:nvSpPr>
+        <p:spPr>
+          <a:xfrm>
+            <a:off x="6553047" y="2578608"/>
+            <a:ext cx="1950643" cy="822960"/>
+          </a:xfrm>
+          <a:prstGeom prst="rect">
+            <a:avLst/>
+          </a:prstGeom>
+          <a:noFill/>
+        </p:spPr>
+        <p:txBody>
+          <a:bodyPr wrap="square" anchor="t" lIns="0" rIns="0" tIns="0" bIns="0">
+            <a:spAutoFit/>
+          </a:bodyPr>
+          <a:lstStyle/>
+          <a:p>
+            <a:pPr algn="l">
+              <a:lnSpc>
+                <a:spcPct val="130000"/>
+              </a:lnSpc>
+              <a:spcAft>
+                <a:spcPts val="400"/>
+              </a:spcAft>
+            </a:pPr>
+            <a:r>
+              <a:rPr sz="1600" b="1">
+                <a:solidFill>
+                  <a:srgbClr val="C8A86B"/>
+                </a:solidFill>
+                <a:latin typeface="微软雅黑"/>
+                <a:ea typeface="微软雅黑"/>
+                <a:cs typeface="微软雅黑"/>
+              </a:rPr>
+              <a:t>思维品质</a:t>
+            </a:r>
+          </a:p>
+        </p:txBody>
+      </p:sp>
+      <p:sp>
+        <p:nvSpPr>
+          <p:cNvPr id="14" name="TextBox 13"/>
+          <p:cNvSpPr txBox="1"/>
+          <p:nvPr/>
+        </p:nvSpPr>
+        <p:spPr>
+          <a:xfrm>
+            <a:off x="6507327" y="3337560"/>
+            <a:ext cx="1996363" cy="2423160"/>
+          </a:xfrm>
+          <a:prstGeom prst="rect">
+            <a:avLst/>
+          </a:prstGeom>
+          <a:noFill/>
+        </p:spPr>
+        <p:txBody>
+          <a:bodyPr wrap="square" anchor="t" lIns="0" rIns="0" tIns="0" bIns="0">
+            <a:spAutoFit/>
+          </a:bodyPr>
+          <a:lstStyle/>
+          <a:p>
+            <a:pPr algn="l">
+              <a:lnSpc>
+                <a:spcPct val="145000"/>
+              </a:lnSpc>
+              <a:spcAft>
+                <a:spcPts val="400"/>
+              </a:spcAft>
+            </a:pPr>
+            <a:r>
+              <a:rPr sz="1250" b="0">
+                <a:solidFill>
+                  <a:srgbClr val="1C2A33"/>
+                </a:solidFill>
+                <a:latin typeface="楷体"/>
+                <a:ea typeface="楷体"/>
+                <a:cs typeface="楷体"/>
+              </a:rPr>
+              <a:t>通过分析3种典型习作的优缺点，培养评价思维与自我修订能力。</a:t>
+            </a:r>
+          </a:p>
+        </p:txBody>
+      </p:sp>
+      <p:sp>
+        <p:nvSpPr>
+          <p:cNvPr id="15" name="Rounded Rectangle 14"/>
           <p:cNvSpPr/>
           <p:nvPr/>
         </p:nvSpPr>
         <p:spPr>
           <a:xfrm>
-            <a:off x="6428232" y="1581912"/>
-            <a:ext cx="457200" cy="457200"/>
-          </a:xfrm>
-          <a:prstGeom prst="ellipse">
+            <a:off x="9098051" y="2377440"/>
+            <a:ext cx="2453563" cy="3566160"/>
+          </a:xfrm>
+          <a:prstGeom prst="roundRect">
             <a:avLst/>
           </a:prstGeom>
           <a:solidFill>
-            <a:srgbClr val="B23A2A"/>
+            <a:srgbClr val="FFFFFF"/>
           </a:solidFill>
-          <a:ln>
-            <a:noFill/>
+          <a:ln w="20320">
+            <a:solidFill>
+              <a:srgbClr val="6B6258"/>
+            </a:solidFill>
           </a:ln>
           <a:effectLst/>
         </p:spPr>
@@ -3869,14 +4258,14 @@
       </p:sp>
       <p:sp>
         <p:nvSpPr>
-          <p:cNvPr id="12" name="TextBox 11"/>
+          <p:cNvPr id="16" name="TextBox 15"/>
           <p:cNvSpPr txBox="1"/>
           <p:nvPr/>
         </p:nvSpPr>
         <p:spPr>
           <a:xfrm>
-            <a:off x="6428232" y="1636776"/>
-            <a:ext cx="457200" cy="384048"/>
+            <a:off x="9372371" y="2578608"/>
+            <a:ext cx="1950643" cy="822960"/>
           </a:xfrm>
           <a:prstGeom prst="rect">
             <a:avLst/>
@@ -3889,31 +4278,38 @@
           </a:bodyPr>
           <a:lstStyle/>
           <a:p>
-            <a:pPr algn="ctr"/>
+            <a:pPr algn="l">
+              <a:lnSpc>
+                <a:spcPct val="130000"/>
+              </a:lnSpc>
+              <a:spcAft>
+                <a:spcPts val="400"/>
+              </a:spcAft>
+            </a:pPr>
             <a:r>
               <a:rPr sz="1600" b="1">
                 <a:solidFill>
-                  <a:srgbClr val="FFFFFF"/>
+                  <a:srgbClr val="6B6258"/>
                 </a:solidFill>
                 <a:latin typeface="微软雅黑"/>
                 <a:ea typeface="微软雅黑"/>
                 <a:cs typeface="微软雅黑"/>
               </a:rPr>
-              <a:t>2</a:t>
-            </a:r>
-          </a:p>
-        </p:txBody>
-      </p:sp>
-      <p:sp>
-        <p:nvSpPr>
-          <p:cNvPr id="13" name="TextBox 12"/>
+              <a:t>学习能力</a:t>
+            </a:r>
+          </a:p>
+        </p:txBody>
+      </p:sp>
+      <p:sp>
+        <p:nvSpPr>
+          <p:cNvPr id="17" name="TextBox 16"/>
           <p:cNvSpPr txBox="1"/>
           <p:nvPr/>
         </p:nvSpPr>
         <p:spPr>
           <a:xfrm>
-            <a:off x="6995160" y="1527048"/>
-            <a:ext cx="4434840" cy="457200"/>
+            <a:off x="9326651" y="3337560"/>
+            <a:ext cx="1996363" cy="2423160"/>
           </a:xfrm>
           <a:prstGeom prst="rect">
             <a:avLst/>
@@ -3928,52 +4324,14 @@
           <a:p>
             <a:pPr algn="l">
               <a:lnSpc>
-                <a:spcPct val="110000"/>
+                <a:spcPct val="145000"/>
               </a:lnSpc>
-            </a:pPr>
-            <a:r>
-              <a:rPr sz="1600" b="1">
-                <a:solidFill>
-                  <a:srgbClr val="1C2A33"/>
-                </a:solidFill>
-                <a:latin typeface="微软雅黑"/>
-                <a:ea typeface="微软雅黑"/>
-                <a:cs typeface="微软雅黑"/>
-              </a:rPr>
-              <a:t>目标</a:t>
-            </a:r>
-          </a:p>
-        </p:txBody>
-      </p:sp>
-      <p:sp>
-        <p:nvSpPr>
-          <p:cNvPr id="14" name="TextBox 13"/>
-          <p:cNvSpPr txBox="1"/>
-          <p:nvPr/>
-        </p:nvSpPr>
-        <p:spPr>
-          <a:xfrm>
-            <a:off x="6995160" y="1965960"/>
-            <a:ext cx="4434840" cy="1417320"/>
-          </a:xfrm>
-          <a:prstGeom prst="rect">
-            <a:avLst/>
-          </a:prstGeom>
-          <a:noFill/>
-        </p:spPr>
-        <p:txBody>
-          <a:bodyPr wrap="square" anchor="t" lIns="0" rIns="0" tIns="0" bIns="0">
-            <a:spAutoFit/>
-          </a:bodyPr>
-          <a:lstStyle/>
-          <a:p>
-            <a:pPr algn="l">
-              <a:lnSpc>
-                <a:spcPct val="128000"/>
-              </a:lnSpc>
-            </a:pPr>
-            <a:r>
-              <a:rPr sz="1400" b="0">
+              <a:spcAft>
+                <a:spcPts val="400"/>
+              </a:spcAft>
+            </a:pPr>
+            <a:r>
+              <a:rPr sz="1250" b="0">
                 <a:solidFill>
                   <a:srgbClr val="1C2A33"/>
                 </a:solidFill>
@@ -3981,134 +4339,7 @@
                 <a:ea typeface="楷体"/>
                 <a:cs typeface="楷体"/>
               </a:rPr>
-              <a:t>文化意识：在公开讲评中学会欣赏他人作品，培养尊重与包容的文学交流态度。</a:t>
-            </a:r>
-          </a:p>
-        </p:txBody>
-      </p:sp>
-      <p:sp>
-        <p:nvSpPr>
-          <p:cNvPr id="15" name="Rounded Rectangle 14"/>
-          <p:cNvSpPr/>
-          <p:nvPr/>
-        </p:nvSpPr>
-        <p:spPr>
-          <a:xfrm>
-            <a:off x="640080" y="3703320"/>
-            <a:ext cx="5349240" cy="2057400"/>
-          </a:xfrm>
-          <a:prstGeom prst="roundRect">
-            <a:avLst/>
-          </a:prstGeom>
-          <a:solidFill>
-            <a:srgbClr val="FFFFFF"/>
-          </a:solidFill>
-          <a:ln w="22860">
-            <a:solidFill>
-              <a:srgbClr val="B23A2A"/>
-            </a:solidFill>
-          </a:ln>
-          <a:effectLst/>
-        </p:spPr>
-        <p:style>
-          <a:lnRef idx="1">
-            <a:schemeClr val="accent1"/>
-          </a:lnRef>
-          <a:fillRef idx="3">
-            <a:schemeClr val="accent1"/>
-          </a:fillRef>
-          <a:effectRef idx="2">
-            <a:schemeClr val="accent1"/>
-          </a:effectRef>
-          <a:fontRef idx="minor">
-            <a:schemeClr val="lt1"/>
-          </a:fontRef>
-        </p:style>
-        <p:txBody>
-          <a:bodyPr rtlCol="0" anchor="ctr"/>
-          <a:lstStyle/>
-          <a:p>
-            <a:pPr algn="ctr"/>
-          </a:p>
-        </p:txBody>
-      </p:sp>
-      <p:sp>
-        <p:nvSpPr>
-          <p:cNvPr id="16" name="Oval 15"/>
-          <p:cNvSpPr/>
-          <p:nvPr/>
-        </p:nvSpPr>
-        <p:spPr>
-          <a:xfrm>
-            <a:off x="804672" y="3867912"/>
-            <a:ext cx="457200" cy="457200"/>
-          </a:xfrm>
-          <a:prstGeom prst="ellipse">
-            <a:avLst/>
-          </a:prstGeom>
-          <a:solidFill>
-            <a:srgbClr val="B23A2A"/>
-          </a:solidFill>
-          <a:ln>
-            <a:noFill/>
-          </a:ln>
-          <a:effectLst/>
-        </p:spPr>
-        <p:style>
-          <a:lnRef idx="1">
-            <a:schemeClr val="accent1"/>
-          </a:lnRef>
-          <a:fillRef idx="3">
-            <a:schemeClr val="accent1"/>
-          </a:fillRef>
-          <a:effectRef idx="2">
-            <a:schemeClr val="accent1"/>
-          </a:effectRef>
-          <a:fontRef idx="minor">
-            <a:schemeClr val="lt1"/>
-          </a:fontRef>
-        </p:style>
-        <p:txBody>
-          <a:bodyPr rtlCol="0" anchor="ctr"/>
-          <a:lstStyle/>
-          <a:p>
-            <a:pPr algn="ctr"/>
-          </a:p>
-        </p:txBody>
-      </p:sp>
-      <p:sp>
-        <p:nvSpPr>
-          <p:cNvPr id="17" name="TextBox 16"/>
-          <p:cNvSpPr txBox="1"/>
-          <p:nvPr/>
-        </p:nvSpPr>
-        <p:spPr>
-          <a:xfrm>
-            <a:off x="804672" y="3922776"/>
-            <a:ext cx="457200" cy="384048"/>
-          </a:xfrm>
-          <a:prstGeom prst="rect">
-            <a:avLst/>
-          </a:prstGeom>
-          <a:noFill/>
-        </p:spPr>
-        <p:txBody>
-          <a:bodyPr wrap="square" anchor="t" lIns="0" rIns="0" tIns="0" bIns="0">
-            <a:spAutoFit/>
-          </a:bodyPr>
-          <a:lstStyle/>
-          <a:p>
-            <a:pPr algn="ctr"/>
-            <a:r>
-              <a:rPr sz="1600" b="1">
-                <a:solidFill>
-                  <a:srgbClr val="FFFFFF"/>
-                </a:solidFill>
-                <a:latin typeface="微软雅黑"/>
-                <a:ea typeface="微软雅黑"/>
-                <a:cs typeface="微软雅黑"/>
-              </a:rPr>
-              <a:t>3</a:t>
+              <a:t>内化「好诗三标准」（意象鲜明·情感真挚·语言有张力），能独立评价和修改诗歌。</a:t>
             </a:r>
           </a:p>
         </p:txBody>
@@ -4116,297 +4347,6 @@
       <p:sp>
         <p:nvSpPr>
           <p:cNvPr id="18" name="TextBox 17"/>
-          <p:cNvSpPr txBox="1"/>
-          <p:nvPr/>
-        </p:nvSpPr>
-        <p:spPr>
-          <a:xfrm>
-            <a:off x="1371600" y="3813048"/>
-            <a:ext cx="4434840" cy="457200"/>
-          </a:xfrm>
-          <a:prstGeom prst="rect">
-            <a:avLst/>
-          </a:prstGeom>
-          <a:noFill/>
-        </p:spPr>
-        <p:txBody>
-          <a:bodyPr wrap="square" anchor="t" lIns="0" rIns="0" tIns="0" bIns="0">
-            <a:spAutoFit/>
-          </a:bodyPr>
-          <a:lstStyle/>
-          <a:p>
-            <a:pPr algn="l">
-              <a:lnSpc>
-                <a:spcPct val="110000"/>
-              </a:lnSpc>
-            </a:pPr>
-            <a:r>
-              <a:rPr sz="1600" b="1">
-                <a:solidFill>
-                  <a:srgbClr val="1C2A33"/>
-                </a:solidFill>
-                <a:latin typeface="微软雅黑"/>
-                <a:ea typeface="微软雅黑"/>
-                <a:cs typeface="微软雅黑"/>
-              </a:rPr>
-              <a:t>目标</a:t>
-            </a:r>
-          </a:p>
-        </p:txBody>
-      </p:sp>
-      <p:sp>
-        <p:nvSpPr>
-          <p:cNvPr id="19" name="TextBox 18"/>
-          <p:cNvSpPr txBox="1"/>
-          <p:nvPr/>
-        </p:nvSpPr>
-        <p:spPr>
-          <a:xfrm>
-            <a:off x="1371600" y="4251960"/>
-            <a:ext cx="4434840" cy="1417320"/>
-          </a:xfrm>
-          <a:prstGeom prst="rect">
-            <a:avLst/>
-          </a:prstGeom>
-          <a:noFill/>
-        </p:spPr>
-        <p:txBody>
-          <a:bodyPr wrap="square" anchor="t" lIns="0" rIns="0" tIns="0" bIns="0">
-            <a:spAutoFit/>
-          </a:bodyPr>
-          <a:lstStyle/>
-          <a:p>
-            <a:pPr algn="l">
-              <a:lnSpc>
-                <a:spcPct val="128000"/>
-              </a:lnSpc>
-            </a:pPr>
-            <a:r>
-              <a:rPr sz="1400" b="0">
-                <a:solidFill>
-                  <a:srgbClr val="1C2A33"/>
-                </a:solidFill>
-                <a:latin typeface="楷体"/>
-                <a:ea typeface="楷体"/>
-                <a:cs typeface="楷体"/>
-              </a:rPr>
-              <a:t>思维品质：通过分析3种典型习作的优缺点，培养评价思维与自我修订能力。</a:t>
-            </a:r>
-          </a:p>
-        </p:txBody>
-      </p:sp>
-      <p:sp>
-        <p:nvSpPr>
-          <p:cNvPr id="20" name="Rounded Rectangle 19"/>
-          <p:cNvSpPr/>
-          <p:nvPr/>
-        </p:nvSpPr>
-        <p:spPr>
-          <a:xfrm>
-            <a:off x="6263640" y="3703320"/>
-            <a:ext cx="5349240" cy="2057400"/>
-          </a:xfrm>
-          <a:prstGeom prst="roundRect">
-            <a:avLst/>
-          </a:prstGeom>
-          <a:solidFill>
-            <a:srgbClr val="FFFFFF"/>
-          </a:solidFill>
-          <a:ln w="22860">
-            <a:solidFill>
-              <a:srgbClr val="B23A2A"/>
-            </a:solidFill>
-          </a:ln>
-          <a:effectLst/>
-        </p:spPr>
-        <p:style>
-          <a:lnRef idx="1">
-            <a:schemeClr val="accent1"/>
-          </a:lnRef>
-          <a:fillRef idx="3">
-            <a:schemeClr val="accent1"/>
-          </a:fillRef>
-          <a:effectRef idx="2">
-            <a:schemeClr val="accent1"/>
-          </a:effectRef>
-          <a:fontRef idx="minor">
-            <a:schemeClr val="lt1"/>
-          </a:fontRef>
-        </p:style>
-        <p:txBody>
-          <a:bodyPr rtlCol="0" anchor="ctr"/>
-          <a:lstStyle/>
-          <a:p>
-            <a:pPr algn="ctr"/>
-          </a:p>
-        </p:txBody>
-      </p:sp>
-      <p:sp>
-        <p:nvSpPr>
-          <p:cNvPr id="21" name="Oval 20"/>
-          <p:cNvSpPr/>
-          <p:nvPr/>
-        </p:nvSpPr>
-        <p:spPr>
-          <a:xfrm>
-            <a:off x="6428232" y="3867912"/>
-            <a:ext cx="457200" cy="457200"/>
-          </a:xfrm>
-          <a:prstGeom prst="ellipse">
-            <a:avLst/>
-          </a:prstGeom>
-          <a:solidFill>
-            <a:srgbClr val="B23A2A"/>
-          </a:solidFill>
-          <a:ln>
-            <a:noFill/>
-          </a:ln>
-          <a:effectLst/>
-        </p:spPr>
-        <p:style>
-          <a:lnRef idx="1">
-            <a:schemeClr val="accent1"/>
-          </a:lnRef>
-          <a:fillRef idx="3">
-            <a:schemeClr val="accent1"/>
-          </a:fillRef>
-          <a:effectRef idx="2">
-            <a:schemeClr val="accent1"/>
-          </a:effectRef>
-          <a:fontRef idx="minor">
-            <a:schemeClr val="lt1"/>
-          </a:fontRef>
-        </p:style>
-        <p:txBody>
-          <a:bodyPr rtlCol="0" anchor="ctr"/>
-          <a:lstStyle/>
-          <a:p>
-            <a:pPr algn="ctr"/>
-          </a:p>
-        </p:txBody>
-      </p:sp>
-      <p:sp>
-        <p:nvSpPr>
-          <p:cNvPr id="22" name="TextBox 21"/>
-          <p:cNvSpPr txBox="1"/>
-          <p:nvPr/>
-        </p:nvSpPr>
-        <p:spPr>
-          <a:xfrm>
-            <a:off x="6428232" y="3922776"/>
-            <a:ext cx="457200" cy="384048"/>
-          </a:xfrm>
-          <a:prstGeom prst="rect">
-            <a:avLst/>
-          </a:prstGeom>
-          <a:noFill/>
-        </p:spPr>
-        <p:txBody>
-          <a:bodyPr wrap="square" anchor="t" lIns="0" rIns="0" tIns="0" bIns="0">
-            <a:spAutoFit/>
-          </a:bodyPr>
-          <a:lstStyle/>
-          <a:p>
-            <a:pPr algn="ctr"/>
-            <a:r>
-              <a:rPr sz="1600" b="1">
-                <a:solidFill>
-                  <a:srgbClr val="FFFFFF"/>
-                </a:solidFill>
-                <a:latin typeface="微软雅黑"/>
-                <a:ea typeface="微软雅黑"/>
-                <a:cs typeface="微软雅黑"/>
-              </a:rPr>
-              <a:t>4</a:t>
-            </a:r>
-          </a:p>
-        </p:txBody>
-      </p:sp>
-      <p:sp>
-        <p:nvSpPr>
-          <p:cNvPr id="23" name="TextBox 22"/>
-          <p:cNvSpPr txBox="1"/>
-          <p:nvPr/>
-        </p:nvSpPr>
-        <p:spPr>
-          <a:xfrm>
-            <a:off x="6995160" y="3813048"/>
-            <a:ext cx="4434840" cy="457200"/>
-          </a:xfrm>
-          <a:prstGeom prst="rect">
-            <a:avLst/>
-          </a:prstGeom>
-          <a:noFill/>
-        </p:spPr>
-        <p:txBody>
-          <a:bodyPr wrap="square" anchor="t" lIns="0" rIns="0" tIns="0" bIns="0">
-            <a:spAutoFit/>
-          </a:bodyPr>
-          <a:lstStyle/>
-          <a:p>
-            <a:pPr algn="l">
-              <a:lnSpc>
-                <a:spcPct val="110000"/>
-              </a:lnSpc>
-            </a:pPr>
-            <a:r>
-              <a:rPr sz="1600" b="1">
-                <a:solidFill>
-                  <a:srgbClr val="1C2A33"/>
-                </a:solidFill>
-                <a:latin typeface="微软雅黑"/>
-                <a:ea typeface="微软雅黑"/>
-                <a:cs typeface="微软雅黑"/>
-              </a:rPr>
-              <a:t>目标</a:t>
-            </a:r>
-          </a:p>
-        </p:txBody>
-      </p:sp>
-      <p:sp>
-        <p:nvSpPr>
-          <p:cNvPr id="24" name="TextBox 23"/>
-          <p:cNvSpPr txBox="1"/>
-          <p:nvPr/>
-        </p:nvSpPr>
-        <p:spPr>
-          <a:xfrm>
-            <a:off x="6995160" y="4251960"/>
-            <a:ext cx="4434840" cy="1417320"/>
-          </a:xfrm>
-          <a:prstGeom prst="rect">
-            <a:avLst/>
-          </a:prstGeom>
-          <a:noFill/>
-        </p:spPr>
-        <p:txBody>
-          <a:bodyPr wrap="square" anchor="t" lIns="0" rIns="0" tIns="0" bIns="0">
-            <a:spAutoFit/>
-          </a:bodyPr>
-          <a:lstStyle/>
-          <a:p>
-            <a:pPr algn="l">
-              <a:lnSpc>
-                <a:spcPct val="128000"/>
-              </a:lnSpc>
-            </a:pPr>
-            <a:r>
-              <a:rPr sz="1200" b="0">
-                <a:solidFill>
-                  <a:srgbClr val="1C2A33"/>
-                </a:solidFill>
-                <a:latin typeface="楷体"/>
-                <a:ea typeface="楷体"/>
-                <a:cs typeface="楷体"/>
-              </a:rPr>
-              <a:t>学习能力：内化「好诗三标准」（意象鲜明·情感真挚·语言有张力），能独立评价和修改诗歌。</a:t>
-            </a:r>
-          </a:p>
-        </p:txBody>
-      </p:sp>
-      <p:sp>
-        <p:nvSpPr>
-          <p:cNvPr id="25" name="TextBox 24"/>
           <p:cNvSpPr txBox="1"/>
           <p:nvPr/>
         </p:nvSpPr>
@@ -4533,13 +4473,13 @@
             <a:r>
               <a:rPr sz="1300" b="1">
                 <a:solidFill>
-                  <a:srgbClr val="2E7D6B"/>
+                  <a:srgbClr val="B23A2A"/>
                 </a:solidFill>
                 <a:latin typeface="微软雅黑"/>
                 <a:ea typeface="微软雅黑"/>
                 <a:cs typeface="微软雅黑"/>
               </a:rPr>
-              <a:t>课文背景</a:t>
+              <a:t>背景 · 权威调研</a:t>
             </a:r>
           </a:p>
         </p:txBody>
@@ -4559,7 +4499,7 @@
             <a:avLst/>
           </a:prstGeom>
           <a:solidFill>
-            <a:srgbClr val="2E7D6B"/>
+            <a:srgbClr val="B23A2A"/>
           </a:solidFill>
           <a:ln>
             <a:noFill/>
@@ -4596,8 +4536,52 @@
         </p:nvSpPr>
         <p:spPr>
           <a:xfrm>
-            <a:off x="640080" y="1508760"/>
-            <a:ext cx="6766560" cy="4572000"/>
+            <a:off x="640080" y="1325880"/>
+            <a:ext cx="10911535" cy="548640"/>
+          </a:xfrm>
+          <a:prstGeom prst="rect">
+            <a:avLst/>
+          </a:prstGeom>
+          <a:noFill/>
+        </p:spPr>
+        <p:txBody>
+          <a:bodyPr wrap="square" anchor="t" lIns="0" rIns="0" tIns="0" bIns="0">
+            <a:spAutoFit/>
+          </a:bodyPr>
+          <a:lstStyle/>
+          <a:p>
+            <a:pPr algn="l">
+              <a:lnSpc>
+                <a:spcPct val="145000"/>
+              </a:lnSpc>
+              <a:spcAft>
+                <a:spcPts val="400"/>
+              </a:spcAft>
+            </a:pPr>
+            <a:r>
+              <a:rPr sz="2600" b="1">
+                <a:solidFill>
+                  <a:srgbClr val="1C2A33"/>
+                </a:solidFill>
+                <a:latin typeface="楷体"/>
+                <a:ea typeface="楷体"/>
+                <a:cs typeface="楷体"/>
+              </a:rPr>
+              <a:t>课文定位与资料来源</a:t>
+            </a:r>
+          </a:p>
+        </p:txBody>
+      </p:sp>
+      <p:sp>
+        <p:nvSpPr>
+          <p:cNvPr id="6" name="TextBox 5"/>
+          <p:cNvSpPr txBox="1"/>
+          <p:nvPr/>
+        </p:nvSpPr>
+        <p:spPr>
+          <a:xfrm>
+            <a:off x="640080" y="2011680"/>
+            <a:ext cx="5227167" cy="4480560"/>
           </a:xfrm>
           <a:prstGeom prst="rect">
             <a:avLst/>
@@ -4615,11 +4599,11 @@
                 <a:spcPct val="150000"/>
               </a:lnSpc>
               <a:spcAft>
-                <a:spcPts val="600"/>
-              </a:spcAft>
-            </a:pPr>
-            <a:r>
-              <a:rPr sz="1600" b="0">
+                <a:spcPts val="800"/>
+              </a:spcAft>
+            </a:pPr>
+            <a:r>
+              <a:rPr sz="1300" b="0">
                 <a:solidFill>
                   <a:srgbClr val="1C2A33"/>
                 </a:solidFill>
@@ -4627,46 +4611,125 @@
                 <a:ea typeface="楷体"/>
                 <a:cs typeface="楷体"/>
               </a:rPr>
-              <a:t>本课为第一单元第七课时，承接第六课时「学写新诗」的初稿与互评，进入修改提升与公开讲评环节。讲评选取3种典型习作：①意象清晰但语言平淡型；②情感强烈但意象模糊型；③意象与情感俱佳型。通过对比讲评，让学生在「看别人的诗改自己的诗」中提升写作意识。同时布置单元学习任务的总结准备。</a:t>
-            </a:r>
-          </a:p>
-        </p:txBody>
-      </p:sp>
-      <p:pic>
-        <p:nvPicPr>
-          <p:cNvPr id="6" name="Picture 5" descr="typewriter.jpg"/>
-          <p:cNvPicPr>
-            <a:picLocks noChangeAspect="1"/>
-          </p:cNvPicPr>
-          <p:nvPr/>
-        </p:nvPicPr>
-        <p:blipFill>
-          <a:blip r:embed="rId2"/>
-          <a:srcRect l="5860" r="5860"/>
-          <a:stretch>
-            <a:fillRect/>
-          </a:stretch>
-        </p:blipFill>
-        <p:spPr>
-          <a:xfrm>
-            <a:off x="8046720" y="1508760"/>
-            <a:ext cx="4114800" cy="3108960"/>
-          </a:xfrm>
-          <a:prstGeom prst="rect">
-            <a:avLst/>
-          </a:prstGeom>
-        </p:spPr>
-      </p:pic>
-      <p:sp>
-        <p:nvSpPr>
-          <p:cNvPr id="7" name="TextBox 6"/>
+              <a:t>本课为第一单元第七课时，承接第六课时「学写新诗」的初稿与互评，进入修改提升与公开讲评环节。</a:t>
+            </a:r>
+          </a:p>
+          <a:p>
+            <a:pPr algn="l">
+              <a:lnSpc>
+                <a:spcPct val="150000"/>
+              </a:lnSpc>
+              <a:spcAft>
+                <a:spcPts val="800"/>
+              </a:spcAft>
+            </a:pPr>
+            <a:r>
+              <a:rPr sz="1300" b="0">
+                <a:solidFill>
+                  <a:srgbClr val="1C2A33"/>
+                </a:solidFill>
+                <a:latin typeface="楷体"/>
+                <a:ea typeface="楷体"/>
+                <a:cs typeface="楷体"/>
+              </a:rPr>
+              <a:t>讲评选取3种典型习作：①意象清晰但语言平淡型；②情感强烈但意象模糊型；③意象与情感俱佳型。</a:t>
+            </a:r>
+          </a:p>
+          <a:p>
+            <a:pPr algn="l">
+              <a:lnSpc>
+                <a:spcPct val="150000"/>
+              </a:lnSpc>
+              <a:spcAft>
+                <a:spcPts val="800"/>
+              </a:spcAft>
+            </a:pPr>
+            <a:r>
+              <a:rPr sz="1300" b="0">
+                <a:solidFill>
+                  <a:srgbClr val="1C2A33"/>
+                </a:solidFill>
+                <a:latin typeface="楷体"/>
+                <a:ea typeface="楷体"/>
+                <a:cs typeface="楷体"/>
+              </a:rPr>
+              <a:t>通过对比讲评，让学生在「看别人的诗改自己的诗」中提升写作意识。</a:t>
+            </a:r>
+          </a:p>
+          <a:p>
+            <a:pPr algn="l">
+              <a:lnSpc>
+                <a:spcPct val="150000"/>
+              </a:lnSpc>
+              <a:spcAft>
+                <a:spcPts val="800"/>
+              </a:spcAft>
+            </a:pPr>
+            <a:r>
+              <a:rPr sz="1300" b="0">
+                <a:solidFill>
+                  <a:srgbClr val="1C2A33"/>
+                </a:solidFill>
+                <a:latin typeface="楷体"/>
+                <a:ea typeface="楷体"/>
+                <a:cs typeface="楷体"/>
+              </a:rPr>
+              <a:t>同时布置单元学习任务的总结准备。</a:t>
+            </a:r>
+          </a:p>
+        </p:txBody>
+      </p:sp>
+      <p:sp>
+        <p:nvSpPr>
+          <p:cNvPr id="7" name="Rounded Rectangle 6"/>
+          <p:cNvSpPr/>
+          <p:nvPr/>
+        </p:nvSpPr>
+        <p:spPr>
+          <a:xfrm>
+            <a:off x="6324447" y="2011680"/>
+            <a:ext cx="5227167" cy="4480560"/>
+          </a:xfrm>
+          <a:prstGeom prst="roundRect">
+            <a:avLst/>
+          </a:prstGeom>
+          <a:solidFill>
+            <a:srgbClr val="1C2A33"/>
+          </a:solidFill>
+          <a:effectLst/>
+        </p:spPr>
+        <p:style>
+          <a:lnRef idx="1">
+            <a:schemeClr val="accent1"/>
+          </a:lnRef>
+          <a:fillRef idx="3">
+            <a:schemeClr val="accent1"/>
+          </a:fillRef>
+          <a:effectRef idx="2">
+            <a:schemeClr val="accent1"/>
+          </a:effectRef>
+          <a:fontRef idx="minor">
+            <a:schemeClr val="lt1"/>
+          </a:fontRef>
+        </p:style>
+        <p:txBody>
+          <a:bodyPr rtlCol="0" anchor="ctr"/>
+          <a:lstStyle/>
+          <a:p>
+            <a:pPr algn="ctr"/>
+          </a:p>
+        </p:txBody>
+      </p:sp>
+      <p:sp>
+        <p:nvSpPr>
+          <p:cNvPr id="8" name="TextBox 7"/>
           <p:cNvSpPr txBox="1"/>
           <p:nvPr/>
         </p:nvSpPr>
         <p:spPr>
           <a:xfrm>
-            <a:off x="8046720" y="4663440"/>
-            <a:ext cx="4114800" cy="365760"/>
+            <a:off x="6598767" y="2194560"/>
+            <a:ext cx="4678527" cy="457200"/>
           </a:xfrm>
           <a:prstGeom prst="rect">
             <a:avLst/>
@@ -4679,24 +4742,140 @@
           </a:bodyPr>
           <a:lstStyle/>
           <a:p>
-            <a:pPr algn="ctr"/>
-            <a:r>
-              <a:rPr sz="1100" b="0">
-                <a:solidFill>
-                  <a:srgbClr val="6B6258"/>
+            <a:pPr algn="l">
+              <a:lnSpc>
+                <a:spcPct val="145000"/>
+              </a:lnSpc>
+              <a:spcAft>
+                <a:spcPts val="400"/>
+              </a:spcAft>
+            </a:pPr>
+            <a:r>
+              <a:rPr sz="1500" b="1">
+                <a:solidFill>
+                  <a:srgbClr val="C8A86B"/>
+                </a:solidFill>
+                <a:latin typeface="楷体"/>
+                <a:ea typeface="楷体"/>
+                <a:cs typeface="楷体"/>
+              </a:rPr>
+              <a:t>资料来源（WebSearch 核实）</a:t>
+            </a:r>
+          </a:p>
+        </p:txBody>
+      </p:sp>
+      <p:sp>
+        <p:nvSpPr>
+          <p:cNvPr id="9" name="TextBox 8"/>
+          <p:cNvSpPr txBox="1"/>
+          <p:nvPr/>
+        </p:nvSpPr>
+        <p:spPr>
+          <a:xfrm>
+            <a:off x="6598767" y="2697480"/>
+            <a:ext cx="4678527" cy="2743200"/>
+          </a:xfrm>
+          <a:prstGeom prst="rect">
+            <a:avLst/>
+          </a:prstGeom>
+          <a:noFill/>
+        </p:spPr>
+        <p:txBody>
+          <a:bodyPr wrap="square" anchor="t" lIns="0" rIns="0" tIns="0" bIns="0">
+            <a:spAutoFit/>
+          </a:bodyPr>
+          <a:lstStyle/>
+          <a:p>
+            <a:pPr algn="l">
+              <a:lnSpc>
+                <a:spcPct val="140000"/>
+              </a:lnSpc>
+              <a:spcAft>
+                <a:spcPts val="900"/>
+              </a:spcAft>
+            </a:pPr>
+            <a:r>
+              <a:rPr sz="1250" b="0">
+                <a:solidFill>
+                  <a:srgbClr val="FFFFFF"/>
+                </a:solidFill>
+                <a:latin typeface="楷体"/>
+                <a:ea typeface="楷体"/>
+                <a:cs typeface="楷体"/>
+              </a:rPr>
+              <a:t>· 杨佳宁《高中现代诗歌创作教学实践》（xueshu.qikan.com.cn）</a:t>
+            </a:r>
+          </a:p>
+          <a:p>
+            <a:pPr algn="l">
+              <a:lnSpc>
+                <a:spcPct val="140000"/>
+              </a:lnSpc>
+              <a:spcAft>
+                <a:spcPts val="900"/>
+              </a:spcAft>
+            </a:pPr>
+            <a:r>
+              <a:rPr sz="1250" b="0">
+                <a:solidFill>
+                  <a:srgbClr val="FFFFFF"/>
+                </a:solidFill>
+                <a:latin typeface="楷体"/>
+                <a:ea typeface="楷体"/>
+                <a:cs typeface="楷体"/>
+              </a:rPr>
+              <a:t>· 21世纪教育网《"学写诗歌"教学设计》（zy.21cnjy.com/9864053）</a:t>
+            </a:r>
+          </a:p>
+        </p:txBody>
+      </p:sp>
+      <p:sp>
+        <p:nvSpPr>
+          <p:cNvPr id="10" name="TextBox 9"/>
+          <p:cNvSpPr txBox="1"/>
+          <p:nvPr/>
+        </p:nvSpPr>
+        <p:spPr>
+          <a:xfrm>
+            <a:off x="6598767" y="5715000"/>
+            <a:ext cx="4678527" cy="640080"/>
+          </a:xfrm>
+          <a:prstGeom prst="rect">
+            <a:avLst/>
+          </a:prstGeom>
+          <a:noFill/>
+        </p:spPr>
+        <p:txBody>
+          <a:bodyPr wrap="square" anchor="t" lIns="0" rIns="0" tIns="0" bIns="0">
+            <a:spAutoFit/>
+          </a:bodyPr>
+          <a:lstStyle/>
+          <a:p>
+            <a:pPr algn="l">
+              <a:lnSpc>
+                <a:spcPct val="145000"/>
+              </a:lnSpc>
+              <a:spcAft>
+                <a:spcPts val="400"/>
+              </a:spcAft>
+            </a:pPr>
+            <a:r>
+              <a:rPr sz="1200" b="0">
+                <a:solidFill>
+                  <a:srgbClr val="E7DFD2"/>
                 </a:solidFill>
                 <a:latin typeface="微软雅黑"/>
                 <a:ea typeface="微软雅黑"/>
                 <a:cs typeface="微软雅黑"/>
               </a:rPr>
-              <a:t>资料图（自由授权，复用 typewriter.jpg）</a:t>
-            </a:r>
-          </a:p>
-        </p:txBody>
-      </p:sp>
-      <p:sp>
-        <p:nvSpPr>
-          <p:cNvPr id="8" name="TextBox 7"/>
+              <a:t>本课件未使用无关配图 · 学科色块兜底</a:t>
+            </a:r>
+          </a:p>
+        </p:txBody>
+      </p:sp>
+      <p:sp>
+        <p:nvSpPr>
+          <p:cNvPr id="11" name="TextBox 10"/>
           <p:cNvSpPr txBox="1"/>
           <p:nvPr/>
         </p:nvSpPr>
@@ -4829,7 +5008,7 @@
                 <a:ea typeface="微软雅黑"/>
                 <a:cs typeface="微软雅黑"/>
               </a:rPr>
-              <a:t>学习重点</a:t>
+              <a:t>重点</a:t>
             </a:r>
           </a:p>
         </p:txBody>
@@ -4880,14 +5059,58 @@
       </p:sp>
       <p:sp>
         <p:nvSpPr>
-          <p:cNvPr id="5" name="Rounded Rectangle 4"/>
+          <p:cNvPr id="5" name="TextBox 4"/>
+          <p:cNvSpPr txBox="1"/>
+          <p:nvPr/>
+        </p:nvSpPr>
+        <p:spPr>
+          <a:xfrm>
+            <a:off x="640080" y="1325880"/>
+            <a:ext cx="10911535" cy="548640"/>
+          </a:xfrm>
+          <a:prstGeom prst="rect">
+            <a:avLst/>
+          </a:prstGeom>
+          <a:noFill/>
+        </p:spPr>
+        <p:txBody>
+          <a:bodyPr wrap="square" anchor="t" lIns="0" rIns="0" tIns="0" bIns="0">
+            <a:spAutoFit/>
+          </a:bodyPr>
+          <a:lstStyle/>
+          <a:p>
+            <a:pPr algn="l">
+              <a:lnSpc>
+                <a:spcPct val="145000"/>
+              </a:lnSpc>
+              <a:spcAft>
+                <a:spcPts val="400"/>
+              </a:spcAft>
+            </a:pPr>
+            <a:r>
+              <a:rPr sz="2600" b="1">
+                <a:solidFill>
+                  <a:srgbClr val="1C2A33"/>
+                </a:solidFill>
+                <a:latin typeface="楷体"/>
+                <a:ea typeface="楷体"/>
+                <a:cs typeface="楷体"/>
+              </a:rPr>
+              <a:t>本课重点</a:t>
+            </a:r>
+          </a:p>
+        </p:txBody>
+      </p:sp>
+      <p:sp>
+        <p:nvSpPr>
+          <p:cNvPr id="6" name="Rounded Rectangle 5"/>
           <p:cNvSpPr/>
           <p:nvPr/>
         </p:nvSpPr>
         <p:spPr>
           <a:xfrm>
-            <a:off x="640080" y="1371600"/>
-            <a:ext cx="10911535" cy="1597152"/>
+            <a:off x="640080" y="2194560"/>
+            <a:ext cx="3393338" cy="3931920"/>
           </a:xfrm>
           <a:prstGeom prst="roundRect">
             <a:avLst/>
@@ -4895,7 +5118,451 @@
           <a:solidFill>
             <a:srgbClr val="FFFFFF"/>
           </a:solidFill>
-          <a:ln w="22860">
+          <a:ln w="20320">
+            <a:solidFill>
+              <a:srgbClr val="B23A2A"/>
+            </a:solidFill>
+          </a:ln>
+          <a:effectLst/>
+        </p:spPr>
+        <p:style>
+          <a:lnRef idx="1">
+            <a:schemeClr val="accent1"/>
+          </a:lnRef>
+          <a:fillRef idx="3">
+            <a:schemeClr val="accent1"/>
+          </a:fillRef>
+          <a:effectRef idx="2">
+            <a:schemeClr val="accent1"/>
+          </a:effectRef>
+          <a:fontRef idx="minor">
+            <a:schemeClr val="lt1"/>
+          </a:fontRef>
+        </p:style>
+        <p:txBody>
+          <a:bodyPr rtlCol="0" anchor="ctr"/>
+          <a:lstStyle/>
+          <a:p>
+            <a:pPr algn="ctr"/>
+          </a:p>
+        </p:txBody>
+      </p:sp>
+      <p:sp>
+        <p:nvSpPr>
+          <p:cNvPr id="7" name="Oval 6"/>
+          <p:cNvSpPr/>
+          <p:nvPr/>
+        </p:nvSpPr>
+        <p:spPr>
+          <a:xfrm>
+            <a:off x="822960" y="2377440"/>
+            <a:ext cx="502920" cy="502920"/>
+          </a:xfrm>
+          <a:prstGeom prst="ellipse">
+            <a:avLst/>
+          </a:prstGeom>
+          <a:solidFill>
+            <a:srgbClr val="B23A2A"/>
+          </a:solidFill>
+          <a:ln>
+            <a:noFill/>
+          </a:ln>
+          <a:effectLst/>
+        </p:spPr>
+        <p:style>
+          <a:lnRef idx="1">
+            <a:schemeClr val="accent1"/>
+          </a:lnRef>
+          <a:fillRef idx="3">
+            <a:schemeClr val="accent1"/>
+          </a:fillRef>
+          <a:effectRef idx="2">
+            <a:schemeClr val="accent1"/>
+          </a:effectRef>
+          <a:fontRef idx="minor">
+            <a:schemeClr val="lt1"/>
+          </a:fontRef>
+        </p:style>
+        <p:txBody>
+          <a:bodyPr rtlCol="0" anchor="ctr"/>
+          <a:lstStyle/>
+          <a:p>
+            <a:pPr algn="ctr"/>
+          </a:p>
+        </p:txBody>
+      </p:sp>
+      <p:sp>
+        <p:nvSpPr>
+          <p:cNvPr id="8" name="TextBox 7"/>
+          <p:cNvSpPr txBox="1"/>
+          <p:nvPr/>
+        </p:nvSpPr>
+        <p:spPr>
+          <a:xfrm>
+            <a:off x="822960" y="2450592"/>
+            <a:ext cx="502920" cy="384048"/>
+          </a:xfrm>
+          <a:prstGeom prst="rect">
+            <a:avLst/>
+          </a:prstGeom>
+          <a:noFill/>
+        </p:spPr>
+        <p:txBody>
+          <a:bodyPr wrap="square" anchor="t" lIns="0" rIns="0" tIns="0" bIns="0">
+            <a:spAutoFit/>
+          </a:bodyPr>
+          <a:lstStyle/>
+          <a:p>
+            <a:pPr algn="ctr">
+              <a:lnSpc>
+                <a:spcPct val="145000"/>
+              </a:lnSpc>
+              <a:spcAft>
+                <a:spcPts val="400"/>
+              </a:spcAft>
+            </a:pPr>
+            <a:r>
+              <a:rPr sz="1800" b="1">
+                <a:solidFill>
+                  <a:srgbClr val="FFFFFF"/>
+                </a:solidFill>
+                <a:latin typeface="微软雅黑"/>
+                <a:ea typeface="微软雅黑"/>
+                <a:cs typeface="微软雅黑"/>
+              </a:rPr>
+              <a:t>①</a:t>
+            </a:r>
+          </a:p>
+        </p:txBody>
+      </p:sp>
+      <p:sp>
+        <p:nvSpPr>
+          <p:cNvPr id="9" name="TextBox 8"/>
+          <p:cNvSpPr txBox="1"/>
+          <p:nvPr/>
+        </p:nvSpPr>
+        <p:spPr>
+          <a:xfrm>
+            <a:off x="1508760" y="2395728"/>
+            <a:ext cx="2296058" cy="822960"/>
+          </a:xfrm>
+          <a:prstGeom prst="rect">
+            <a:avLst/>
+          </a:prstGeom>
+          <a:noFill/>
+        </p:spPr>
+        <p:txBody>
+          <a:bodyPr wrap="square" anchor="t" lIns="0" rIns="0" tIns="0" bIns="0">
+            <a:spAutoFit/>
+          </a:bodyPr>
+          <a:lstStyle/>
+          <a:p>
+            <a:pPr algn="l">
+              <a:lnSpc>
+                <a:spcPct val="130000"/>
+              </a:lnSpc>
+              <a:spcAft>
+                <a:spcPts val="400"/>
+              </a:spcAft>
+            </a:pPr>
+            <a:r>
+              <a:rPr sz="1600" b="1">
+                <a:solidFill>
+                  <a:srgbClr val="B23A2A"/>
+                </a:solidFill>
+                <a:latin typeface="微软雅黑"/>
+                <a:ea typeface="微软雅黑"/>
+                <a:cs typeface="微软雅黑"/>
+              </a:rPr>
+              <a:t>讲评三种典型</a:t>
+            </a:r>
+          </a:p>
+        </p:txBody>
+      </p:sp>
+      <p:sp>
+        <p:nvSpPr>
+          <p:cNvPr id="10" name="TextBox 9"/>
+          <p:cNvSpPr txBox="1"/>
+          <p:nvPr/>
+        </p:nvSpPr>
+        <p:spPr>
+          <a:xfrm>
+            <a:off x="868680" y="3154680"/>
+            <a:ext cx="2936138" cy="2788920"/>
+          </a:xfrm>
+          <a:prstGeom prst="rect">
+            <a:avLst/>
+          </a:prstGeom>
+          <a:noFill/>
+        </p:spPr>
+        <p:txBody>
+          <a:bodyPr wrap="square" anchor="t" lIns="0" rIns="0" tIns="0" bIns="0">
+            <a:spAutoFit/>
+          </a:bodyPr>
+          <a:lstStyle/>
+          <a:p>
+            <a:pPr algn="l">
+              <a:lnSpc>
+                <a:spcPct val="145000"/>
+              </a:lnSpc>
+              <a:spcAft>
+                <a:spcPts val="400"/>
+              </a:spcAft>
+            </a:pPr>
+            <a:r>
+              <a:rPr sz="1350" b="0">
+                <a:solidFill>
+                  <a:srgbClr val="1C2A33"/>
+                </a:solidFill>
+                <a:latin typeface="楷体"/>
+                <a:ea typeface="楷体"/>
+                <a:cs typeface="楷体"/>
+              </a:rPr>
+              <a:t>意象清晰语言平淡型 / 情感强烈意象模糊型 / 意象情感俱佳型。</a:t>
+            </a:r>
+          </a:p>
+        </p:txBody>
+      </p:sp>
+      <p:sp>
+        <p:nvSpPr>
+          <p:cNvPr id="11" name="Rounded Rectangle 10"/>
+          <p:cNvSpPr/>
+          <p:nvPr/>
+        </p:nvSpPr>
+        <p:spPr>
+          <a:xfrm>
+            <a:off x="4399178" y="2194560"/>
+            <a:ext cx="3393338" cy="3931920"/>
+          </a:xfrm>
+          <a:prstGeom prst="roundRect">
+            <a:avLst/>
+          </a:prstGeom>
+          <a:solidFill>
+            <a:srgbClr val="FFFFFF"/>
+          </a:solidFill>
+          <a:ln w="20320">
+            <a:solidFill>
+              <a:srgbClr val="2E7D6B"/>
+            </a:solidFill>
+          </a:ln>
+          <a:effectLst/>
+        </p:spPr>
+        <p:style>
+          <a:lnRef idx="1">
+            <a:schemeClr val="accent1"/>
+          </a:lnRef>
+          <a:fillRef idx="3">
+            <a:schemeClr val="accent1"/>
+          </a:fillRef>
+          <a:effectRef idx="2">
+            <a:schemeClr val="accent1"/>
+          </a:effectRef>
+          <a:fontRef idx="minor">
+            <a:schemeClr val="lt1"/>
+          </a:fontRef>
+        </p:style>
+        <p:txBody>
+          <a:bodyPr rtlCol="0" anchor="ctr"/>
+          <a:lstStyle/>
+          <a:p>
+            <a:pPr algn="ctr"/>
+          </a:p>
+        </p:txBody>
+      </p:sp>
+      <p:sp>
+        <p:nvSpPr>
+          <p:cNvPr id="12" name="Oval 11"/>
+          <p:cNvSpPr/>
+          <p:nvPr/>
+        </p:nvSpPr>
+        <p:spPr>
+          <a:xfrm>
+            <a:off x="4582058" y="2377440"/>
+            <a:ext cx="502920" cy="502920"/>
+          </a:xfrm>
+          <a:prstGeom prst="ellipse">
+            <a:avLst/>
+          </a:prstGeom>
+          <a:solidFill>
+            <a:srgbClr val="2E7D6B"/>
+          </a:solidFill>
+          <a:ln>
+            <a:noFill/>
+          </a:ln>
+          <a:effectLst/>
+        </p:spPr>
+        <p:style>
+          <a:lnRef idx="1">
+            <a:schemeClr val="accent1"/>
+          </a:lnRef>
+          <a:fillRef idx="3">
+            <a:schemeClr val="accent1"/>
+          </a:fillRef>
+          <a:effectRef idx="2">
+            <a:schemeClr val="accent1"/>
+          </a:effectRef>
+          <a:fontRef idx="minor">
+            <a:schemeClr val="lt1"/>
+          </a:fontRef>
+        </p:style>
+        <p:txBody>
+          <a:bodyPr rtlCol="0" anchor="ctr"/>
+          <a:lstStyle/>
+          <a:p>
+            <a:pPr algn="ctr"/>
+          </a:p>
+        </p:txBody>
+      </p:sp>
+      <p:sp>
+        <p:nvSpPr>
+          <p:cNvPr id="13" name="TextBox 12"/>
+          <p:cNvSpPr txBox="1"/>
+          <p:nvPr/>
+        </p:nvSpPr>
+        <p:spPr>
+          <a:xfrm>
+            <a:off x="4582058" y="2450592"/>
+            <a:ext cx="502920" cy="384048"/>
+          </a:xfrm>
+          <a:prstGeom prst="rect">
+            <a:avLst/>
+          </a:prstGeom>
+          <a:noFill/>
+        </p:spPr>
+        <p:txBody>
+          <a:bodyPr wrap="square" anchor="t" lIns="0" rIns="0" tIns="0" bIns="0">
+            <a:spAutoFit/>
+          </a:bodyPr>
+          <a:lstStyle/>
+          <a:p>
+            <a:pPr algn="ctr">
+              <a:lnSpc>
+                <a:spcPct val="145000"/>
+              </a:lnSpc>
+              <a:spcAft>
+                <a:spcPts val="400"/>
+              </a:spcAft>
+            </a:pPr>
+            <a:r>
+              <a:rPr sz="1800" b="1">
+                <a:solidFill>
+                  <a:srgbClr val="FFFFFF"/>
+                </a:solidFill>
+                <a:latin typeface="微软雅黑"/>
+                <a:ea typeface="微软雅黑"/>
+                <a:cs typeface="微软雅黑"/>
+              </a:rPr>
+              <a:t>②</a:t>
+            </a:r>
+          </a:p>
+        </p:txBody>
+      </p:sp>
+      <p:sp>
+        <p:nvSpPr>
+          <p:cNvPr id="14" name="TextBox 13"/>
+          <p:cNvSpPr txBox="1"/>
+          <p:nvPr/>
+        </p:nvSpPr>
+        <p:spPr>
+          <a:xfrm>
+            <a:off x="5267858" y="2395728"/>
+            <a:ext cx="2296058" cy="822960"/>
+          </a:xfrm>
+          <a:prstGeom prst="rect">
+            <a:avLst/>
+          </a:prstGeom>
+          <a:noFill/>
+        </p:spPr>
+        <p:txBody>
+          <a:bodyPr wrap="square" anchor="t" lIns="0" rIns="0" tIns="0" bIns="0">
+            <a:spAutoFit/>
+          </a:bodyPr>
+          <a:lstStyle/>
+          <a:p>
+            <a:pPr algn="l">
+              <a:lnSpc>
+                <a:spcPct val="130000"/>
+              </a:lnSpc>
+              <a:spcAft>
+                <a:spcPts val="400"/>
+              </a:spcAft>
+            </a:pPr>
+            <a:r>
+              <a:rPr sz="1600" b="1">
+                <a:solidFill>
+                  <a:srgbClr val="2E7D6B"/>
+                </a:solidFill>
+                <a:latin typeface="微软雅黑"/>
+                <a:ea typeface="微软雅黑"/>
+                <a:cs typeface="微软雅黑"/>
+              </a:rPr>
+              <a:t>修改三方向</a:t>
+            </a:r>
+          </a:p>
+        </p:txBody>
+      </p:sp>
+      <p:sp>
+        <p:nvSpPr>
+          <p:cNvPr id="15" name="TextBox 14"/>
+          <p:cNvSpPr txBox="1"/>
+          <p:nvPr/>
+        </p:nvSpPr>
+        <p:spPr>
+          <a:xfrm>
+            <a:off x="4627778" y="3154680"/>
+            <a:ext cx="2936138" cy="2788920"/>
+          </a:xfrm>
+          <a:prstGeom prst="rect">
+            <a:avLst/>
+          </a:prstGeom>
+          <a:noFill/>
+        </p:spPr>
+        <p:txBody>
+          <a:bodyPr wrap="square" anchor="t" lIns="0" rIns="0" tIns="0" bIns="0">
+            <a:spAutoFit/>
+          </a:bodyPr>
+          <a:lstStyle/>
+          <a:p>
+            <a:pPr algn="l">
+              <a:lnSpc>
+                <a:spcPct val="145000"/>
+              </a:lnSpc>
+              <a:spcAft>
+                <a:spcPts val="400"/>
+              </a:spcAft>
+            </a:pPr>
+            <a:r>
+              <a:rPr sz="1350" b="0">
+                <a:solidFill>
+                  <a:srgbClr val="1C2A33"/>
+                </a:solidFill>
+                <a:latin typeface="楷体"/>
+                <a:ea typeface="楷体"/>
+                <a:cs typeface="楷体"/>
+              </a:rPr>
+              <a:t>换意象（更准确）/调节奏（分行长短）/炼字（动词形容词）。</a:t>
+            </a:r>
+          </a:p>
+        </p:txBody>
+      </p:sp>
+      <p:sp>
+        <p:nvSpPr>
+          <p:cNvPr id="16" name="Rounded Rectangle 15"/>
+          <p:cNvSpPr/>
+          <p:nvPr/>
+        </p:nvSpPr>
+        <p:spPr>
+          <a:xfrm>
+            <a:off x="8158276" y="2194560"/>
+            <a:ext cx="3393338" cy="3931920"/>
+          </a:xfrm>
+          <a:prstGeom prst="roundRect">
+            <a:avLst/>
+          </a:prstGeom>
+          <a:solidFill>
+            <a:srgbClr val="FFFFFF"/>
+          </a:solidFill>
+          <a:ln w="20320">
             <a:solidFill>
               <a:srgbClr val="C8A86B"/>
             </a:solidFill>
@@ -4926,107 +5593,23 @@
       </p:sp>
       <p:sp>
         <p:nvSpPr>
-          <p:cNvPr id="6" name="TextBox 5"/>
-          <p:cNvSpPr txBox="1"/>
-          <p:nvPr/>
-        </p:nvSpPr>
-        <p:spPr>
-          <a:xfrm>
-            <a:off x="1371600" y="1481328"/>
-            <a:ext cx="9997135" cy="457200"/>
-          </a:xfrm>
-          <a:prstGeom prst="rect">
-            <a:avLst/>
-          </a:prstGeom>
-          <a:noFill/>
-        </p:spPr>
-        <p:txBody>
-          <a:bodyPr wrap="square" anchor="t" lIns="0" rIns="0" tIns="0" bIns="0">
-            <a:spAutoFit/>
-          </a:bodyPr>
-          <a:lstStyle/>
-          <a:p>
-            <a:pPr algn="l">
-              <a:lnSpc>
-                <a:spcPct val="110000"/>
-              </a:lnSpc>
-            </a:pPr>
-            <a:r>
-              <a:rPr sz="1600" b="1">
-                <a:solidFill>
-                  <a:srgbClr val="1C2A33"/>
-                </a:solidFill>
-                <a:latin typeface="微软雅黑"/>
-                <a:ea typeface="微软雅黑"/>
-                <a:cs typeface="微软雅黑"/>
-              </a:rPr>
-              <a:t/>
-            </a:r>
-          </a:p>
-        </p:txBody>
-      </p:sp>
-      <p:sp>
-        <p:nvSpPr>
-          <p:cNvPr id="7" name="TextBox 6"/>
-          <p:cNvSpPr txBox="1"/>
-          <p:nvPr/>
-        </p:nvSpPr>
-        <p:spPr>
-          <a:xfrm>
-            <a:off x="1371600" y="1920240"/>
-            <a:ext cx="9997135" cy="957072"/>
-          </a:xfrm>
-          <a:prstGeom prst="rect">
-            <a:avLst/>
-          </a:prstGeom>
-          <a:noFill/>
-        </p:spPr>
-        <p:txBody>
-          <a:bodyPr wrap="square" anchor="t" lIns="0" rIns="0" tIns="0" bIns="0">
-            <a:spAutoFit/>
-          </a:bodyPr>
-          <a:lstStyle/>
-          <a:p>
-            <a:pPr algn="l">
-              <a:lnSpc>
-                <a:spcPct val="128000"/>
-              </a:lnSpc>
-            </a:pPr>
-            <a:r>
-              <a:rPr sz="1200" b="0">
-                <a:solidFill>
-                  <a:srgbClr val="1C2A33"/>
-                </a:solidFill>
-                <a:latin typeface="楷体"/>
-                <a:ea typeface="楷体"/>
-                <a:cs typeface="楷体"/>
-              </a:rPr>
-              <a:t>① 讲评三种典型：意象清晰语言平淡型 / 情感强烈意象模糊型 / 意象情感俱佳型。</a:t>
-            </a:r>
-          </a:p>
-        </p:txBody>
-      </p:sp>
-      <p:sp>
-        <p:nvSpPr>
-          <p:cNvPr id="8" name="Rounded Rectangle 7"/>
+          <p:cNvPr id="17" name="Oval 16"/>
           <p:cNvSpPr/>
           <p:nvPr/>
         </p:nvSpPr>
         <p:spPr>
           <a:xfrm>
-            <a:off x="640080" y="3078480"/>
-            <a:ext cx="10911535" cy="1597152"/>
-          </a:xfrm>
-          <a:prstGeom prst="roundRect">
+            <a:off x="8341156" y="2377440"/>
+            <a:ext cx="502920" cy="502920"/>
+          </a:xfrm>
+          <a:prstGeom prst="ellipse">
             <a:avLst/>
           </a:prstGeom>
           <a:solidFill>
-            <a:srgbClr val="FFFFFF"/>
+            <a:srgbClr val="C8A86B"/>
           </a:solidFill>
-          <a:ln w="22860">
-            <a:solidFill>
-              <a:srgbClr val="C8A86B"/>
-            </a:solidFill>
+          <a:ln>
+            <a:noFill/>
           </a:ln>
           <a:effectLst/>
         </p:spPr>
@@ -5054,14 +5637,14 @@
       </p:sp>
       <p:sp>
         <p:nvSpPr>
-          <p:cNvPr id="9" name="TextBox 8"/>
+          <p:cNvPr id="18" name="TextBox 17"/>
           <p:cNvSpPr txBox="1"/>
           <p:nvPr/>
         </p:nvSpPr>
         <p:spPr>
           <a:xfrm>
-            <a:off x="1371600" y="3188208"/>
-            <a:ext cx="9997135" cy="457200"/>
+            <a:off x="8341156" y="2450592"/>
+            <a:ext cx="502920" cy="384048"/>
           </a:xfrm>
           <a:prstGeom prst="rect">
             <a:avLst/>
@@ -5074,35 +5657,38 @@
           </a:bodyPr>
           <a:lstStyle/>
           <a:p>
-            <a:pPr algn="l">
+            <a:pPr algn="ctr">
               <a:lnSpc>
-                <a:spcPct val="110000"/>
+                <a:spcPct val="145000"/>
               </a:lnSpc>
-            </a:pPr>
-            <a:r>
-              <a:rPr sz="1600" b="1">
-                <a:solidFill>
-                  <a:srgbClr val="1C2A33"/>
+              <a:spcAft>
+                <a:spcPts val="400"/>
+              </a:spcAft>
+            </a:pPr>
+            <a:r>
+              <a:rPr sz="1800" b="1">
+                <a:solidFill>
+                  <a:srgbClr val="FFFFFF"/>
                 </a:solidFill>
                 <a:latin typeface="微软雅黑"/>
                 <a:ea typeface="微软雅黑"/>
                 <a:cs typeface="微软雅黑"/>
               </a:rPr>
-              <a:t/>
-            </a:r>
-          </a:p>
-        </p:txBody>
-      </p:sp>
-      <p:sp>
-        <p:nvSpPr>
-          <p:cNvPr id="10" name="TextBox 9"/>
+              <a:t>③</a:t>
+            </a:r>
+          </a:p>
+        </p:txBody>
+      </p:sp>
+      <p:sp>
+        <p:nvSpPr>
+          <p:cNvPr id="19" name="TextBox 18"/>
           <p:cNvSpPr txBox="1"/>
           <p:nvPr/>
         </p:nvSpPr>
         <p:spPr>
           <a:xfrm>
-            <a:off x="1371600" y="3627120"/>
-            <a:ext cx="9997135" cy="957072"/>
+            <a:off x="9026956" y="2395728"/>
+            <a:ext cx="2296058" cy="822960"/>
           </a:xfrm>
           <a:prstGeom prst="rect">
             <a:avLst/>
@@ -5117,11 +5703,58 @@
           <a:p>
             <a:pPr algn="l">
               <a:lnSpc>
-                <a:spcPct val="128000"/>
+                <a:spcPct val="130000"/>
               </a:lnSpc>
-            </a:pPr>
-            <a:r>
-              <a:rPr sz="1300" b="0">
+              <a:spcAft>
+                <a:spcPts val="400"/>
+              </a:spcAft>
+            </a:pPr>
+            <a:r>
+              <a:rPr sz="1600" b="1">
+                <a:solidFill>
+                  <a:srgbClr val="C8A86B"/>
+                </a:solidFill>
+                <a:latin typeface="微软雅黑"/>
+                <a:ea typeface="微软雅黑"/>
+                <a:cs typeface="微软雅黑"/>
+              </a:rPr>
+              <a:t>好诗三标准</a:t>
+            </a:r>
+          </a:p>
+        </p:txBody>
+      </p:sp>
+      <p:sp>
+        <p:nvSpPr>
+          <p:cNvPr id="20" name="TextBox 19"/>
+          <p:cNvSpPr txBox="1"/>
+          <p:nvPr/>
+        </p:nvSpPr>
+        <p:spPr>
+          <a:xfrm>
+            <a:off x="8386876" y="3154680"/>
+            <a:ext cx="2936138" cy="2788920"/>
+          </a:xfrm>
+          <a:prstGeom prst="rect">
+            <a:avLst/>
+          </a:prstGeom>
+          <a:noFill/>
+        </p:spPr>
+        <p:txBody>
+          <a:bodyPr wrap="square" anchor="t" lIns="0" rIns="0" tIns="0" bIns="0">
+            <a:spAutoFit/>
+          </a:bodyPr>
+          <a:lstStyle/>
+          <a:p>
+            <a:pPr algn="l">
+              <a:lnSpc>
+                <a:spcPct val="145000"/>
+              </a:lnSpc>
+              <a:spcAft>
+                <a:spcPts val="400"/>
+              </a:spcAft>
+            </a:pPr>
+            <a:r>
+              <a:rPr sz="1350" b="0">
                 <a:solidFill>
                   <a:srgbClr val="1C2A33"/>
                 </a:solidFill>
@@ -5129,142 +5762,14 @@
                 <a:ea typeface="楷体"/>
                 <a:cs typeface="楷体"/>
               </a:rPr>
-              <a:t>② 修改三方向：换意象（更准确）/调节奏（分行长短）/炼字（动词形容词）。</a:t>
-            </a:r>
-          </a:p>
-        </p:txBody>
-      </p:sp>
-      <p:sp>
-        <p:nvSpPr>
-          <p:cNvPr id="11" name="Rounded Rectangle 10"/>
-          <p:cNvSpPr/>
-          <p:nvPr/>
-        </p:nvSpPr>
-        <p:spPr>
-          <a:xfrm>
-            <a:off x="640080" y="4785360"/>
-            <a:ext cx="10911535" cy="1597152"/>
-          </a:xfrm>
-          <a:prstGeom prst="roundRect">
-            <a:avLst/>
-          </a:prstGeom>
-          <a:solidFill>
-            <a:srgbClr val="FFFFFF"/>
-          </a:solidFill>
-          <a:ln w="22860">
-            <a:solidFill>
-              <a:srgbClr val="C8A86B"/>
-            </a:solidFill>
-          </a:ln>
-          <a:effectLst/>
-        </p:spPr>
-        <p:style>
-          <a:lnRef idx="1">
-            <a:schemeClr val="accent1"/>
-          </a:lnRef>
-          <a:fillRef idx="3">
-            <a:schemeClr val="accent1"/>
-          </a:fillRef>
-          <a:effectRef idx="2">
-            <a:schemeClr val="accent1"/>
-          </a:effectRef>
-          <a:fontRef idx="minor">
-            <a:schemeClr val="lt1"/>
-          </a:fontRef>
-        </p:style>
-        <p:txBody>
-          <a:bodyPr rtlCol="0" anchor="ctr"/>
-          <a:lstStyle/>
-          <a:p>
-            <a:pPr algn="ctr"/>
-          </a:p>
-        </p:txBody>
-      </p:sp>
-      <p:sp>
-        <p:nvSpPr>
-          <p:cNvPr id="12" name="TextBox 11"/>
-          <p:cNvSpPr txBox="1"/>
-          <p:nvPr/>
-        </p:nvSpPr>
-        <p:spPr>
-          <a:xfrm>
-            <a:off x="1371600" y="4895088"/>
-            <a:ext cx="9997135" cy="457200"/>
-          </a:xfrm>
-          <a:prstGeom prst="rect">
-            <a:avLst/>
-          </a:prstGeom>
-          <a:noFill/>
-        </p:spPr>
-        <p:txBody>
-          <a:bodyPr wrap="square" anchor="t" lIns="0" rIns="0" tIns="0" bIns="0">
-            <a:spAutoFit/>
-          </a:bodyPr>
-          <a:lstStyle/>
-          <a:p>
-            <a:pPr algn="l">
-              <a:lnSpc>
-                <a:spcPct val="110000"/>
-              </a:lnSpc>
-            </a:pPr>
-            <a:r>
-              <a:rPr sz="1600" b="1">
-                <a:solidFill>
-                  <a:srgbClr val="1C2A33"/>
-                </a:solidFill>
-                <a:latin typeface="微软雅黑"/>
-                <a:ea typeface="微软雅黑"/>
-                <a:cs typeface="微软雅黑"/>
-              </a:rPr>
-              <a:t/>
-            </a:r>
-          </a:p>
-        </p:txBody>
-      </p:sp>
-      <p:sp>
-        <p:nvSpPr>
-          <p:cNvPr id="13" name="TextBox 12"/>
-          <p:cNvSpPr txBox="1"/>
-          <p:nvPr/>
-        </p:nvSpPr>
-        <p:spPr>
-          <a:xfrm>
-            <a:off x="1371600" y="5334000"/>
-            <a:ext cx="9997135" cy="957072"/>
-          </a:xfrm>
-          <a:prstGeom prst="rect">
-            <a:avLst/>
-          </a:prstGeom>
-          <a:noFill/>
-        </p:spPr>
-        <p:txBody>
-          <a:bodyPr wrap="square" anchor="t" lIns="0" rIns="0" tIns="0" bIns="0">
-            <a:spAutoFit/>
-          </a:bodyPr>
-          <a:lstStyle/>
-          <a:p>
-            <a:pPr algn="l">
-              <a:lnSpc>
-                <a:spcPct val="128000"/>
-              </a:lnSpc>
-            </a:pPr>
-            <a:r>
-              <a:rPr sz="1300" b="0">
-                <a:solidFill>
-                  <a:srgbClr val="1C2A33"/>
-                </a:solidFill>
-                <a:latin typeface="楷体"/>
-                <a:ea typeface="楷体"/>
-                <a:cs typeface="楷体"/>
-              </a:rPr>
-              <a:t>③ 好诗三标准：意象鲜明·情感真挚·语言有张力。</a:t>
-            </a:r>
-          </a:p>
-        </p:txBody>
-      </p:sp>
-      <p:sp>
-        <p:nvSpPr>
-          <p:cNvPr id="14" name="TextBox 13"/>
+              <a:t>意象鲜明·情感真挚·语言有张力。</a:t>
+            </a:r>
+          </a:p>
+        </p:txBody>
+      </p:sp>
+      <p:sp>
+        <p:nvSpPr>
+          <p:cNvPr id="21" name="TextBox 20"/>
           <p:cNvSpPr txBox="1"/>
           <p:nvPr/>
         </p:nvSpPr>
@@ -5391,13 +5896,13 @@
             <a:r>
               <a:rPr sz="1300" b="1">
                 <a:solidFill>
-                  <a:srgbClr val="2E7D6B"/>
+                  <a:srgbClr val="B23A2A"/>
                 </a:solidFill>
                 <a:latin typeface="微软雅黑"/>
                 <a:ea typeface="微软雅黑"/>
                 <a:cs typeface="微软雅黑"/>
               </a:rPr>
-              <a:t>学习路径</a:t>
+              <a:t>方法</a:t>
             </a:r>
           </a:p>
         </p:txBody>
@@ -5414,6 +5919,362 @@
             <a:ext cx="822960" cy="30480"/>
           </a:xfrm>
           <a:prstGeom prst="rect">
+            <a:avLst/>
+          </a:prstGeom>
+          <a:solidFill>
+            <a:srgbClr val="B23A2A"/>
+          </a:solidFill>
+          <a:ln>
+            <a:noFill/>
+          </a:ln>
+          <a:effectLst/>
+        </p:spPr>
+        <p:style>
+          <a:lnRef idx="1">
+            <a:schemeClr val="accent1"/>
+          </a:lnRef>
+          <a:fillRef idx="3">
+            <a:schemeClr val="accent1"/>
+          </a:fillRef>
+          <a:effectRef idx="2">
+            <a:schemeClr val="accent1"/>
+          </a:effectRef>
+          <a:fontRef idx="minor">
+            <a:schemeClr val="lt1"/>
+          </a:fontRef>
+        </p:style>
+        <p:txBody>
+          <a:bodyPr rtlCol="0" anchor="ctr"/>
+          <a:lstStyle/>
+          <a:p>
+            <a:pPr algn="ctr"/>
+          </a:p>
+        </p:txBody>
+      </p:sp>
+      <p:sp>
+        <p:nvSpPr>
+          <p:cNvPr id="5" name="TextBox 4"/>
+          <p:cNvSpPr txBox="1"/>
+          <p:nvPr/>
+        </p:nvSpPr>
+        <p:spPr>
+          <a:xfrm>
+            <a:off x="640080" y="1325880"/>
+            <a:ext cx="10911535" cy="548640"/>
+          </a:xfrm>
+          <a:prstGeom prst="rect">
+            <a:avLst/>
+          </a:prstGeom>
+          <a:noFill/>
+        </p:spPr>
+        <p:txBody>
+          <a:bodyPr wrap="square" anchor="t" lIns="0" rIns="0" tIns="0" bIns="0">
+            <a:spAutoFit/>
+          </a:bodyPr>
+          <a:lstStyle/>
+          <a:p>
+            <a:pPr algn="l">
+              <a:lnSpc>
+                <a:spcPct val="145000"/>
+              </a:lnSpc>
+              <a:spcAft>
+                <a:spcPts val="400"/>
+              </a:spcAft>
+            </a:pPr>
+            <a:r>
+              <a:rPr sz="2600" b="1">
+                <a:solidFill>
+                  <a:srgbClr val="1C2A33"/>
+                </a:solidFill>
+                <a:latin typeface="楷体"/>
+                <a:ea typeface="楷体"/>
+                <a:cs typeface="楷体"/>
+              </a:rPr>
+              <a:t>学习路径 · 方法</a:t>
+            </a:r>
+          </a:p>
+        </p:txBody>
+      </p:sp>
+      <p:sp>
+        <p:nvSpPr>
+          <p:cNvPr id="6" name="Rounded Rectangle 5"/>
+          <p:cNvSpPr/>
+          <p:nvPr/>
+        </p:nvSpPr>
+        <p:spPr>
+          <a:xfrm>
+            <a:off x="640080" y="2194560"/>
+            <a:ext cx="2453563" cy="3931920"/>
+          </a:xfrm>
+          <a:prstGeom prst="roundRect">
+            <a:avLst/>
+          </a:prstGeom>
+          <a:solidFill>
+            <a:srgbClr val="FFFFFF"/>
+          </a:solidFill>
+          <a:ln w="20320">
+            <a:solidFill>
+              <a:srgbClr val="B23A2A"/>
+            </a:solidFill>
+          </a:ln>
+          <a:effectLst/>
+        </p:spPr>
+        <p:style>
+          <a:lnRef idx="1">
+            <a:schemeClr val="accent1"/>
+          </a:lnRef>
+          <a:fillRef idx="3">
+            <a:schemeClr val="accent1"/>
+          </a:fillRef>
+          <a:effectRef idx="2">
+            <a:schemeClr val="accent1"/>
+          </a:effectRef>
+          <a:fontRef idx="minor">
+            <a:schemeClr val="lt1"/>
+          </a:fontRef>
+        </p:style>
+        <p:txBody>
+          <a:bodyPr rtlCol="0" anchor="ctr"/>
+          <a:lstStyle/>
+          <a:p>
+            <a:pPr algn="ctr"/>
+          </a:p>
+        </p:txBody>
+      </p:sp>
+      <p:sp>
+        <p:nvSpPr>
+          <p:cNvPr id="7" name="Oval 6"/>
+          <p:cNvSpPr/>
+          <p:nvPr/>
+        </p:nvSpPr>
+        <p:spPr>
+          <a:xfrm>
+            <a:off x="822960" y="2377440"/>
+            <a:ext cx="502920" cy="502920"/>
+          </a:xfrm>
+          <a:prstGeom prst="ellipse">
+            <a:avLst/>
+          </a:prstGeom>
+          <a:solidFill>
+            <a:srgbClr val="B23A2A"/>
+          </a:solidFill>
+          <a:ln>
+            <a:noFill/>
+          </a:ln>
+          <a:effectLst/>
+        </p:spPr>
+        <p:style>
+          <a:lnRef idx="1">
+            <a:schemeClr val="accent1"/>
+          </a:lnRef>
+          <a:fillRef idx="3">
+            <a:schemeClr val="accent1"/>
+          </a:fillRef>
+          <a:effectRef idx="2">
+            <a:schemeClr val="accent1"/>
+          </a:effectRef>
+          <a:fontRef idx="minor">
+            <a:schemeClr val="lt1"/>
+          </a:fontRef>
+        </p:style>
+        <p:txBody>
+          <a:bodyPr rtlCol="0" anchor="ctr"/>
+          <a:lstStyle/>
+          <a:p>
+            <a:pPr algn="ctr"/>
+          </a:p>
+        </p:txBody>
+      </p:sp>
+      <p:sp>
+        <p:nvSpPr>
+          <p:cNvPr id="8" name="TextBox 7"/>
+          <p:cNvSpPr txBox="1"/>
+          <p:nvPr/>
+        </p:nvSpPr>
+        <p:spPr>
+          <a:xfrm>
+            <a:off x="822960" y="2450592"/>
+            <a:ext cx="502920" cy="384048"/>
+          </a:xfrm>
+          <a:prstGeom prst="rect">
+            <a:avLst/>
+          </a:prstGeom>
+          <a:noFill/>
+        </p:spPr>
+        <p:txBody>
+          <a:bodyPr wrap="square" anchor="t" lIns="0" rIns="0" tIns="0" bIns="0">
+            <a:spAutoFit/>
+          </a:bodyPr>
+          <a:lstStyle/>
+          <a:p>
+            <a:pPr algn="ctr">
+              <a:lnSpc>
+                <a:spcPct val="145000"/>
+              </a:lnSpc>
+              <a:spcAft>
+                <a:spcPts val="400"/>
+              </a:spcAft>
+            </a:pPr>
+            <a:r>
+              <a:rPr sz="1800" b="1">
+                <a:solidFill>
+                  <a:srgbClr val="FFFFFF"/>
+                </a:solidFill>
+                <a:latin typeface="微软雅黑"/>
+                <a:ea typeface="微软雅黑"/>
+                <a:cs typeface="微软雅黑"/>
+              </a:rPr>
+              <a:t>①</a:t>
+            </a:r>
+          </a:p>
+        </p:txBody>
+      </p:sp>
+      <p:sp>
+        <p:nvSpPr>
+          <p:cNvPr id="9" name="TextBox 8"/>
+          <p:cNvSpPr txBox="1"/>
+          <p:nvPr/>
+        </p:nvSpPr>
+        <p:spPr>
+          <a:xfrm>
+            <a:off x="1508760" y="2395728"/>
+            <a:ext cx="1356283" cy="822960"/>
+          </a:xfrm>
+          <a:prstGeom prst="rect">
+            <a:avLst/>
+          </a:prstGeom>
+          <a:noFill/>
+        </p:spPr>
+        <p:txBody>
+          <a:bodyPr wrap="square" anchor="t" lIns="0" rIns="0" tIns="0" bIns="0">
+            <a:spAutoFit/>
+          </a:bodyPr>
+          <a:lstStyle/>
+          <a:p>
+            <a:pPr algn="l">
+              <a:lnSpc>
+                <a:spcPct val="130000"/>
+              </a:lnSpc>
+              <a:spcAft>
+                <a:spcPts val="400"/>
+              </a:spcAft>
+            </a:pPr>
+            <a:r>
+              <a:rPr sz="1500" b="1">
+                <a:solidFill>
+                  <a:srgbClr val="B23A2A"/>
+                </a:solidFill>
+                <a:latin typeface="微软雅黑"/>
+                <a:ea typeface="微软雅黑"/>
+                <a:cs typeface="微软雅黑"/>
+              </a:rPr>
+              <a:t>典型讲评法</a:t>
+            </a:r>
+          </a:p>
+        </p:txBody>
+      </p:sp>
+      <p:sp>
+        <p:nvSpPr>
+          <p:cNvPr id="10" name="TextBox 9"/>
+          <p:cNvSpPr txBox="1"/>
+          <p:nvPr/>
+        </p:nvSpPr>
+        <p:spPr>
+          <a:xfrm>
+            <a:off x="868680" y="3154680"/>
+            <a:ext cx="1996363" cy="2788920"/>
+          </a:xfrm>
+          <a:prstGeom prst="rect">
+            <a:avLst/>
+          </a:prstGeom>
+          <a:noFill/>
+        </p:spPr>
+        <p:txBody>
+          <a:bodyPr wrap="square" anchor="t" lIns="0" rIns="0" tIns="0" bIns="0">
+            <a:spAutoFit/>
+          </a:bodyPr>
+          <a:lstStyle/>
+          <a:p>
+            <a:pPr algn="l">
+              <a:lnSpc>
+                <a:spcPct val="145000"/>
+              </a:lnSpc>
+              <a:spcAft>
+                <a:spcPts val="400"/>
+              </a:spcAft>
+            </a:pPr>
+            <a:r>
+              <a:rPr sz="1300" b="0">
+                <a:solidFill>
+                  <a:srgbClr val="1C2A33"/>
+                </a:solidFill>
+                <a:latin typeface="楷体"/>
+                <a:ea typeface="楷体"/>
+                <a:cs typeface="楷体"/>
+              </a:rPr>
+              <a:t>选3种典型习作匿名展示，全班诊断+修改。</a:t>
+            </a:r>
+          </a:p>
+        </p:txBody>
+      </p:sp>
+      <p:sp>
+        <p:nvSpPr>
+          <p:cNvPr id="11" name="Rounded Rectangle 10"/>
+          <p:cNvSpPr/>
+          <p:nvPr/>
+        </p:nvSpPr>
+        <p:spPr>
+          <a:xfrm>
+            <a:off x="3459403" y="2194560"/>
+            <a:ext cx="2453563" cy="3931920"/>
+          </a:xfrm>
+          <a:prstGeom prst="roundRect">
+            <a:avLst/>
+          </a:prstGeom>
+          <a:solidFill>
+            <a:srgbClr val="FFFFFF"/>
+          </a:solidFill>
+          <a:ln w="20320">
+            <a:solidFill>
+              <a:srgbClr val="2E7D6B"/>
+            </a:solidFill>
+          </a:ln>
+          <a:effectLst/>
+        </p:spPr>
+        <p:style>
+          <a:lnRef idx="1">
+            <a:schemeClr val="accent1"/>
+          </a:lnRef>
+          <a:fillRef idx="3">
+            <a:schemeClr val="accent1"/>
+          </a:fillRef>
+          <a:effectRef idx="2">
+            <a:schemeClr val="accent1"/>
+          </a:effectRef>
+          <a:fontRef idx="minor">
+            <a:schemeClr val="lt1"/>
+          </a:fontRef>
+        </p:style>
+        <p:txBody>
+          <a:bodyPr rtlCol="0" anchor="ctr"/>
+          <a:lstStyle/>
+          <a:p>
+            <a:pPr algn="ctr"/>
+          </a:p>
+        </p:txBody>
+      </p:sp>
+      <p:sp>
+        <p:nvSpPr>
+          <p:cNvPr id="12" name="Oval 11"/>
+          <p:cNvSpPr/>
+          <p:nvPr/>
+        </p:nvSpPr>
+        <p:spPr>
+          <a:xfrm>
+            <a:off x="3642283" y="2377440"/>
+            <a:ext cx="502920" cy="502920"/>
+          </a:xfrm>
+          <a:prstGeom prst="ellipse">
             <a:avLst/>
           </a:prstGeom>
           <a:solidFill>
@@ -5448,14 +6309,146 @@
       </p:sp>
       <p:sp>
         <p:nvSpPr>
-          <p:cNvPr id="5" name="Rounded Rectangle 4"/>
+          <p:cNvPr id="13" name="TextBox 12"/>
+          <p:cNvSpPr txBox="1"/>
+          <p:nvPr/>
+        </p:nvSpPr>
+        <p:spPr>
+          <a:xfrm>
+            <a:off x="3642283" y="2450592"/>
+            <a:ext cx="502920" cy="384048"/>
+          </a:xfrm>
+          <a:prstGeom prst="rect">
+            <a:avLst/>
+          </a:prstGeom>
+          <a:noFill/>
+        </p:spPr>
+        <p:txBody>
+          <a:bodyPr wrap="square" anchor="t" lIns="0" rIns="0" tIns="0" bIns="0">
+            <a:spAutoFit/>
+          </a:bodyPr>
+          <a:lstStyle/>
+          <a:p>
+            <a:pPr algn="ctr">
+              <a:lnSpc>
+                <a:spcPct val="145000"/>
+              </a:lnSpc>
+              <a:spcAft>
+                <a:spcPts val="400"/>
+              </a:spcAft>
+            </a:pPr>
+            <a:r>
+              <a:rPr sz="1800" b="1">
+                <a:solidFill>
+                  <a:srgbClr val="FFFFFF"/>
+                </a:solidFill>
+                <a:latin typeface="微软雅黑"/>
+                <a:ea typeface="微软雅黑"/>
+                <a:cs typeface="微软雅黑"/>
+              </a:rPr>
+              <a:t>②</a:t>
+            </a:r>
+          </a:p>
+        </p:txBody>
+      </p:sp>
+      <p:sp>
+        <p:nvSpPr>
+          <p:cNvPr id="14" name="TextBox 13"/>
+          <p:cNvSpPr txBox="1"/>
+          <p:nvPr/>
+        </p:nvSpPr>
+        <p:spPr>
+          <a:xfrm>
+            <a:off x="4328083" y="2395728"/>
+            <a:ext cx="1356283" cy="822960"/>
+          </a:xfrm>
+          <a:prstGeom prst="rect">
+            <a:avLst/>
+          </a:prstGeom>
+          <a:noFill/>
+        </p:spPr>
+        <p:txBody>
+          <a:bodyPr wrap="square" anchor="t" lIns="0" rIns="0" tIns="0" bIns="0">
+            <a:spAutoFit/>
+          </a:bodyPr>
+          <a:lstStyle/>
+          <a:p>
+            <a:pPr algn="l">
+              <a:lnSpc>
+                <a:spcPct val="130000"/>
+              </a:lnSpc>
+              <a:spcAft>
+                <a:spcPts val="400"/>
+              </a:spcAft>
+            </a:pPr>
+            <a:r>
+              <a:rPr sz="1500" b="1">
+                <a:solidFill>
+                  <a:srgbClr val="2E7D6B"/>
+                </a:solidFill>
+                <a:latin typeface="微软雅黑"/>
+                <a:ea typeface="微软雅黑"/>
+                <a:cs typeface="微软雅黑"/>
+              </a:rPr>
+              <a:t>对比修改法</a:t>
+            </a:r>
+          </a:p>
+        </p:txBody>
+      </p:sp>
+      <p:sp>
+        <p:nvSpPr>
+          <p:cNvPr id="15" name="TextBox 14"/>
+          <p:cNvSpPr txBox="1"/>
+          <p:nvPr/>
+        </p:nvSpPr>
+        <p:spPr>
+          <a:xfrm>
+            <a:off x="3688003" y="3154680"/>
+            <a:ext cx="1996363" cy="2788920"/>
+          </a:xfrm>
+          <a:prstGeom prst="rect">
+            <a:avLst/>
+          </a:prstGeom>
+          <a:noFill/>
+        </p:spPr>
+        <p:txBody>
+          <a:bodyPr wrap="square" anchor="t" lIns="0" rIns="0" tIns="0" bIns="0">
+            <a:spAutoFit/>
+          </a:bodyPr>
+          <a:lstStyle/>
+          <a:p>
+            <a:pPr algn="l">
+              <a:lnSpc>
+                <a:spcPct val="145000"/>
+              </a:lnSpc>
+              <a:spcAft>
+                <a:spcPts val="400"/>
+              </a:spcAft>
+            </a:pPr>
+            <a:r>
+              <a:rPr sz="1300" b="0">
+                <a:solidFill>
+                  <a:srgbClr val="1C2A33"/>
+                </a:solidFill>
+                <a:latin typeface="楷体"/>
+                <a:ea typeface="楷体"/>
+                <a:cs typeface="楷体"/>
+              </a:rPr>
+              <a:t>展示原稿与修改稿对比，直观感受修改效果。</a:t>
+            </a:r>
+          </a:p>
+        </p:txBody>
+      </p:sp>
+      <p:sp>
+        <p:nvSpPr>
+          <p:cNvPr id="16" name="Rounded Rectangle 15"/>
           <p:cNvSpPr/>
           <p:nvPr/>
         </p:nvSpPr>
         <p:spPr>
           <a:xfrm>
-            <a:off x="640080" y="1371600"/>
-            <a:ext cx="10911535" cy="685800"/>
+            <a:off x="6278727" y="2194560"/>
+            <a:ext cx="2453563" cy="3931920"/>
           </a:xfrm>
           <a:prstGeom prst="roundRect">
             <a:avLst/>
@@ -5463,9 +6456,9 @@
           <a:solidFill>
             <a:srgbClr val="FFFFFF"/>
           </a:solidFill>
-          <a:ln w="22860">
+          <a:ln w="20320">
             <a:solidFill>
-              <a:srgbClr val="2E7D6B"/>
+              <a:srgbClr val="C8A86B"/>
             </a:solidFill>
           </a:ln>
           <a:effectLst/>
@@ -5494,20 +6487,20 @@
       </p:sp>
       <p:sp>
         <p:nvSpPr>
-          <p:cNvPr id="6" name="Oval 5"/>
+          <p:cNvPr id="17" name="Oval 16"/>
           <p:cNvSpPr/>
           <p:nvPr/>
         </p:nvSpPr>
         <p:spPr>
           <a:xfrm>
-            <a:off x="804672" y="1536192"/>
-            <a:ext cx="457200" cy="457200"/>
+            <a:off x="6461607" y="2377440"/>
+            <a:ext cx="502920" cy="502920"/>
           </a:xfrm>
           <a:prstGeom prst="ellipse">
             <a:avLst/>
           </a:prstGeom>
           <a:solidFill>
-            <a:srgbClr val="2E7D6B"/>
+            <a:srgbClr val="C8A86B"/>
           </a:solidFill>
           <a:ln>
             <a:noFill/>
@@ -5538,14 +6531,14 @@
       </p:sp>
       <p:sp>
         <p:nvSpPr>
-          <p:cNvPr id="7" name="TextBox 6"/>
+          <p:cNvPr id="18" name="TextBox 17"/>
           <p:cNvSpPr txBox="1"/>
           <p:nvPr/>
         </p:nvSpPr>
         <p:spPr>
           <a:xfrm>
-            <a:off x="804672" y="1591056"/>
-            <a:ext cx="457200" cy="384048"/>
+            <a:off x="6461607" y="2450592"/>
+            <a:ext cx="502920" cy="384048"/>
           </a:xfrm>
           <a:prstGeom prst="rect">
             <a:avLst/>
@@ -5558,9 +6551,16 @@
           </a:bodyPr>
           <a:lstStyle/>
           <a:p>
-            <a:pPr algn="ctr"/>
-            <a:r>
-              <a:rPr sz="1600" b="1">
+            <a:pPr algn="ctr">
+              <a:lnSpc>
+                <a:spcPct val="145000"/>
+              </a:lnSpc>
+              <a:spcAft>
+                <a:spcPts val="400"/>
+              </a:spcAft>
+            </a:pPr>
+            <a:r>
+              <a:rPr sz="1800" b="1">
                 <a:solidFill>
                   <a:srgbClr val="FFFFFF"/>
                 </a:solidFill>
@@ -5568,21 +6568,21 @@
                 <a:ea typeface="微软雅黑"/>
                 <a:cs typeface="微软雅黑"/>
               </a:rPr>
-              <a:t>1</a:t>
-            </a:r>
-          </a:p>
-        </p:txBody>
-      </p:sp>
-      <p:sp>
-        <p:nvSpPr>
-          <p:cNvPr id="8" name="TextBox 7"/>
+              <a:t>③</a:t>
+            </a:r>
+          </a:p>
+        </p:txBody>
+      </p:sp>
+      <p:sp>
+        <p:nvSpPr>
+          <p:cNvPr id="19" name="TextBox 18"/>
           <p:cNvSpPr txBox="1"/>
           <p:nvPr/>
         </p:nvSpPr>
         <p:spPr>
           <a:xfrm>
-            <a:off x="1371600" y="1481328"/>
-            <a:ext cx="9997135" cy="484632"/>
+            <a:off x="7147407" y="2395728"/>
+            <a:ext cx="1356283" cy="822960"/>
           </a:xfrm>
           <a:prstGeom prst="rect">
             <a:avLst/>
@@ -5597,33 +6597,80 @@
           <a:p>
             <a:pPr algn="l">
               <a:lnSpc>
-                <a:spcPct val="110000"/>
+                <a:spcPct val="130000"/>
               </a:lnSpc>
-            </a:pPr>
-            <a:r>
-              <a:rPr sz="1600" b="1">
-                <a:solidFill>
-                  <a:srgbClr val="1C2A33"/>
+              <a:spcAft>
+                <a:spcPts val="400"/>
+              </a:spcAft>
+            </a:pPr>
+            <a:r>
+              <a:rPr sz="1500" b="1">
+                <a:solidFill>
+                  <a:srgbClr val="C8A86B"/>
                 </a:solidFill>
                 <a:latin typeface="微软雅黑"/>
                 <a:ea typeface="微软雅黑"/>
                 <a:cs typeface="微软雅黑"/>
               </a:rPr>
-              <a:t>Step 1 回顾标准</a:t>
-            </a:r>
-          </a:p>
-        </p:txBody>
-      </p:sp>
-      <p:sp>
-        <p:nvSpPr>
-          <p:cNvPr id="9" name="Rounded Rectangle 8"/>
+              <a:t>同伴互改法</a:t>
+            </a:r>
+          </a:p>
+        </p:txBody>
+      </p:sp>
+      <p:sp>
+        <p:nvSpPr>
+          <p:cNvPr id="20" name="TextBox 19"/>
+          <p:cNvSpPr txBox="1"/>
+          <p:nvPr/>
+        </p:nvSpPr>
+        <p:spPr>
+          <a:xfrm>
+            <a:off x="6507327" y="3154680"/>
+            <a:ext cx="1996363" cy="2788920"/>
+          </a:xfrm>
+          <a:prstGeom prst="rect">
+            <a:avLst/>
+          </a:prstGeom>
+          <a:noFill/>
+        </p:spPr>
+        <p:txBody>
+          <a:bodyPr wrap="square" anchor="t" lIns="0" rIns="0" tIns="0" bIns="0">
+            <a:spAutoFit/>
+          </a:bodyPr>
+          <a:lstStyle/>
+          <a:p>
+            <a:pPr algn="l">
+              <a:lnSpc>
+                <a:spcPct val="145000"/>
+              </a:lnSpc>
+              <a:spcAft>
+                <a:spcPts val="400"/>
+              </a:spcAft>
+            </a:pPr>
+            <a:r>
+              <a:rPr sz="1300" b="0">
+                <a:solidFill>
+                  <a:srgbClr val="1C2A33"/>
+                </a:solidFill>
+                <a:latin typeface="楷体"/>
+                <a:ea typeface="楷体"/>
+                <a:cs typeface="楷体"/>
+              </a:rPr>
+              <a:t>两人交换终稿，用「好诗三标准」互相打分。</a:t>
+            </a:r>
+          </a:p>
+        </p:txBody>
+      </p:sp>
+      <p:sp>
+        <p:nvSpPr>
+          <p:cNvPr id="21" name="Rounded Rectangle 20"/>
           <p:cNvSpPr/>
           <p:nvPr/>
         </p:nvSpPr>
         <p:spPr>
           <a:xfrm>
-            <a:off x="640080" y="2194560"/>
-            <a:ext cx="10911535" cy="685800"/>
+            <a:off x="9098051" y="2194560"/>
+            <a:ext cx="2453563" cy="3931920"/>
           </a:xfrm>
           <a:prstGeom prst="roundRect">
             <a:avLst/>
@@ -5631,9 +6678,9 @@
           <a:solidFill>
             <a:srgbClr val="FFFFFF"/>
           </a:solidFill>
-          <a:ln w="22860">
+          <a:ln w="20320">
             <a:solidFill>
-              <a:srgbClr val="2E7D6B"/>
+              <a:srgbClr val="6B6258"/>
             </a:solidFill>
           </a:ln>
           <a:effectLst/>
@@ -5662,20 +6709,20 @@
       </p:sp>
       <p:sp>
         <p:nvSpPr>
-          <p:cNvPr id="10" name="Oval 9"/>
+          <p:cNvPr id="22" name="Oval 21"/>
           <p:cNvSpPr/>
           <p:nvPr/>
         </p:nvSpPr>
         <p:spPr>
           <a:xfrm>
-            <a:off x="804672" y="2359152"/>
-            <a:ext cx="457200" cy="457200"/>
+            <a:off x="9280931" y="2377440"/>
+            <a:ext cx="502920" cy="502920"/>
           </a:xfrm>
           <a:prstGeom prst="ellipse">
             <a:avLst/>
           </a:prstGeom>
           <a:solidFill>
-            <a:srgbClr val="2E7D6B"/>
+            <a:srgbClr val="6B6258"/>
           </a:solidFill>
           <a:ln>
             <a:noFill/>
@@ -5706,14 +6753,14 @@
       </p:sp>
       <p:sp>
         <p:nvSpPr>
-          <p:cNvPr id="11" name="TextBox 10"/>
+          <p:cNvPr id="23" name="TextBox 22"/>
           <p:cNvSpPr txBox="1"/>
           <p:nvPr/>
         </p:nvSpPr>
         <p:spPr>
           <a:xfrm>
-            <a:off x="804672" y="2414016"/>
-            <a:ext cx="457200" cy="384048"/>
+            <a:off x="9280931" y="2450592"/>
+            <a:ext cx="502920" cy="384048"/>
           </a:xfrm>
           <a:prstGeom prst="rect">
             <a:avLst/>
@@ -5726,9 +6773,16 @@
           </a:bodyPr>
           <a:lstStyle/>
           <a:p>
-            <a:pPr algn="ctr"/>
-            <a:r>
-              <a:rPr sz="1600" b="1">
+            <a:pPr algn="ctr">
+              <a:lnSpc>
+                <a:spcPct val="145000"/>
+              </a:lnSpc>
+              <a:spcAft>
+                <a:spcPts val="400"/>
+              </a:spcAft>
+            </a:pPr>
+            <a:r>
+              <a:rPr sz="1800" b="1">
                 <a:solidFill>
                   <a:srgbClr val="FFFFFF"/>
                 </a:solidFill>
@@ -5736,21 +6790,21 @@
                 <a:ea typeface="微软雅黑"/>
                 <a:cs typeface="微软雅黑"/>
               </a:rPr>
-              <a:t>2</a:t>
-            </a:r>
-          </a:p>
-        </p:txBody>
-      </p:sp>
-      <p:sp>
-        <p:nvSpPr>
-          <p:cNvPr id="12" name="TextBox 11"/>
+              <a:t>④</a:t>
+            </a:r>
+          </a:p>
+        </p:txBody>
+      </p:sp>
+      <p:sp>
+        <p:nvSpPr>
+          <p:cNvPr id="24" name="TextBox 23"/>
           <p:cNvSpPr txBox="1"/>
           <p:nvPr/>
         </p:nvSpPr>
         <p:spPr>
           <a:xfrm>
-            <a:off x="1371600" y="2304288"/>
-            <a:ext cx="9997135" cy="484632"/>
+            <a:off x="9966731" y="2395728"/>
+            <a:ext cx="1356283" cy="822960"/>
           </a:xfrm>
           <a:prstGeom prst="rect">
             <a:avLst/>
@@ -5765,123 +6819,36 @@
           <a:p>
             <a:pPr algn="l">
               <a:lnSpc>
-                <a:spcPct val="110000"/>
+                <a:spcPct val="130000"/>
               </a:lnSpc>
-            </a:pPr>
-            <a:r>
-              <a:rPr sz="1600" b="1">
-                <a:solidFill>
-                  <a:srgbClr val="1C2A33"/>
+              <a:spcAft>
+                <a:spcPts val="400"/>
+              </a:spcAft>
+            </a:pPr>
+            <a:r>
+              <a:rPr sz="1500" b="1">
+                <a:solidFill>
+                  <a:srgbClr val="6B6258"/>
                 </a:solidFill>
                 <a:latin typeface="微软雅黑"/>
                 <a:ea typeface="微软雅黑"/>
                 <a:cs typeface="微软雅黑"/>
               </a:rPr>
-              <a:t>Step 2 讲评典型A</a:t>
-            </a:r>
-          </a:p>
-        </p:txBody>
-      </p:sp>
-      <p:sp>
-        <p:nvSpPr>
-          <p:cNvPr id="13" name="Rounded Rectangle 12"/>
-          <p:cNvSpPr/>
-          <p:nvPr/>
-        </p:nvSpPr>
-        <p:spPr>
-          <a:xfrm>
-            <a:off x="640080" y="3017520"/>
-            <a:ext cx="10911535" cy="685800"/>
-          </a:xfrm>
-          <a:prstGeom prst="roundRect">
-            <a:avLst/>
-          </a:prstGeom>
-          <a:solidFill>
-            <a:srgbClr val="FFFFFF"/>
-          </a:solidFill>
-          <a:ln w="22860">
-            <a:solidFill>
-              <a:srgbClr val="2E7D6B"/>
-            </a:solidFill>
-          </a:ln>
-          <a:effectLst/>
-        </p:spPr>
-        <p:style>
-          <a:lnRef idx="1">
-            <a:schemeClr val="accent1"/>
-          </a:lnRef>
-          <a:fillRef idx="3">
-            <a:schemeClr val="accent1"/>
-          </a:fillRef>
-          <a:effectRef idx="2">
-            <a:schemeClr val="accent1"/>
-          </a:effectRef>
-          <a:fontRef idx="minor">
-            <a:schemeClr val="lt1"/>
-          </a:fontRef>
-        </p:style>
-        <p:txBody>
-          <a:bodyPr rtlCol="0" anchor="ctr"/>
-          <a:lstStyle/>
-          <a:p>
-            <a:pPr algn="ctr"/>
-          </a:p>
-        </p:txBody>
-      </p:sp>
-      <p:sp>
-        <p:nvSpPr>
-          <p:cNvPr id="14" name="Oval 13"/>
-          <p:cNvSpPr/>
-          <p:nvPr/>
-        </p:nvSpPr>
-        <p:spPr>
-          <a:xfrm>
-            <a:off x="804672" y="3182112"/>
-            <a:ext cx="457200" cy="457200"/>
-          </a:xfrm>
-          <a:prstGeom prst="ellipse">
-            <a:avLst/>
-          </a:prstGeom>
-          <a:solidFill>
-            <a:srgbClr val="2E7D6B"/>
-          </a:solidFill>
-          <a:ln>
-            <a:noFill/>
-          </a:ln>
-          <a:effectLst/>
-        </p:spPr>
-        <p:style>
-          <a:lnRef idx="1">
-            <a:schemeClr val="accent1"/>
-          </a:lnRef>
-          <a:fillRef idx="3">
-            <a:schemeClr val="accent1"/>
-          </a:fillRef>
-          <a:effectRef idx="2">
-            <a:schemeClr val="accent1"/>
-          </a:effectRef>
-          <a:fontRef idx="minor">
-            <a:schemeClr val="lt1"/>
-          </a:fontRef>
-        </p:style>
-        <p:txBody>
-          <a:bodyPr rtlCol="0" anchor="ctr"/>
-          <a:lstStyle/>
-          <a:p>
-            <a:pPr algn="ctr"/>
-          </a:p>
-        </p:txBody>
-      </p:sp>
-      <p:sp>
-        <p:nvSpPr>
-          <p:cNvPr id="15" name="TextBox 14"/>
+              <a:t>示范法</a:t>
+            </a:r>
+          </a:p>
+        </p:txBody>
+      </p:sp>
+      <p:sp>
+        <p:nvSpPr>
+          <p:cNvPr id="25" name="TextBox 24"/>
           <p:cNvSpPr txBox="1"/>
           <p:nvPr/>
         </p:nvSpPr>
         <p:spPr>
           <a:xfrm>
-            <a:off x="804672" y="3236976"/>
-            <a:ext cx="457200" cy="384048"/>
+            <a:off x="9326651" y="3154680"/>
+            <a:ext cx="1996363" cy="2788920"/>
           </a:xfrm>
           <a:prstGeom prst="rect">
             <a:avLst/>
@@ -5894,569 +6861,31 @@
           </a:bodyPr>
           <a:lstStyle/>
           <a:p>
-            <a:pPr algn="ctr"/>
-            <a:r>
-              <a:rPr sz="1600" b="1">
-                <a:solidFill>
-                  <a:srgbClr val="FFFFFF"/>
-                </a:solidFill>
-                <a:latin typeface="微软雅黑"/>
-                <a:ea typeface="微软雅黑"/>
-                <a:cs typeface="微软雅黑"/>
-              </a:rPr>
-              <a:t>3</a:t>
-            </a:r>
-          </a:p>
-        </p:txBody>
-      </p:sp>
-      <p:sp>
-        <p:nvSpPr>
-          <p:cNvPr id="16" name="TextBox 15"/>
-          <p:cNvSpPr txBox="1"/>
-          <p:nvPr/>
-        </p:nvSpPr>
-        <p:spPr>
-          <a:xfrm>
-            <a:off x="1371600" y="3127248"/>
-            <a:ext cx="9997135" cy="484632"/>
-          </a:xfrm>
-          <a:prstGeom prst="rect">
-            <a:avLst/>
-          </a:prstGeom>
-          <a:noFill/>
-        </p:spPr>
-        <p:txBody>
-          <a:bodyPr wrap="square" anchor="t" lIns="0" rIns="0" tIns="0" bIns="0">
-            <a:spAutoFit/>
-          </a:bodyPr>
-          <a:lstStyle/>
-          <a:p>
             <a:pPr algn="l">
               <a:lnSpc>
-                <a:spcPct val="110000"/>
+                <a:spcPct val="145000"/>
               </a:lnSpc>
-            </a:pPr>
-            <a:r>
-              <a:rPr sz="1600" b="1">
+              <a:spcAft>
+                <a:spcPts val="400"/>
+              </a:spcAft>
+            </a:pPr>
+            <a:r>
+              <a:rPr sz="1300" b="0">
                 <a:solidFill>
                   <a:srgbClr val="1C2A33"/>
                 </a:solidFill>
-                <a:latin typeface="微软雅黑"/>
-                <a:ea typeface="微软雅黑"/>
-                <a:cs typeface="微软雅黑"/>
-              </a:rPr>
-              <a:t>Step 3 讲评典型B</a:t>
-            </a:r>
-          </a:p>
-        </p:txBody>
-      </p:sp>
-      <p:sp>
-        <p:nvSpPr>
-          <p:cNvPr id="17" name="Rounded Rectangle 16"/>
-          <p:cNvSpPr/>
-          <p:nvPr/>
-        </p:nvSpPr>
-        <p:spPr>
-          <a:xfrm>
-            <a:off x="640080" y="3840480"/>
-            <a:ext cx="10911535" cy="685800"/>
-          </a:xfrm>
-          <a:prstGeom prst="roundRect">
-            <a:avLst/>
-          </a:prstGeom>
-          <a:solidFill>
-            <a:srgbClr val="FFFFFF"/>
-          </a:solidFill>
-          <a:ln w="22860">
-            <a:solidFill>
-              <a:srgbClr val="2E7D6B"/>
-            </a:solidFill>
-          </a:ln>
-          <a:effectLst/>
-        </p:spPr>
-        <p:style>
-          <a:lnRef idx="1">
-            <a:schemeClr val="accent1"/>
-          </a:lnRef>
-          <a:fillRef idx="3">
-            <a:schemeClr val="accent1"/>
-          </a:fillRef>
-          <a:effectRef idx="2">
-            <a:schemeClr val="accent1"/>
-          </a:effectRef>
-          <a:fontRef idx="minor">
-            <a:schemeClr val="lt1"/>
-          </a:fontRef>
-        </p:style>
-        <p:txBody>
-          <a:bodyPr rtlCol="0" anchor="ctr"/>
-          <a:lstStyle/>
-          <a:p>
-            <a:pPr algn="ctr"/>
-          </a:p>
-        </p:txBody>
-      </p:sp>
-      <p:sp>
-        <p:nvSpPr>
-          <p:cNvPr id="18" name="Oval 17"/>
-          <p:cNvSpPr/>
-          <p:nvPr/>
-        </p:nvSpPr>
-        <p:spPr>
-          <a:xfrm>
-            <a:off x="804672" y="4005072"/>
-            <a:ext cx="457200" cy="457200"/>
-          </a:xfrm>
-          <a:prstGeom prst="ellipse">
-            <a:avLst/>
-          </a:prstGeom>
-          <a:solidFill>
-            <a:srgbClr val="2E7D6B"/>
-          </a:solidFill>
-          <a:ln>
-            <a:noFill/>
-          </a:ln>
-          <a:effectLst/>
-        </p:spPr>
-        <p:style>
-          <a:lnRef idx="1">
-            <a:schemeClr val="accent1"/>
-          </a:lnRef>
-          <a:fillRef idx="3">
-            <a:schemeClr val="accent1"/>
-          </a:fillRef>
-          <a:effectRef idx="2">
-            <a:schemeClr val="accent1"/>
-          </a:effectRef>
-          <a:fontRef idx="minor">
-            <a:schemeClr val="lt1"/>
-          </a:fontRef>
-        </p:style>
-        <p:txBody>
-          <a:bodyPr rtlCol="0" anchor="ctr"/>
-          <a:lstStyle/>
-          <a:p>
-            <a:pPr algn="ctr"/>
-          </a:p>
-        </p:txBody>
-      </p:sp>
-      <p:sp>
-        <p:nvSpPr>
-          <p:cNvPr id="19" name="TextBox 18"/>
-          <p:cNvSpPr txBox="1"/>
-          <p:nvPr/>
-        </p:nvSpPr>
-        <p:spPr>
-          <a:xfrm>
-            <a:off x="804672" y="4059936"/>
-            <a:ext cx="457200" cy="384048"/>
-          </a:xfrm>
-          <a:prstGeom prst="rect">
-            <a:avLst/>
-          </a:prstGeom>
-          <a:noFill/>
-        </p:spPr>
-        <p:txBody>
-          <a:bodyPr wrap="square" anchor="t" lIns="0" rIns="0" tIns="0" bIns="0">
-            <a:spAutoFit/>
-          </a:bodyPr>
-          <a:lstStyle/>
-          <a:p>
-            <a:pPr algn="ctr"/>
-            <a:r>
-              <a:rPr sz="1600" b="1">
-                <a:solidFill>
-                  <a:srgbClr val="FFFFFF"/>
-                </a:solidFill>
-                <a:latin typeface="微软雅黑"/>
-                <a:ea typeface="微软雅黑"/>
-                <a:cs typeface="微软雅黑"/>
-              </a:rPr>
-              <a:t>4</a:t>
-            </a:r>
-          </a:p>
-        </p:txBody>
-      </p:sp>
-      <p:sp>
-        <p:nvSpPr>
-          <p:cNvPr id="20" name="TextBox 19"/>
-          <p:cNvSpPr txBox="1"/>
-          <p:nvPr/>
-        </p:nvSpPr>
-        <p:spPr>
-          <a:xfrm>
-            <a:off x="1371600" y="3950208"/>
-            <a:ext cx="9997135" cy="484632"/>
-          </a:xfrm>
-          <a:prstGeom prst="rect">
-            <a:avLst/>
-          </a:prstGeom>
-          <a:noFill/>
-        </p:spPr>
-        <p:txBody>
-          <a:bodyPr wrap="square" anchor="t" lIns="0" rIns="0" tIns="0" bIns="0">
-            <a:spAutoFit/>
-          </a:bodyPr>
-          <a:lstStyle/>
-          <a:p>
-            <a:pPr algn="l">
-              <a:lnSpc>
-                <a:spcPct val="110000"/>
-              </a:lnSpc>
-            </a:pPr>
-            <a:r>
-              <a:rPr sz="1600" b="1">
-                <a:solidFill>
-                  <a:srgbClr val="1C2A33"/>
-                </a:solidFill>
-                <a:latin typeface="微软雅黑"/>
-                <a:ea typeface="微软雅黑"/>
-                <a:cs typeface="微软雅黑"/>
-              </a:rPr>
-              <a:t>Step 4 讲评典型C</a:t>
-            </a:r>
-          </a:p>
-        </p:txBody>
-      </p:sp>
-      <p:sp>
-        <p:nvSpPr>
-          <p:cNvPr id="21" name="Rounded Rectangle 20"/>
-          <p:cNvSpPr/>
-          <p:nvPr/>
-        </p:nvSpPr>
-        <p:spPr>
-          <a:xfrm>
-            <a:off x="640080" y="4663440"/>
-            <a:ext cx="10911535" cy="685800"/>
-          </a:xfrm>
-          <a:prstGeom prst="roundRect">
-            <a:avLst/>
-          </a:prstGeom>
-          <a:solidFill>
-            <a:srgbClr val="FFFFFF"/>
-          </a:solidFill>
-          <a:ln w="22860">
-            <a:solidFill>
-              <a:srgbClr val="2E7D6B"/>
-            </a:solidFill>
-          </a:ln>
-          <a:effectLst/>
-        </p:spPr>
-        <p:style>
-          <a:lnRef idx="1">
-            <a:schemeClr val="accent1"/>
-          </a:lnRef>
-          <a:fillRef idx="3">
-            <a:schemeClr val="accent1"/>
-          </a:fillRef>
-          <a:effectRef idx="2">
-            <a:schemeClr val="accent1"/>
-          </a:effectRef>
-          <a:fontRef idx="minor">
-            <a:schemeClr val="lt1"/>
-          </a:fontRef>
-        </p:style>
-        <p:txBody>
-          <a:bodyPr rtlCol="0" anchor="ctr"/>
-          <a:lstStyle/>
-          <a:p>
-            <a:pPr algn="ctr"/>
-          </a:p>
-        </p:txBody>
-      </p:sp>
-      <p:sp>
-        <p:nvSpPr>
-          <p:cNvPr id="22" name="Oval 21"/>
-          <p:cNvSpPr/>
-          <p:nvPr/>
-        </p:nvSpPr>
-        <p:spPr>
-          <a:xfrm>
-            <a:off x="804672" y="4828032"/>
-            <a:ext cx="457200" cy="457200"/>
-          </a:xfrm>
-          <a:prstGeom prst="ellipse">
-            <a:avLst/>
-          </a:prstGeom>
-          <a:solidFill>
-            <a:srgbClr val="2E7D6B"/>
-          </a:solidFill>
-          <a:ln>
-            <a:noFill/>
-          </a:ln>
-          <a:effectLst/>
-        </p:spPr>
-        <p:style>
-          <a:lnRef idx="1">
-            <a:schemeClr val="accent1"/>
-          </a:lnRef>
-          <a:fillRef idx="3">
-            <a:schemeClr val="accent1"/>
-          </a:fillRef>
-          <a:effectRef idx="2">
-            <a:schemeClr val="accent1"/>
-          </a:effectRef>
-          <a:fontRef idx="minor">
-            <a:schemeClr val="lt1"/>
-          </a:fontRef>
-        </p:style>
-        <p:txBody>
-          <a:bodyPr rtlCol="0" anchor="ctr"/>
-          <a:lstStyle/>
-          <a:p>
-            <a:pPr algn="ctr"/>
-          </a:p>
-        </p:txBody>
-      </p:sp>
-      <p:sp>
-        <p:nvSpPr>
-          <p:cNvPr id="23" name="TextBox 22"/>
-          <p:cNvSpPr txBox="1"/>
-          <p:nvPr/>
-        </p:nvSpPr>
-        <p:spPr>
-          <a:xfrm>
-            <a:off x="804672" y="4882896"/>
-            <a:ext cx="457200" cy="384048"/>
-          </a:xfrm>
-          <a:prstGeom prst="rect">
-            <a:avLst/>
-          </a:prstGeom>
-          <a:noFill/>
-        </p:spPr>
-        <p:txBody>
-          <a:bodyPr wrap="square" anchor="t" lIns="0" rIns="0" tIns="0" bIns="0">
-            <a:spAutoFit/>
-          </a:bodyPr>
-          <a:lstStyle/>
-          <a:p>
-            <a:pPr algn="ctr"/>
-            <a:r>
-              <a:rPr sz="1600" b="1">
-                <a:solidFill>
-                  <a:srgbClr val="FFFFFF"/>
-                </a:solidFill>
-                <a:latin typeface="微软雅黑"/>
-                <a:ea typeface="微软雅黑"/>
-                <a:cs typeface="微软雅黑"/>
-              </a:rPr>
-              <a:t>5</a:t>
-            </a:r>
-          </a:p>
-        </p:txBody>
-      </p:sp>
-      <p:sp>
-        <p:nvSpPr>
-          <p:cNvPr id="24" name="TextBox 23"/>
-          <p:cNvSpPr txBox="1"/>
-          <p:nvPr/>
-        </p:nvSpPr>
-        <p:spPr>
-          <a:xfrm>
-            <a:off x="1371600" y="4773168"/>
-            <a:ext cx="9997135" cy="484632"/>
-          </a:xfrm>
-          <a:prstGeom prst="rect">
-            <a:avLst/>
-          </a:prstGeom>
-          <a:noFill/>
-        </p:spPr>
-        <p:txBody>
-          <a:bodyPr wrap="square" anchor="t" lIns="0" rIns="0" tIns="0" bIns="0">
-            <a:spAutoFit/>
-          </a:bodyPr>
-          <a:lstStyle/>
-          <a:p>
-            <a:pPr algn="l">
-              <a:lnSpc>
-                <a:spcPct val="110000"/>
-              </a:lnSpc>
-            </a:pPr>
-            <a:r>
-              <a:rPr sz="1400" b="1">
-                <a:solidFill>
-                  <a:srgbClr val="1C2A33"/>
-                </a:solidFill>
-                <a:latin typeface="微软雅黑"/>
-                <a:ea typeface="微软雅黑"/>
-                <a:cs typeface="微软雅黑"/>
-              </a:rPr>
-              <a:t>Step 5 当场修改示范</a:t>
-            </a:r>
-          </a:p>
-        </p:txBody>
-      </p:sp>
-      <p:sp>
-        <p:nvSpPr>
-          <p:cNvPr id="25" name="Rounded Rectangle 24"/>
-          <p:cNvSpPr/>
-          <p:nvPr/>
-        </p:nvSpPr>
-        <p:spPr>
-          <a:xfrm>
-            <a:off x="640080" y="5486400"/>
-            <a:ext cx="10911535" cy="685800"/>
-          </a:xfrm>
-          <a:prstGeom prst="roundRect">
-            <a:avLst/>
-          </a:prstGeom>
-          <a:solidFill>
-            <a:srgbClr val="FFFFFF"/>
-          </a:solidFill>
-          <a:ln w="22860">
-            <a:solidFill>
-              <a:srgbClr val="2E7D6B"/>
-            </a:solidFill>
-          </a:ln>
-          <a:effectLst/>
-        </p:spPr>
-        <p:style>
-          <a:lnRef idx="1">
-            <a:schemeClr val="accent1"/>
-          </a:lnRef>
-          <a:fillRef idx="3">
-            <a:schemeClr val="accent1"/>
-          </a:fillRef>
-          <a:effectRef idx="2">
-            <a:schemeClr val="accent1"/>
-          </a:effectRef>
-          <a:fontRef idx="minor">
-            <a:schemeClr val="lt1"/>
-          </a:fontRef>
-        </p:style>
-        <p:txBody>
-          <a:bodyPr rtlCol="0" anchor="ctr"/>
-          <a:lstStyle/>
-          <a:p>
-            <a:pPr algn="ctr"/>
-          </a:p>
-        </p:txBody>
-      </p:sp>
-      <p:sp>
-        <p:nvSpPr>
-          <p:cNvPr id="26" name="Oval 25"/>
-          <p:cNvSpPr/>
-          <p:nvPr/>
-        </p:nvSpPr>
-        <p:spPr>
-          <a:xfrm>
-            <a:off x="804672" y="5650992"/>
-            <a:ext cx="457200" cy="457200"/>
-          </a:xfrm>
-          <a:prstGeom prst="ellipse">
-            <a:avLst/>
-          </a:prstGeom>
-          <a:solidFill>
-            <a:srgbClr val="2E7D6B"/>
-          </a:solidFill>
-          <a:ln>
-            <a:noFill/>
-          </a:ln>
-          <a:effectLst/>
-        </p:spPr>
-        <p:style>
-          <a:lnRef idx="1">
-            <a:schemeClr val="accent1"/>
-          </a:lnRef>
-          <a:fillRef idx="3">
-            <a:schemeClr val="accent1"/>
-          </a:fillRef>
-          <a:effectRef idx="2">
-            <a:schemeClr val="accent1"/>
-          </a:effectRef>
-          <a:fontRef idx="minor">
-            <a:schemeClr val="lt1"/>
-          </a:fontRef>
-        </p:style>
-        <p:txBody>
-          <a:bodyPr rtlCol="0" anchor="ctr"/>
-          <a:lstStyle/>
-          <a:p>
-            <a:pPr algn="ctr"/>
-          </a:p>
-        </p:txBody>
-      </p:sp>
-      <p:sp>
-        <p:nvSpPr>
-          <p:cNvPr id="27" name="TextBox 26"/>
-          <p:cNvSpPr txBox="1"/>
-          <p:nvPr/>
-        </p:nvSpPr>
-        <p:spPr>
-          <a:xfrm>
-            <a:off x="804672" y="5705856"/>
-            <a:ext cx="457200" cy="384048"/>
-          </a:xfrm>
-          <a:prstGeom prst="rect">
-            <a:avLst/>
-          </a:prstGeom>
-          <a:noFill/>
-        </p:spPr>
-        <p:txBody>
-          <a:bodyPr wrap="square" anchor="t" lIns="0" rIns="0" tIns="0" bIns="0">
-            <a:spAutoFit/>
-          </a:bodyPr>
-          <a:lstStyle/>
-          <a:p>
-            <a:pPr algn="ctr"/>
-            <a:r>
-              <a:rPr sz="1600" b="1">
-                <a:solidFill>
-                  <a:srgbClr val="FFFFFF"/>
-                </a:solidFill>
-                <a:latin typeface="微软雅黑"/>
-                <a:ea typeface="微软雅黑"/>
-                <a:cs typeface="微软雅黑"/>
-              </a:rPr>
-              <a:t>6</a:t>
-            </a:r>
-          </a:p>
-        </p:txBody>
-      </p:sp>
-      <p:sp>
-        <p:nvSpPr>
-          <p:cNvPr id="28" name="TextBox 27"/>
-          <p:cNvSpPr txBox="1"/>
-          <p:nvPr/>
-        </p:nvSpPr>
-        <p:spPr>
-          <a:xfrm>
-            <a:off x="1371600" y="5596128"/>
-            <a:ext cx="9997135" cy="484632"/>
-          </a:xfrm>
-          <a:prstGeom prst="rect">
-            <a:avLst/>
-          </a:prstGeom>
-          <a:noFill/>
-        </p:spPr>
-        <p:txBody>
-          <a:bodyPr wrap="square" anchor="t" lIns="0" rIns="0" tIns="0" bIns="0">
-            <a:spAutoFit/>
-          </a:bodyPr>
-          <a:lstStyle/>
-          <a:p>
-            <a:pPr algn="l">
-              <a:lnSpc>
-                <a:spcPct val="110000"/>
-              </a:lnSpc>
-            </a:pPr>
-            <a:r>
-              <a:rPr sz="1400" b="1">
-                <a:solidFill>
-                  <a:srgbClr val="1C2A33"/>
-                </a:solidFill>
-                <a:latin typeface="微软雅黑"/>
-                <a:ea typeface="微软雅黑"/>
-                <a:cs typeface="微软雅黑"/>
-              </a:rPr>
-              <a:t>Step 6 终稿修改+互签</a:t>
-            </a:r>
-          </a:p>
-        </p:txBody>
-      </p:sp>
-      <p:sp>
-        <p:nvSpPr>
-          <p:cNvPr id="29" name="TextBox 28"/>
+                <a:latin typeface="楷体"/>
+                <a:ea typeface="楷体"/>
+                <a:cs typeface="楷体"/>
+              </a:rPr>
+              <a:t>当场修改一首学生习作，展示修改思路。</a:t>
+            </a:r>
+          </a:p>
+        </p:txBody>
+      </p:sp>
+      <p:sp>
+        <p:nvSpPr>
+          <p:cNvPr id="26" name="TextBox 25"/>
           <p:cNvSpPr txBox="1"/>
           <p:nvPr/>
         </p:nvSpPr>
@@ -6589,7 +7018,7 @@
                 <a:ea typeface="微软雅黑"/>
                 <a:cs typeface="微软雅黑"/>
               </a:rPr>
-              <a:t>易混易错</a:t>
+              <a:t>难点</a:t>
             </a:r>
           </a:p>
         </p:txBody>
@@ -6640,14 +7069,58 @@
       </p:sp>
       <p:sp>
         <p:nvSpPr>
-          <p:cNvPr id="5" name="Rounded Rectangle 4"/>
+          <p:cNvPr id="5" name="TextBox 4"/>
+          <p:cNvSpPr txBox="1"/>
+          <p:nvPr/>
+        </p:nvSpPr>
+        <p:spPr>
+          <a:xfrm>
+            <a:off x="640080" y="1325880"/>
+            <a:ext cx="10911535" cy="548640"/>
+          </a:xfrm>
+          <a:prstGeom prst="rect">
+            <a:avLst/>
+          </a:prstGeom>
+          <a:noFill/>
+        </p:spPr>
+        <p:txBody>
+          <a:bodyPr wrap="square" anchor="t" lIns="0" rIns="0" tIns="0" bIns="0">
+            <a:spAutoFit/>
+          </a:bodyPr>
+          <a:lstStyle/>
+          <a:p>
+            <a:pPr algn="l">
+              <a:lnSpc>
+                <a:spcPct val="145000"/>
+              </a:lnSpc>
+              <a:spcAft>
+                <a:spcPts val="400"/>
+              </a:spcAft>
+            </a:pPr>
+            <a:r>
+              <a:rPr sz="2600" b="1">
+                <a:solidFill>
+                  <a:srgbClr val="1C2A33"/>
+                </a:solidFill>
+                <a:latin typeface="楷体"/>
+                <a:ea typeface="楷体"/>
+                <a:cs typeface="楷体"/>
+              </a:rPr>
+              <a:t>本课难点 · 怎么破</a:t>
+            </a:r>
+          </a:p>
+        </p:txBody>
+      </p:sp>
+      <p:sp>
+        <p:nvSpPr>
+          <p:cNvPr id="6" name="Rounded Rectangle 5"/>
           <p:cNvSpPr/>
           <p:nvPr/>
         </p:nvSpPr>
         <p:spPr>
           <a:xfrm>
-            <a:off x="640080" y="1417320"/>
-            <a:ext cx="5349240" cy="2057400"/>
+            <a:off x="640080" y="2194560"/>
+            <a:ext cx="3393338" cy="3931920"/>
           </a:xfrm>
           <a:prstGeom prst="roundRect">
             <a:avLst/>
@@ -6655,7 +7128,7 @@
           <a:solidFill>
             <a:srgbClr val="FFFFFF"/>
           </a:solidFill>
-          <a:ln w="22860">
+          <a:ln w="20320">
             <a:solidFill>
               <a:srgbClr val="B23A2A"/>
             </a:solidFill>
@@ -6686,14 +7159,14 @@
       </p:sp>
       <p:sp>
         <p:nvSpPr>
-          <p:cNvPr id="6" name="Oval 5"/>
+          <p:cNvPr id="7" name="Oval 6"/>
           <p:cNvSpPr/>
           <p:nvPr/>
         </p:nvSpPr>
         <p:spPr>
           <a:xfrm>
-            <a:off x="804672" y="1581912"/>
-            <a:ext cx="457200" cy="457200"/>
+            <a:off x="822960" y="2377440"/>
+            <a:ext cx="502920" cy="502920"/>
           </a:xfrm>
           <a:prstGeom prst="ellipse">
             <a:avLst/>
@@ -6730,14 +7203,14 @@
       </p:sp>
       <p:sp>
         <p:nvSpPr>
-          <p:cNvPr id="7" name="TextBox 6"/>
+          <p:cNvPr id="8" name="TextBox 7"/>
           <p:cNvSpPr txBox="1"/>
           <p:nvPr/>
         </p:nvSpPr>
         <p:spPr>
           <a:xfrm>
-            <a:off x="804672" y="1636776"/>
-            <a:ext cx="457200" cy="384048"/>
+            <a:off x="822960" y="2450592"/>
+            <a:ext cx="502920" cy="384048"/>
           </a:xfrm>
           <a:prstGeom prst="rect">
             <a:avLst/>
@@ -6750,9 +7223,16 @@
           </a:bodyPr>
           <a:lstStyle/>
           <a:p>
-            <a:pPr algn="ctr"/>
-            <a:r>
-              <a:rPr sz="1600" b="1">
+            <a:pPr algn="ctr">
+              <a:lnSpc>
+                <a:spcPct val="145000"/>
+              </a:lnSpc>
+              <a:spcAft>
+                <a:spcPts val="400"/>
+              </a:spcAft>
+            </a:pPr>
+            <a:r>
+              <a:rPr sz="1800" b="1">
                 <a:solidFill>
                   <a:srgbClr val="FFFFFF"/>
                 </a:solidFill>
@@ -6760,21 +7240,21 @@
                 <a:ea typeface="微软雅黑"/>
                 <a:cs typeface="微软雅黑"/>
               </a:rPr>
-              <a:t>!</a:t>
-            </a:r>
-          </a:p>
-        </p:txBody>
-      </p:sp>
-      <p:sp>
-        <p:nvSpPr>
-          <p:cNvPr id="8" name="TextBox 7"/>
+              <a:t>①</a:t>
+            </a:r>
+          </a:p>
+        </p:txBody>
+      </p:sp>
+      <p:sp>
+        <p:nvSpPr>
+          <p:cNvPr id="9" name="TextBox 8"/>
           <p:cNvSpPr txBox="1"/>
           <p:nvPr/>
         </p:nvSpPr>
         <p:spPr>
           <a:xfrm>
-            <a:off x="1371600" y="1527048"/>
-            <a:ext cx="4434840" cy="457200"/>
+            <a:off x="1508760" y="2395728"/>
+            <a:ext cx="2296058" cy="822960"/>
           </a:xfrm>
           <a:prstGeom prst="rect">
             <a:avLst/>
@@ -6789,33 +7269,36 @@
           <a:p>
             <a:pPr algn="l">
               <a:lnSpc>
-                <a:spcPct val="110000"/>
+                <a:spcPct val="130000"/>
               </a:lnSpc>
+              <a:spcAft>
+                <a:spcPts val="400"/>
+              </a:spcAft>
             </a:pPr>
             <a:r>
               <a:rPr sz="1600" b="1">
                 <a:solidFill>
-                  <a:srgbClr val="1C2A33"/>
+                  <a:srgbClr val="B23A2A"/>
                 </a:solidFill>
                 <a:latin typeface="微软雅黑"/>
                 <a:ea typeface="微软雅黑"/>
                 <a:cs typeface="微软雅黑"/>
               </a:rPr>
-              <a:t/>
-            </a:r>
-          </a:p>
-        </p:txBody>
-      </p:sp>
-      <p:sp>
-        <p:nvSpPr>
-          <p:cNvPr id="9" name="TextBox 8"/>
+              <a:t>「意象模糊」的诊断。原因</a:t>
+            </a:r>
+          </a:p>
+        </p:txBody>
+      </p:sp>
+      <p:sp>
+        <p:nvSpPr>
+          <p:cNvPr id="10" name="TextBox 9"/>
           <p:cNvSpPr txBox="1"/>
           <p:nvPr/>
         </p:nvSpPr>
         <p:spPr>
           <a:xfrm>
-            <a:off x="1371600" y="1965960"/>
-            <a:ext cx="4434840" cy="1417320"/>
+            <a:off x="868680" y="3154680"/>
+            <a:ext cx="2936138" cy="2788920"/>
           </a:xfrm>
           <a:prstGeom prst="rect">
             <a:avLst/>
@@ -6830,11 +7313,14 @@
           <a:p>
             <a:pPr algn="l">
               <a:lnSpc>
-                <a:spcPct val="128000"/>
+                <a:spcPct val="145000"/>
               </a:lnSpc>
-            </a:pPr>
-            <a:r>
-              <a:rPr sz="1200" b="0">
+              <a:spcAft>
+                <a:spcPts val="400"/>
+              </a:spcAft>
+            </a:pPr>
+            <a:r>
+              <a:rPr sz="1350" b="0">
                 <a:solidFill>
                   <a:srgbClr val="1C2A33"/>
                 </a:solidFill>
@@ -6842,21 +7328,21 @@
                 <a:ea typeface="楷体"/>
                 <a:cs typeface="楷体"/>
               </a:rPr>
-              <a:t>① 「意象模糊」的诊断。原因：学生看不出自己诗中意象承载的情感不明确，需用「读者读完不知道你想表达什么」来检测。</a:t>
-            </a:r>
-          </a:p>
-        </p:txBody>
-      </p:sp>
-      <p:sp>
-        <p:nvSpPr>
-          <p:cNvPr id="10" name="Rounded Rectangle 9"/>
+              <a:t>学生看不出自己诗中意象承载的情感不明确，需用「读者读完不知道你想表达什么」来检测。</a:t>
+            </a:r>
+          </a:p>
+        </p:txBody>
+      </p:sp>
+      <p:sp>
+        <p:nvSpPr>
+          <p:cNvPr id="11" name="Rounded Rectangle 10"/>
           <p:cNvSpPr/>
           <p:nvPr/>
         </p:nvSpPr>
         <p:spPr>
           <a:xfrm>
-            <a:off x="6263640" y="1417320"/>
-            <a:ext cx="5349240" cy="2057400"/>
+            <a:off x="4399178" y="2194560"/>
+            <a:ext cx="3393338" cy="3931920"/>
           </a:xfrm>
           <a:prstGeom prst="roundRect">
             <a:avLst/>
@@ -6864,9 +7350,9 @@
           <a:solidFill>
             <a:srgbClr val="FFFFFF"/>
           </a:solidFill>
-          <a:ln w="22860">
+          <a:ln w="20320">
             <a:solidFill>
-              <a:srgbClr val="B23A2A"/>
+              <a:srgbClr val="2E7D6B"/>
             </a:solidFill>
           </a:ln>
           <a:effectLst/>
@@ -6895,20 +7381,20 @@
       </p:sp>
       <p:sp>
         <p:nvSpPr>
-          <p:cNvPr id="11" name="Oval 10"/>
+          <p:cNvPr id="12" name="Oval 11"/>
           <p:cNvSpPr/>
           <p:nvPr/>
         </p:nvSpPr>
         <p:spPr>
           <a:xfrm>
-            <a:off x="6428232" y="1581912"/>
-            <a:ext cx="457200" cy="457200"/>
+            <a:off x="4582058" y="2377440"/>
+            <a:ext cx="502920" cy="502920"/>
           </a:xfrm>
           <a:prstGeom prst="ellipse">
             <a:avLst/>
           </a:prstGeom>
           <a:solidFill>
-            <a:srgbClr val="B23A2A"/>
+            <a:srgbClr val="2E7D6B"/>
           </a:solidFill>
           <a:ln>
             <a:noFill/>
@@ -6939,14 +7425,14 @@
       </p:sp>
       <p:sp>
         <p:nvSpPr>
-          <p:cNvPr id="12" name="TextBox 11"/>
+          <p:cNvPr id="13" name="TextBox 12"/>
           <p:cNvSpPr txBox="1"/>
           <p:nvPr/>
         </p:nvSpPr>
         <p:spPr>
           <a:xfrm>
-            <a:off x="6428232" y="1636776"/>
-            <a:ext cx="457200" cy="384048"/>
+            <a:off x="4582058" y="2450592"/>
+            <a:ext cx="502920" cy="384048"/>
           </a:xfrm>
           <a:prstGeom prst="rect">
             <a:avLst/>
@@ -6959,9 +7445,16 @@
           </a:bodyPr>
           <a:lstStyle/>
           <a:p>
-            <a:pPr algn="ctr"/>
-            <a:r>
-              <a:rPr sz="1600" b="1">
+            <a:pPr algn="ctr">
+              <a:lnSpc>
+                <a:spcPct val="145000"/>
+              </a:lnSpc>
+              <a:spcAft>
+                <a:spcPts val="400"/>
+              </a:spcAft>
+            </a:pPr>
+            <a:r>
+              <a:rPr sz="1800" b="1">
                 <a:solidFill>
                   <a:srgbClr val="FFFFFF"/>
                 </a:solidFill>
@@ -6969,21 +7462,21 @@
                 <a:ea typeface="微软雅黑"/>
                 <a:cs typeface="微软雅黑"/>
               </a:rPr>
-              <a:t>!</a:t>
-            </a:r>
-          </a:p>
-        </p:txBody>
-      </p:sp>
-      <p:sp>
-        <p:nvSpPr>
-          <p:cNvPr id="13" name="TextBox 12"/>
+              <a:t>②</a:t>
+            </a:r>
+          </a:p>
+        </p:txBody>
+      </p:sp>
+      <p:sp>
+        <p:nvSpPr>
+          <p:cNvPr id="14" name="TextBox 13"/>
           <p:cNvSpPr txBox="1"/>
           <p:nvPr/>
         </p:nvSpPr>
         <p:spPr>
           <a:xfrm>
-            <a:off x="6995160" y="1527048"/>
-            <a:ext cx="4434840" cy="457200"/>
+            <a:off x="5267858" y="2395728"/>
+            <a:ext cx="2296058" cy="822960"/>
           </a:xfrm>
           <a:prstGeom prst="rect">
             <a:avLst/>
@@ -6998,33 +7491,36 @@
           <a:p>
             <a:pPr algn="l">
               <a:lnSpc>
-                <a:spcPct val="110000"/>
+                <a:spcPct val="130000"/>
               </a:lnSpc>
+              <a:spcAft>
+                <a:spcPts val="400"/>
+              </a:spcAft>
             </a:pPr>
             <a:r>
               <a:rPr sz="1600" b="1">
                 <a:solidFill>
-                  <a:srgbClr val="1C2A33"/>
+                  <a:srgbClr val="2E7D6B"/>
                 </a:solidFill>
                 <a:latin typeface="微软雅黑"/>
                 <a:ea typeface="微软雅黑"/>
                 <a:cs typeface="微软雅黑"/>
               </a:rPr>
-              <a:t/>
-            </a:r>
-          </a:p>
-        </p:txBody>
-      </p:sp>
-      <p:sp>
-        <p:nvSpPr>
-          <p:cNvPr id="14" name="TextBox 13"/>
+              <a:t>「大改」的勇气。原因</a:t>
+            </a:r>
+          </a:p>
+        </p:txBody>
+      </p:sp>
+      <p:sp>
+        <p:nvSpPr>
+          <p:cNvPr id="15" name="TextBox 14"/>
           <p:cNvSpPr txBox="1"/>
           <p:nvPr/>
         </p:nvSpPr>
         <p:spPr>
           <a:xfrm>
-            <a:off x="6995160" y="1965960"/>
-            <a:ext cx="4434840" cy="1417320"/>
+            <a:off x="4627778" y="3154680"/>
+            <a:ext cx="2936138" cy="2788920"/>
           </a:xfrm>
           <a:prstGeom prst="rect">
             <a:avLst/>
@@ -7039,11 +7535,14 @@
           <a:p>
             <a:pPr algn="l">
               <a:lnSpc>
-                <a:spcPct val="128000"/>
+                <a:spcPct val="145000"/>
               </a:lnSpc>
-            </a:pPr>
-            <a:r>
-              <a:rPr sz="1400" b="0">
+              <a:spcAft>
+                <a:spcPts val="400"/>
+              </a:spcAft>
+            </a:pPr>
+            <a:r>
+              <a:rPr sz="1350" b="0">
                 <a:solidFill>
                   <a:srgbClr val="1C2A33"/>
                 </a:solidFill>
@@ -7051,21 +7550,21 @@
                 <a:ea typeface="楷体"/>
                 <a:cs typeface="楷体"/>
               </a:rPr>
-              <a:t>② 「大改」的勇气。原因：学生舍不得删自己写的句子，需鼓励「删比加更重要」。</a:t>
-            </a:r>
-          </a:p>
-        </p:txBody>
-      </p:sp>
-      <p:sp>
-        <p:nvSpPr>
-          <p:cNvPr id="15" name="Rounded Rectangle 14"/>
+              <a:t>学生舍不得删自己写的句子，需鼓励「删比加更重要」。</a:t>
+            </a:r>
+          </a:p>
+        </p:txBody>
+      </p:sp>
+      <p:sp>
+        <p:nvSpPr>
+          <p:cNvPr id="16" name="Rounded Rectangle 15"/>
           <p:cNvSpPr/>
           <p:nvPr/>
         </p:nvSpPr>
         <p:spPr>
           <a:xfrm>
-            <a:off x="640080" y="3703320"/>
-            <a:ext cx="5349240" cy="2057400"/>
+            <a:off x="8158276" y="2194560"/>
+            <a:ext cx="3393338" cy="3931920"/>
           </a:xfrm>
           <a:prstGeom prst="roundRect">
             <a:avLst/>
@@ -7073,9 +7572,9 @@
           <a:solidFill>
             <a:srgbClr val="FFFFFF"/>
           </a:solidFill>
-          <a:ln w="22860">
+          <a:ln w="20320">
             <a:solidFill>
-              <a:srgbClr val="B23A2A"/>
+              <a:srgbClr val="C8A86B"/>
             </a:solidFill>
           </a:ln>
           <a:effectLst/>
@@ -7104,20 +7603,20 @@
       </p:sp>
       <p:sp>
         <p:nvSpPr>
-          <p:cNvPr id="16" name="Oval 15"/>
+          <p:cNvPr id="17" name="Oval 16"/>
           <p:cNvSpPr/>
           <p:nvPr/>
         </p:nvSpPr>
         <p:spPr>
           <a:xfrm>
-            <a:off x="804672" y="3867912"/>
-            <a:ext cx="457200" cy="457200"/>
+            <a:off x="8341156" y="2377440"/>
+            <a:ext cx="502920" cy="502920"/>
           </a:xfrm>
           <a:prstGeom prst="ellipse">
             <a:avLst/>
           </a:prstGeom>
           <a:solidFill>
-            <a:srgbClr val="B23A2A"/>
+            <a:srgbClr val="C8A86B"/>
           </a:solidFill>
           <a:ln>
             <a:noFill/>
@@ -7148,14 +7647,14 @@
       </p:sp>
       <p:sp>
         <p:nvSpPr>
-          <p:cNvPr id="17" name="TextBox 16"/>
+          <p:cNvPr id="18" name="TextBox 17"/>
           <p:cNvSpPr txBox="1"/>
           <p:nvPr/>
         </p:nvSpPr>
         <p:spPr>
           <a:xfrm>
-            <a:off x="804672" y="3922776"/>
-            <a:ext cx="457200" cy="384048"/>
+            <a:off x="8341156" y="2450592"/>
+            <a:ext cx="502920" cy="384048"/>
           </a:xfrm>
           <a:prstGeom prst="rect">
             <a:avLst/>
@@ -7168,9 +7667,16 @@
           </a:bodyPr>
           <a:lstStyle/>
           <a:p>
-            <a:pPr algn="ctr"/>
-            <a:r>
-              <a:rPr sz="1600" b="1">
+            <a:pPr algn="ctr">
+              <a:lnSpc>
+                <a:spcPct val="145000"/>
+              </a:lnSpc>
+              <a:spcAft>
+                <a:spcPts val="400"/>
+              </a:spcAft>
+            </a:pPr>
+            <a:r>
+              <a:rPr sz="1800" b="1">
                 <a:solidFill>
                   <a:srgbClr val="FFFFFF"/>
                 </a:solidFill>
@@ -7178,21 +7684,21 @@
                 <a:ea typeface="微软雅黑"/>
                 <a:cs typeface="微软雅黑"/>
               </a:rPr>
-              <a:t>!</a:t>
-            </a:r>
-          </a:p>
-        </p:txBody>
-      </p:sp>
-      <p:sp>
-        <p:nvSpPr>
-          <p:cNvPr id="18" name="TextBox 17"/>
+              <a:t>③</a:t>
+            </a:r>
+          </a:p>
+        </p:txBody>
+      </p:sp>
+      <p:sp>
+        <p:nvSpPr>
+          <p:cNvPr id="19" name="TextBox 18"/>
           <p:cNvSpPr txBox="1"/>
           <p:nvPr/>
         </p:nvSpPr>
         <p:spPr>
           <a:xfrm>
-            <a:off x="1371600" y="3813048"/>
-            <a:ext cx="4434840" cy="457200"/>
+            <a:off x="9026956" y="2395728"/>
+            <a:ext cx="2296058" cy="822960"/>
           </a:xfrm>
           <a:prstGeom prst="rect">
             <a:avLst/>
@@ -7207,33 +7713,36 @@
           <a:p>
             <a:pPr algn="l">
               <a:lnSpc>
-                <a:spcPct val="110000"/>
+                <a:spcPct val="130000"/>
               </a:lnSpc>
+              <a:spcAft>
+                <a:spcPts val="400"/>
+              </a:spcAft>
             </a:pPr>
             <a:r>
               <a:rPr sz="1600" b="1">
                 <a:solidFill>
-                  <a:srgbClr val="1C2A33"/>
+                  <a:srgbClr val="C8A86B"/>
                 </a:solidFill>
                 <a:latin typeface="微软雅黑"/>
                 <a:ea typeface="微软雅黑"/>
                 <a:cs typeface="微软雅黑"/>
               </a:rPr>
-              <a:t/>
-            </a:r>
-          </a:p>
-        </p:txBody>
-      </p:sp>
-      <p:sp>
-        <p:nvSpPr>
-          <p:cNvPr id="19" name="TextBox 18"/>
+              <a:t>讲评的接受度。原因</a:t>
+            </a:r>
+          </a:p>
+        </p:txBody>
+      </p:sp>
+      <p:sp>
+        <p:nvSpPr>
+          <p:cNvPr id="20" name="TextBox 19"/>
           <p:cNvSpPr txBox="1"/>
           <p:nvPr/>
         </p:nvSpPr>
         <p:spPr>
           <a:xfrm>
-            <a:off x="1371600" y="4251960"/>
-            <a:ext cx="4434840" cy="1417320"/>
+            <a:off x="8386876" y="3154680"/>
+            <a:ext cx="2936138" cy="2788920"/>
           </a:xfrm>
           <a:prstGeom prst="rect">
             <a:avLst/>
@@ -7248,11 +7757,14 @@
           <a:p>
             <a:pPr algn="l">
               <a:lnSpc>
-                <a:spcPct val="128000"/>
+                <a:spcPct val="145000"/>
               </a:lnSpc>
-            </a:pPr>
-            <a:r>
-              <a:rPr sz="1200" b="0">
+              <a:spcAft>
+                <a:spcPts val="400"/>
+              </a:spcAft>
+            </a:pPr>
+            <a:r>
+              <a:rPr sz="1350" b="0">
                 <a:solidFill>
                   <a:srgbClr val="1C2A33"/>
                 </a:solidFill>
@@ -7260,14 +7772,14 @@
                 <a:ea typeface="楷体"/>
                 <a:cs typeface="楷体"/>
               </a:rPr>
-              <a:t>③ 讲评的接受度。原因：被公开讲评的学生可能有压力，需先讲优点再提建议，保护写作热情。</a:t>
-            </a:r>
-          </a:p>
-        </p:txBody>
-      </p:sp>
-      <p:sp>
-        <p:nvSpPr>
-          <p:cNvPr id="20" name="TextBox 19"/>
+              <a:t>被公开讲评的学生可能有压力，需先讲优点再提建议，保护写作热情。</a:t>
+            </a:r>
+          </a:p>
+        </p:txBody>
+      </p:sp>
+      <p:sp>
+        <p:nvSpPr>
+          <p:cNvPr id="21" name="TextBox 20"/>
           <p:cNvSpPr txBox="1"/>
           <p:nvPr/>
         </p:nvSpPr>
@@ -7394,13 +7906,13 @@
             <a:r>
               <a:rPr sz="1300" b="1">
                 <a:solidFill>
-                  <a:srgbClr val="C8A86B"/>
+                  <a:srgbClr val="B23A2A"/>
                 </a:solidFill>
                 <a:latin typeface="微软雅黑"/>
                 <a:ea typeface="微软雅黑"/>
                 <a:cs typeface="微软雅黑"/>
               </a:rPr>
-              <a:t>要点板书</a:t>
+              <a:t>板书精华</a:t>
             </a:r>
           </a:p>
         </p:txBody>
@@ -7420,7 +7932,7 @@
             <a:avLst/>
           </a:prstGeom>
           <a:solidFill>
-            <a:srgbClr val="C8A86B"/>
+            <a:srgbClr val="B23A2A"/>
           </a:solidFill>
           <a:ln>
             <a:noFill/>
@@ -7451,24 +7963,68 @@
       </p:sp>
       <p:sp>
         <p:nvSpPr>
-          <p:cNvPr id="5" name="Rounded Rectangle 4"/>
+          <p:cNvPr id="5" name="TextBox 4"/>
+          <p:cNvSpPr txBox="1"/>
+          <p:nvPr/>
+        </p:nvSpPr>
+        <p:spPr>
+          <a:xfrm>
+            <a:off x="640080" y="1325880"/>
+            <a:ext cx="10911535" cy="548640"/>
+          </a:xfrm>
+          <a:prstGeom prst="rect">
+            <a:avLst/>
+          </a:prstGeom>
+          <a:noFill/>
+        </p:spPr>
+        <p:txBody>
+          <a:bodyPr wrap="square" anchor="t" lIns="0" rIns="0" tIns="0" bIns="0">
+            <a:spAutoFit/>
+          </a:bodyPr>
+          <a:lstStyle/>
+          <a:p>
+            <a:pPr algn="l">
+              <a:lnSpc>
+                <a:spcPct val="145000"/>
+              </a:lnSpc>
+              <a:spcAft>
+                <a:spcPts val="400"/>
+              </a:spcAft>
+            </a:pPr>
+            <a:r>
+              <a:rPr sz="2600" b="1">
+                <a:solidFill>
+                  <a:srgbClr val="1C2A33"/>
+                </a:solidFill>
+                <a:latin typeface="楷体"/>
+                <a:ea typeface="楷体"/>
+                <a:cs typeface="楷体"/>
+              </a:rPr>
+              <a:t>本课结构精华</a:t>
+            </a:r>
+          </a:p>
+        </p:txBody>
+      </p:sp>
+      <p:sp>
+        <p:nvSpPr>
+          <p:cNvPr id="6" name="Rounded Rectangle 5"/>
           <p:cNvSpPr/>
           <p:nvPr/>
         </p:nvSpPr>
         <p:spPr>
           <a:xfrm>
-            <a:off x="640080" y="1417320"/>
-            <a:ext cx="10911535" cy="5394960"/>
+            <a:off x="640080" y="2011680"/>
+            <a:ext cx="10911535" cy="4480560"/>
           </a:xfrm>
           <a:prstGeom prst="roundRect">
             <a:avLst/>
           </a:prstGeom>
           <a:solidFill>
-            <a:srgbClr val="FFFFFF"/>
+            <a:srgbClr val="E7DFD2"/>
           </a:solidFill>
-          <a:ln w="25400">
+          <a:ln w="12700">
             <a:solidFill>
-              <a:srgbClr val="C8A86B"/>
+              <a:srgbClr val="6B6258"/>
             </a:solidFill>
           </a:ln>
           <a:effectLst/>
@@ -7497,14 +8053,14 @@
       </p:sp>
       <p:sp>
         <p:nvSpPr>
-          <p:cNvPr id="6" name="TextBox 5"/>
+          <p:cNvPr id="7" name="TextBox 6"/>
           <p:cNvSpPr txBox="1"/>
           <p:nvPr/>
         </p:nvSpPr>
         <p:spPr>
           <a:xfrm>
-            <a:off x="914400" y="1554480"/>
-            <a:ext cx="10362895" cy="5120640"/>
+            <a:off x="914400" y="2148840"/>
+            <a:ext cx="4907127" cy="4206240"/>
           </a:xfrm>
           <a:prstGeom prst="rect">
             <a:avLst/>
@@ -7519,57 +8075,535 @@
           <a:p>
             <a:pPr algn="l">
               <a:lnSpc>
-                <a:spcPct val="110000"/>
+                <a:spcPct val="135000"/>
               </a:lnSpc>
               <a:spcAft>
-                <a:spcPts val="100"/>
-              </a:spcAft>
-            </a:pPr>
-            <a:r>
-              <a:rPr sz="1300" b="0">
+                <a:spcPts val="300"/>
+              </a:spcAft>
+            </a:pPr>
+            <a:r>
+              <a:rPr sz="1250" b="0">
                 <a:solidFill>
                   <a:srgbClr val="1C2A33"/>
                 </a:solidFill>
-                <a:latin typeface="微软雅黑"/>
-                <a:ea typeface="微软雅黑"/>
-                <a:cs typeface="微软雅黑"/>
-              </a:rPr>
-              <a:t>┌── 写作讲评 ──┐
-│ 【好诗三标准】 │
-│ ①意象鲜明 │
-│ ②情感真挚 │
-│ ③语言有张力 │
-│ │
-│ 习作A:意象✓ │
-│ 语言△ │
-│ →改语言 │
-│ 安静→沉默 │
-│ 错字→痕迹 │
-│ │
-│ 习作B:意象✗ │
-│ 情感✓ │
-│ →换意象 │
-│ 飞→具体物 │
-│ │
-│ 习作C:意象✓ │
-│ 情感✓ │
-│ 语言✓ │
-│ →赏析 │
-│ 台灯=种子 │
-│ 我=种子 │
-│ →都在生长 │
-│ │
-│ 【修改三方向】 │
-│ 换意象/调节奏/ │
-│ 炼字 │
-└────────────────┘</a:t>
-            </a:r>
-          </a:p>
-        </p:txBody>
-      </p:sp>
-      <p:sp>
-        <p:nvSpPr>
-          <p:cNvPr id="7" name="TextBox 6"/>
+                <a:latin typeface="楷体"/>
+                <a:ea typeface="楷体"/>
+                <a:cs typeface="楷体"/>
+              </a:rPr>
+              <a:t>写作讲评</a:t>
+            </a:r>
+          </a:p>
+          <a:p>
+            <a:pPr algn="l">
+              <a:lnSpc>
+                <a:spcPct val="135000"/>
+              </a:lnSpc>
+              <a:spcAft>
+                <a:spcPts val="300"/>
+              </a:spcAft>
+            </a:pPr>
+            <a:r>
+              <a:rPr sz="1250" b="0">
+                <a:solidFill>
+                  <a:srgbClr val="1C2A33"/>
+                </a:solidFill>
+                <a:latin typeface="楷体"/>
+                <a:ea typeface="楷体"/>
+                <a:cs typeface="楷体"/>
+              </a:rPr>
+              <a:t>【好诗三标准】</a:t>
+            </a:r>
+          </a:p>
+          <a:p>
+            <a:pPr algn="l">
+              <a:lnSpc>
+                <a:spcPct val="135000"/>
+              </a:lnSpc>
+              <a:spcAft>
+                <a:spcPts val="300"/>
+              </a:spcAft>
+            </a:pPr>
+            <a:r>
+              <a:rPr sz="1250" b="0">
+                <a:solidFill>
+                  <a:srgbClr val="1C2A33"/>
+                </a:solidFill>
+                <a:latin typeface="楷体"/>
+                <a:ea typeface="楷体"/>
+                <a:cs typeface="楷体"/>
+              </a:rPr>
+              <a:t>①意象鲜明</a:t>
+            </a:r>
+          </a:p>
+          <a:p>
+            <a:pPr algn="l">
+              <a:lnSpc>
+                <a:spcPct val="135000"/>
+              </a:lnSpc>
+              <a:spcAft>
+                <a:spcPts val="300"/>
+              </a:spcAft>
+            </a:pPr>
+            <a:r>
+              <a:rPr sz="1250" b="0">
+                <a:solidFill>
+                  <a:srgbClr val="1C2A33"/>
+                </a:solidFill>
+                <a:latin typeface="楷体"/>
+                <a:ea typeface="楷体"/>
+                <a:cs typeface="楷体"/>
+              </a:rPr>
+              <a:t>②情感真挚</a:t>
+            </a:r>
+          </a:p>
+          <a:p>
+            <a:pPr algn="l">
+              <a:lnSpc>
+                <a:spcPct val="135000"/>
+              </a:lnSpc>
+              <a:spcAft>
+                <a:spcPts val="300"/>
+              </a:spcAft>
+            </a:pPr>
+            <a:r>
+              <a:rPr sz="1250" b="0">
+                <a:solidFill>
+                  <a:srgbClr val="1C2A33"/>
+                </a:solidFill>
+                <a:latin typeface="楷体"/>
+                <a:ea typeface="楷体"/>
+                <a:cs typeface="楷体"/>
+              </a:rPr>
+              <a:t>③语言有张力</a:t>
+            </a:r>
+          </a:p>
+          <a:p>
+            <a:pPr algn="l">
+              <a:lnSpc>
+                <a:spcPct val="135000"/>
+              </a:lnSpc>
+              <a:spcAft>
+                <a:spcPts val="300"/>
+              </a:spcAft>
+            </a:pPr>
+            <a:r>
+              <a:rPr sz="1250" b="0">
+                <a:solidFill>
+                  <a:srgbClr val="1C2A33"/>
+                </a:solidFill>
+                <a:latin typeface="楷体"/>
+                <a:ea typeface="楷体"/>
+                <a:cs typeface="楷体"/>
+              </a:rPr>
+              <a:t>习作A:意象✓</a:t>
+            </a:r>
+          </a:p>
+          <a:p>
+            <a:pPr algn="l">
+              <a:lnSpc>
+                <a:spcPct val="135000"/>
+              </a:lnSpc>
+              <a:spcAft>
+                <a:spcPts val="300"/>
+              </a:spcAft>
+            </a:pPr>
+            <a:r>
+              <a:rPr sz="1250" b="0">
+                <a:solidFill>
+                  <a:srgbClr val="1C2A33"/>
+                </a:solidFill>
+                <a:latin typeface="楷体"/>
+                <a:ea typeface="楷体"/>
+                <a:cs typeface="楷体"/>
+              </a:rPr>
+              <a:t>语言△</a:t>
+            </a:r>
+          </a:p>
+          <a:p>
+            <a:pPr algn="l">
+              <a:lnSpc>
+                <a:spcPct val="135000"/>
+              </a:lnSpc>
+              <a:spcAft>
+                <a:spcPts val="300"/>
+              </a:spcAft>
+            </a:pPr>
+            <a:r>
+              <a:rPr sz="1250" b="0">
+                <a:solidFill>
+                  <a:srgbClr val="1C2A33"/>
+                </a:solidFill>
+                <a:latin typeface="楷体"/>
+                <a:ea typeface="楷体"/>
+                <a:cs typeface="楷体"/>
+              </a:rPr>
+              <a:t>→改语言</a:t>
+            </a:r>
+          </a:p>
+          <a:p>
+            <a:pPr algn="l">
+              <a:lnSpc>
+                <a:spcPct val="135000"/>
+              </a:lnSpc>
+              <a:spcAft>
+                <a:spcPts val="300"/>
+              </a:spcAft>
+            </a:pPr>
+            <a:r>
+              <a:rPr sz="1250" b="0">
+                <a:solidFill>
+                  <a:srgbClr val="1C2A33"/>
+                </a:solidFill>
+                <a:latin typeface="楷体"/>
+                <a:ea typeface="楷体"/>
+                <a:cs typeface="楷体"/>
+              </a:rPr>
+              <a:t>安静→沉默</a:t>
+            </a:r>
+          </a:p>
+          <a:p>
+            <a:pPr algn="l">
+              <a:lnSpc>
+                <a:spcPct val="135000"/>
+              </a:lnSpc>
+              <a:spcAft>
+                <a:spcPts val="300"/>
+              </a:spcAft>
+            </a:pPr>
+            <a:r>
+              <a:rPr sz="1250" b="0">
+                <a:solidFill>
+                  <a:srgbClr val="1C2A33"/>
+                </a:solidFill>
+                <a:latin typeface="楷体"/>
+                <a:ea typeface="楷体"/>
+                <a:cs typeface="楷体"/>
+              </a:rPr>
+              <a:t>错字→痕迹</a:t>
+            </a:r>
+          </a:p>
+          <a:p>
+            <a:pPr algn="l">
+              <a:lnSpc>
+                <a:spcPct val="135000"/>
+              </a:lnSpc>
+              <a:spcAft>
+                <a:spcPts val="300"/>
+              </a:spcAft>
+            </a:pPr>
+            <a:r>
+              <a:rPr sz="1250" b="0">
+                <a:solidFill>
+                  <a:srgbClr val="1C2A33"/>
+                </a:solidFill>
+                <a:latin typeface="楷体"/>
+                <a:ea typeface="楷体"/>
+                <a:cs typeface="楷体"/>
+              </a:rPr>
+              <a:t>习作B:意象✗</a:t>
+            </a:r>
+          </a:p>
+          <a:p>
+            <a:pPr algn="l">
+              <a:lnSpc>
+                <a:spcPct val="135000"/>
+              </a:lnSpc>
+              <a:spcAft>
+                <a:spcPts val="300"/>
+              </a:spcAft>
+            </a:pPr>
+            <a:r>
+              <a:rPr sz="1250" b="0">
+                <a:solidFill>
+                  <a:srgbClr val="1C2A33"/>
+                </a:solidFill>
+                <a:latin typeface="楷体"/>
+                <a:ea typeface="楷体"/>
+                <a:cs typeface="楷体"/>
+              </a:rPr>
+              <a:t>情感✓</a:t>
+            </a:r>
+          </a:p>
+        </p:txBody>
+      </p:sp>
+      <p:sp>
+        <p:nvSpPr>
+          <p:cNvPr id="8" name="TextBox 7"/>
+          <p:cNvSpPr txBox="1"/>
+          <p:nvPr/>
+        </p:nvSpPr>
+        <p:spPr>
+          <a:xfrm>
+            <a:off x="6095847" y="2148840"/>
+            <a:ext cx="4907127" cy="4206240"/>
+          </a:xfrm>
+          <a:prstGeom prst="rect">
+            <a:avLst/>
+          </a:prstGeom>
+          <a:noFill/>
+        </p:spPr>
+        <p:txBody>
+          <a:bodyPr wrap="square" anchor="t" lIns="0" rIns="0" tIns="0" bIns="0">
+            <a:spAutoFit/>
+          </a:bodyPr>
+          <a:lstStyle/>
+          <a:p>
+            <a:pPr algn="l">
+              <a:lnSpc>
+                <a:spcPct val="135000"/>
+              </a:lnSpc>
+              <a:spcAft>
+                <a:spcPts val="300"/>
+              </a:spcAft>
+            </a:pPr>
+            <a:r>
+              <a:rPr sz="1250" b="0">
+                <a:solidFill>
+                  <a:srgbClr val="1C2A33"/>
+                </a:solidFill>
+                <a:latin typeface="楷体"/>
+                <a:ea typeface="楷体"/>
+                <a:cs typeface="楷体"/>
+              </a:rPr>
+              <a:t>→换意象</a:t>
+            </a:r>
+          </a:p>
+          <a:p>
+            <a:pPr algn="l">
+              <a:lnSpc>
+                <a:spcPct val="135000"/>
+              </a:lnSpc>
+              <a:spcAft>
+                <a:spcPts val="300"/>
+              </a:spcAft>
+            </a:pPr>
+            <a:r>
+              <a:rPr sz="1250" b="0">
+                <a:solidFill>
+                  <a:srgbClr val="1C2A33"/>
+                </a:solidFill>
+                <a:latin typeface="楷体"/>
+                <a:ea typeface="楷体"/>
+                <a:cs typeface="楷体"/>
+              </a:rPr>
+              <a:t>飞→具体物</a:t>
+            </a:r>
+          </a:p>
+          <a:p>
+            <a:pPr algn="l">
+              <a:lnSpc>
+                <a:spcPct val="135000"/>
+              </a:lnSpc>
+              <a:spcAft>
+                <a:spcPts val="300"/>
+              </a:spcAft>
+            </a:pPr>
+            <a:r>
+              <a:rPr sz="1250" b="0">
+                <a:solidFill>
+                  <a:srgbClr val="1C2A33"/>
+                </a:solidFill>
+                <a:latin typeface="楷体"/>
+                <a:ea typeface="楷体"/>
+                <a:cs typeface="楷体"/>
+              </a:rPr>
+              <a:t>习作C:意象✓</a:t>
+            </a:r>
+          </a:p>
+          <a:p>
+            <a:pPr algn="l">
+              <a:lnSpc>
+                <a:spcPct val="135000"/>
+              </a:lnSpc>
+              <a:spcAft>
+                <a:spcPts val="300"/>
+              </a:spcAft>
+            </a:pPr>
+            <a:r>
+              <a:rPr sz="1250" b="0">
+                <a:solidFill>
+                  <a:srgbClr val="1C2A33"/>
+                </a:solidFill>
+                <a:latin typeface="楷体"/>
+                <a:ea typeface="楷体"/>
+                <a:cs typeface="楷体"/>
+              </a:rPr>
+              <a:t>情感✓</a:t>
+            </a:r>
+          </a:p>
+          <a:p>
+            <a:pPr algn="l">
+              <a:lnSpc>
+                <a:spcPct val="135000"/>
+              </a:lnSpc>
+              <a:spcAft>
+                <a:spcPts val="300"/>
+              </a:spcAft>
+            </a:pPr>
+            <a:r>
+              <a:rPr sz="1250" b="0">
+                <a:solidFill>
+                  <a:srgbClr val="1C2A33"/>
+                </a:solidFill>
+                <a:latin typeface="楷体"/>
+                <a:ea typeface="楷体"/>
+                <a:cs typeface="楷体"/>
+              </a:rPr>
+              <a:t>语言✓</a:t>
+            </a:r>
+          </a:p>
+          <a:p>
+            <a:pPr algn="l">
+              <a:lnSpc>
+                <a:spcPct val="135000"/>
+              </a:lnSpc>
+              <a:spcAft>
+                <a:spcPts val="300"/>
+              </a:spcAft>
+            </a:pPr>
+            <a:r>
+              <a:rPr sz="1250" b="0">
+                <a:solidFill>
+                  <a:srgbClr val="1C2A33"/>
+                </a:solidFill>
+                <a:latin typeface="楷体"/>
+                <a:ea typeface="楷体"/>
+                <a:cs typeface="楷体"/>
+              </a:rPr>
+              <a:t>→赏析</a:t>
+            </a:r>
+          </a:p>
+          <a:p>
+            <a:pPr algn="l">
+              <a:lnSpc>
+                <a:spcPct val="135000"/>
+              </a:lnSpc>
+              <a:spcAft>
+                <a:spcPts val="300"/>
+              </a:spcAft>
+            </a:pPr>
+            <a:r>
+              <a:rPr sz="1250" b="0">
+                <a:solidFill>
+                  <a:srgbClr val="1C2A33"/>
+                </a:solidFill>
+                <a:latin typeface="楷体"/>
+                <a:ea typeface="楷体"/>
+                <a:cs typeface="楷体"/>
+              </a:rPr>
+              <a:t>台灯=种子</a:t>
+            </a:r>
+          </a:p>
+          <a:p>
+            <a:pPr algn="l">
+              <a:lnSpc>
+                <a:spcPct val="135000"/>
+              </a:lnSpc>
+              <a:spcAft>
+                <a:spcPts val="300"/>
+              </a:spcAft>
+            </a:pPr>
+            <a:r>
+              <a:rPr sz="1250" b="0">
+                <a:solidFill>
+                  <a:srgbClr val="1C2A33"/>
+                </a:solidFill>
+                <a:latin typeface="楷体"/>
+                <a:ea typeface="楷体"/>
+                <a:cs typeface="楷体"/>
+              </a:rPr>
+              <a:t>我=种子</a:t>
+            </a:r>
+          </a:p>
+          <a:p>
+            <a:pPr algn="l">
+              <a:lnSpc>
+                <a:spcPct val="135000"/>
+              </a:lnSpc>
+              <a:spcAft>
+                <a:spcPts val="300"/>
+              </a:spcAft>
+            </a:pPr>
+            <a:r>
+              <a:rPr sz="1250" b="0">
+                <a:solidFill>
+                  <a:srgbClr val="1C2A33"/>
+                </a:solidFill>
+                <a:latin typeface="楷体"/>
+                <a:ea typeface="楷体"/>
+                <a:cs typeface="楷体"/>
+              </a:rPr>
+              <a:t>→都在生长</a:t>
+            </a:r>
+          </a:p>
+          <a:p>
+            <a:pPr algn="l">
+              <a:lnSpc>
+                <a:spcPct val="135000"/>
+              </a:lnSpc>
+              <a:spcAft>
+                <a:spcPts val="300"/>
+              </a:spcAft>
+            </a:pPr>
+            <a:r>
+              <a:rPr sz="1250" b="0">
+                <a:solidFill>
+                  <a:srgbClr val="1C2A33"/>
+                </a:solidFill>
+                <a:latin typeface="楷体"/>
+                <a:ea typeface="楷体"/>
+                <a:cs typeface="楷体"/>
+              </a:rPr>
+              <a:t>【修改三方向】</a:t>
+            </a:r>
+          </a:p>
+          <a:p>
+            <a:pPr algn="l">
+              <a:lnSpc>
+                <a:spcPct val="135000"/>
+              </a:lnSpc>
+              <a:spcAft>
+                <a:spcPts val="300"/>
+              </a:spcAft>
+            </a:pPr>
+            <a:r>
+              <a:rPr sz="1250" b="0">
+                <a:solidFill>
+                  <a:srgbClr val="1C2A33"/>
+                </a:solidFill>
+                <a:latin typeface="楷体"/>
+                <a:ea typeface="楷体"/>
+                <a:cs typeface="楷体"/>
+              </a:rPr>
+              <a:t>换意象/调节奏/</a:t>
+            </a:r>
+          </a:p>
+          <a:p>
+            <a:pPr algn="l">
+              <a:lnSpc>
+                <a:spcPct val="135000"/>
+              </a:lnSpc>
+              <a:spcAft>
+                <a:spcPts val="300"/>
+              </a:spcAft>
+            </a:pPr>
+            <a:r>
+              <a:rPr sz="1250" b="0">
+                <a:solidFill>
+                  <a:srgbClr val="1C2A33"/>
+                </a:solidFill>
+                <a:latin typeface="楷体"/>
+                <a:ea typeface="楷体"/>
+                <a:cs typeface="楷体"/>
+              </a:rPr>
+              <a:t>炼字</a:t>
+            </a:r>
+          </a:p>
+        </p:txBody>
+      </p:sp>
+      <p:sp>
+        <p:nvSpPr>
+          <p:cNvPr id="9" name="TextBox 8"/>
           <p:cNvSpPr txBox="1"/>
           <p:nvPr/>
         </p:nvSpPr>
@@ -7696,13 +8730,13 @@
             <a:r>
               <a:rPr sz="1300" b="1">
                 <a:solidFill>
-                  <a:srgbClr val="2E7D6B"/>
+                  <a:srgbClr val="B23A2A"/>
                 </a:solidFill>
                 <a:latin typeface="微软雅黑"/>
                 <a:ea typeface="微软雅黑"/>
                 <a:cs typeface="微软雅黑"/>
               </a:rPr>
-              <a:t>分层作业</a:t>
+              <a:t>作业 · 分层</a:t>
             </a:r>
           </a:p>
         </p:txBody>
@@ -7717,6 +8751,318 @@
           <a:xfrm>
             <a:off x="640080" y="1097280"/>
             <a:ext cx="822960" cy="30480"/>
+          </a:xfrm>
+          <a:prstGeom prst="rect">
+            <a:avLst/>
+          </a:prstGeom>
+          <a:solidFill>
+            <a:srgbClr val="B23A2A"/>
+          </a:solidFill>
+          <a:ln>
+            <a:noFill/>
+          </a:ln>
+          <a:effectLst/>
+        </p:spPr>
+        <p:style>
+          <a:lnRef idx="1">
+            <a:schemeClr val="accent1"/>
+          </a:lnRef>
+          <a:fillRef idx="3">
+            <a:schemeClr val="accent1"/>
+          </a:fillRef>
+          <a:effectRef idx="2">
+            <a:schemeClr val="accent1"/>
+          </a:effectRef>
+          <a:fontRef idx="minor">
+            <a:schemeClr val="lt1"/>
+          </a:fontRef>
+        </p:style>
+        <p:txBody>
+          <a:bodyPr rtlCol="0" anchor="ctr"/>
+          <a:lstStyle/>
+          <a:p>
+            <a:pPr algn="ctr"/>
+          </a:p>
+        </p:txBody>
+      </p:sp>
+      <p:sp>
+        <p:nvSpPr>
+          <p:cNvPr id="5" name="TextBox 4"/>
+          <p:cNvSpPr txBox="1"/>
+          <p:nvPr/>
+        </p:nvSpPr>
+        <p:spPr>
+          <a:xfrm>
+            <a:off x="640080" y="1325880"/>
+            <a:ext cx="10911535" cy="548640"/>
+          </a:xfrm>
+          <a:prstGeom prst="rect">
+            <a:avLst/>
+          </a:prstGeom>
+          <a:noFill/>
+        </p:spPr>
+        <p:txBody>
+          <a:bodyPr wrap="square" anchor="t" lIns="0" rIns="0" tIns="0" bIns="0">
+            <a:spAutoFit/>
+          </a:bodyPr>
+          <a:lstStyle/>
+          <a:p>
+            <a:pPr algn="l">
+              <a:lnSpc>
+                <a:spcPct val="145000"/>
+              </a:lnSpc>
+              <a:spcAft>
+                <a:spcPts val="400"/>
+              </a:spcAft>
+            </a:pPr>
+            <a:r>
+              <a:rPr sz="2600" b="1">
+                <a:solidFill>
+                  <a:srgbClr val="1C2A33"/>
+                </a:solidFill>
+                <a:latin typeface="楷体"/>
+                <a:ea typeface="楷体"/>
+                <a:cs typeface="楷体"/>
+              </a:rPr>
+              <a:t>基础 · 提升</a:t>
+            </a:r>
+          </a:p>
+        </p:txBody>
+      </p:sp>
+      <p:sp>
+        <p:nvSpPr>
+          <p:cNvPr id="6" name="Rounded Rectangle 5"/>
+          <p:cNvSpPr/>
+          <p:nvPr/>
+        </p:nvSpPr>
+        <p:spPr>
+          <a:xfrm>
+            <a:off x="640080" y="2194560"/>
+            <a:ext cx="5272887" cy="4023360"/>
+          </a:xfrm>
+          <a:prstGeom prst="roundRect">
+            <a:avLst/>
+          </a:prstGeom>
+          <a:solidFill>
+            <a:srgbClr val="FFFFFF"/>
+          </a:solidFill>
+          <a:ln w="20320">
+            <a:solidFill>
+              <a:srgbClr val="B23A2A"/>
+            </a:solidFill>
+          </a:ln>
+          <a:effectLst/>
+        </p:spPr>
+        <p:style>
+          <a:lnRef idx="1">
+            <a:schemeClr val="accent1"/>
+          </a:lnRef>
+          <a:fillRef idx="3">
+            <a:schemeClr val="accent1"/>
+          </a:fillRef>
+          <a:effectRef idx="2">
+            <a:schemeClr val="accent1"/>
+          </a:effectRef>
+          <a:fontRef idx="minor">
+            <a:schemeClr val="lt1"/>
+          </a:fontRef>
+        </p:style>
+        <p:txBody>
+          <a:bodyPr rtlCol="0" anchor="ctr"/>
+          <a:lstStyle/>
+          <a:p>
+            <a:pPr algn="ctr"/>
+          </a:p>
+        </p:txBody>
+      </p:sp>
+      <p:sp>
+        <p:nvSpPr>
+          <p:cNvPr id="7" name="Rectangle 6"/>
+          <p:cNvSpPr/>
+          <p:nvPr/>
+        </p:nvSpPr>
+        <p:spPr>
+          <a:xfrm>
+            <a:off x="640080" y="2194560"/>
+            <a:ext cx="5272887" cy="548640"/>
+          </a:xfrm>
+          <a:prstGeom prst="rect">
+            <a:avLst/>
+          </a:prstGeom>
+          <a:solidFill>
+            <a:srgbClr val="B23A2A"/>
+          </a:solidFill>
+          <a:ln>
+            <a:noFill/>
+          </a:ln>
+          <a:effectLst/>
+        </p:spPr>
+        <p:style>
+          <a:lnRef idx="1">
+            <a:schemeClr val="accent1"/>
+          </a:lnRef>
+          <a:fillRef idx="3">
+            <a:schemeClr val="accent1"/>
+          </a:fillRef>
+          <a:effectRef idx="2">
+            <a:schemeClr val="accent1"/>
+          </a:effectRef>
+          <a:fontRef idx="minor">
+            <a:schemeClr val="lt1"/>
+          </a:fontRef>
+        </p:style>
+        <p:txBody>
+          <a:bodyPr rtlCol="0" anchor="ctr"/>
+          <a:lstStyle/>
+          <a:p>
+            <a:pPr algn="ctr"/>
+          </a:p>
+        </p:txBody>
+      </p:sp>
+      <p:sp>
+        <p:nvSpPr>
+          <p:cNvPr id="8" name="TextBox 7"/>
+          <p:cNvSpPr txBox="1"/>
+          <p:nvPr/>
+        </p:nvSpPr>
+        <p:spPr>
+          <a:xfrm>
+            <a:off x="640080" y="2304288"/>
+            <a:ext cx="5272887" cy="365760"/>
+          </a:xfrm>
+          <a:prstGeom prst="rect">
+            <a:avLst/>
+          </a:prstGeom>
+          <a:noFill/>
+        </p:spPr>
+        <p:txBody>
+          <a:bodyPr wrap="square" anchor="t" lIns="0" rIns="0" tIns="0" bIns="0">
+            <a:spAutoFit/>
+          </a:bodyPr>
+          <a:lstStyle/>
+          <a:p>
+            <a:pPr algn="ctr">
+              <a:lnSpc>
+                <a:spcPct val="145000"/>
+              </a:lnSpc>
+              <a:spcAft>
+                <a:spcPts val="400"/>
+              </a:spcAft>
+            </a:pPr>
+            <a:r>
+              <a:rPr sz="1600" b="1">
+                <a:solidFill>
+                  <a:srgbClr val="FFFFFF"/>
+                </a:solidFill>
+                <a:latin typeface="微软雅黑"/>
+                <a:ea typeface="微软雅黑"/>
+                <a:cs typeface="微软雅黑"/>
+              </a:rPr>
+              <a:t>基础 · 必做</a:t>
+            </a:r>
+          </a:p>
+        </p:txBody>
+      </p:sp>
+      <p:sp>
+        <p:nvSpPr>
+          <p:cNvPr id="9" name="TextBox 8"/>
+          <p:cNvSpPr txBox="1"/>
+          <p:nvPr/>
+        </p:nvSpPr>
+        <p:spPr>
+          <a:xfrm>
+            <a:off x="914400" y="2971800"/>
+            <a:ext cx="4724247" cy="3063240"/>
+          </a:xfrm>
+          <a:prstGeom prst="rect">
+            <a:avLst/>
+          </a:prstGeom>
+          <a:noFill/>
+        </p:spPr>
+        <p:txBody>
+          <a:bodyPr wrap="square" anchor="t" lIns="0" rIns="0" tIns="0" bIns="0">
+            <a:spAutoFit/>
+          </a:bodyPr>
+          <a:lstStyle/>
+          <a:p>
+            <a:pPr algn="l">
+              <a:lnSpc>
+                <a:spcPct val="150000"/>
+              </a:lnSpc>
+              <a:spcAft>
+                <a:spcPts val="400"/>
+              </a:spcAft>
+            </a:pPr>
+            <a:r>
+              <a:rPr sz="1300" b="0">
+                <a:solidFill>
+                  <a:srgbClr val="1C2A33"/>
+                </a:solidFill>
+                <a:latin typeface="楷体"/>
+                <a:ea typeface="楷体"/>
+                <a:cs typeface="楷体"/>
+              </a:rPr>
+              <a:t>1. 提交新诗终稿（修改后誊抄版），附同桌互签评语。2. 在终稿下方写50字自评：我选了什么意象、改了什么、为什么改。</a:t>
+            </a:r>
+          </a:p>
+        </p:txBody>
+      </p:sp>
+      <p:sp>
+        <p:nvSpPr>
+          <p:cNvPr id="10" name="Rounded Rectangle 9"/>
+          <p:cNvSpPr/>
+          <p:nvPr/>
+        </p:nvSpPr>
+        <p:spPr>
+          <a:xfrm>
+            <a:off x="6278727" y="2194560"/>
+            <a:ext cx="5272887" cy="4023360"/>
+          </a:xfrm>
+          <a:prstGeom prst="roundRect">
+            <a:avLst/>
+          </a:prstGeom>
+          <a:solidFill>
+            <a:srgbClr val="FFFFFF"/>
+          </a:solidFill>
+          <a:ln w="20320">
+            <a:solidFill>
+              <a:srgbClr val="2E7D6B"/>
+            </a:solidFill>
+          </a:ln>
+          <a:effectLst/>
+        </p:spPr>
+        <p:style>
+          <a:lnRef idx="1">
+            <a:schemeClr val="accent1"/>
+          </a:lnRef>
+          <a:fillRef idx="3">
+            <a:schemeClr val="accent1"/>
+          </a:fillRef>
+          <a:effectRef idx="2">
+            <a:schemeClr val="accent1"/>
+          </a:effectRef>
+          <a:fontRef idx="minor">
+            <a:schemeClr val="lt1"/>
+          </a:fontRef>
+        </p:style>
+        <p:txBody>
+          <a:bodyPr rtlCol="0" anchor="ctr"/>
+          <a:lstStyle/>
+          <a:p>
+            <a:pPr algn="ctr"/>
+          </a:p>
+        </p:txBody>
+      </p:sp>
+      <p:sp>
+        <p:nvSpPr>
+          <p:cNvPr id="11" name="Rectangle 10"/>
+          <p:cNvSpPr/>
+          <p:nvPr/>
+        </p:nvSpPr>
+        <p:spPr>
+          <a:xfrm>
+            <a:off x="6278727" y="2194560"/>
+            <a:ext cx="5272887" cy="548640"/>
           </a:xfrm>
           <a:prstGeom prst="rect">
             <a:avLst/>
@@ -7753,60 +9099,14 @@
       </p:sp>
       <p:sp>
         <p:nvSpPr>
-          <p:cNvPr id="5" name="Rounded Rectangle 4"/>
-          <p:cNvSpPr/>
-          <p:nvPr/>
-        </p:nvSpPr>
-        <p:spPr>
-          <a:xfrm>
-            <a:off x="640080" y="1417320"/>
-            <a:ext cx="10911535" cy="1417320"/>
-          </a:xfrm>
-          <a:prstGeom prst="roundRect">
-            <a:avLst/>
-          </a:prstGeom>
-          <a:solidFill>
-            <a:srgbClr val="FFFFFF"/>
-          </a:solidFill>
-          <a:ln w="22860">
-            <a:solidFill>
-              <a:srgbClr val="2E7D6B"/>
-            </a:solidFill>
-          </a:ln>
-          <a:effectLst/>
-        </p:spPr>
-        <p:style>
-          <a:lnRef idx="1">
-            <a:schemeClr val="accent1"/>
-          </a:lnRef>
-          <a:fillRef idx="3">
-            <a:schemeClr val="accent1"/>
-          </a:fillRef>
-          <a:effectRef idx="2">
-            <a:schemeClr val="accent1"/>
-          </a:effectRef>
-          <a:fontRef idx="minor">
-            <a:schemeClr val="lt1"/>
-          </a:fontRef>
-        </p:style>
-        <p:txBody>
-          <a:bodyPr rtlCol="0" anchor="ctr"/>
-          <a:lstStyle/>
-          <a:p>
-            <a:pPr algn="ctr"/>
-          </a:p>
-        </p:txBody>
-      </p:sp>
-      <p:sp>
-        <p:nvSpPr>
-          <p:cNvPr id="6" name="TextBox 5"/>
+          <p:cNvPr id="12" name="TextBox 11"/>
           <p:cNvSpPr txBox="1"/>
           <p:nvPr/>
         </p:nvSpPr>
         <p:spPr>
           <a:xfrm>
-            <a:off x="1371600" y="1527048"/>
-            <a:ext cx="9997135" cy="457200"/>
+            <a:off x="6278727" y="2304288"/>
+            <a:ext cx="5272887" cy="365760"/>
           </a:xfrm>
           <a:prstGeom prst="rect">
             <a:avLst/>
@@ -7819,35 +9119,38 @@
           </a:bodyPr>
           <a:lstStyle/>
           <a:p>
-            <a:pPr algn="l">
+            <a:pPr algn="ctr">
               <a:lnSpc>
-                <a:spcPct val="110000"/>
+                <a:spcPct val="145000"/>
               </a:lnSpc>
+              <a:spcAft>
+                <a:spcPts val="400"/>
+              </a:spcAft>
             </a:pPr>
             <a:r>
               <a:rPr sz="1600" b="1">
                 <a:solidFill>
-                  <a:srgbClr val="1C2A33"/>
+                  <a:srgbClr val="FFFFFF"/>
                 </a:solidFill>
                 <a:latin typeface="微软雅黑"/>
                 <a:ea typeface="微软雅黑"/>
                 <a:cs typeface="微软雅黑"/>
               </a:rPr>
-              <a:t/>
-            </a:r>
-          </a:p>
-        </p:txBody>
-      </p:sp>
-      <p:sp>
-        <p:nvSpPr>
-          <p:cNvPr id="7" name="TextBox 6"/>
+              <a:t>提升 · 选做</a:t>
+            </a:r>
+          </a:p>
+        </p:txBody>
+      </p:sp>
+      <p:sp>
+        <p:nvSpPr>
+          <p:cNvPr id="13" name="TextBox 12"/>
           <p:cNvSpPr txBox="1"/>
           <p:nvPr/>
         </p:nvSpPr>
         <p:spPr>
           <a:xfrm>
-            <a:off x="1371600" y="1965960"/>
-            <a:ext cx="9997135" cy="777240"/>
+            <a:off x="6553047" y="2971800"/>
+            <a:ext cx="4724247" cy="3063240"/>
           </a:xfrm>
           <a:prstGeom prst="rect">
             <a:avLst/>
@@ -7862,11 +9165,14 @@
           <a:p>
             <a:pPr algn="l">
               <a:lnSpc>
-                <a:spcPct val="128000"/>
+                <a:spcPct val="150000"/>
               </a:lnSpc>
-            </a:pPr>
-            <a:r>
-              <a:rPr sz="1100" b="0">
+              <a:spcAft>
+                <a:spcPts val="400"/>
+              </a:spcAft>
+            </a:pPr>
+            <a:r>
+              <a:rPr sz="1300" b="0">
                 <a:solidFill>
                   <a:srgbClr val="1C2A33"/>
                 </a:solidFill>
@@ -7874,142 +9180,14 @@
                 <a:ea typeface="楷体"/>
                 <a:cs typeface="楷体"/>
               </a:rPr>
-              <a:t>【基础作业】1. 提交新诗终稿（修改后誊抄版），附同桌互签评语。2. 在终稿下方写50字自评：我选了什么意象、改了什么、为什么改。</a:t>
-            </a:r>
-          </a:p>
-        </p:txBody>
-      </p:sp>
-      <p:sp>
-        <p:nvSpPr>
-          <p:cNvPr id="8" name="Rounded Rectangle 7"/>
-          <p:cNvSpPr/>
-          <p:nvPr/>
-        </p:nvSpPr>
-        <p:spPr>
-          <a:xfrm>
-            <a:off x="640080" y="2971800"/>
-            <a:ext cx="10911535" cy="1417320"/>
-          </a:xfrm>
-          <a:prstGeom prst="roundRect">
-            <a:avLst/>
-          </a:prstGeom>
-          <a:solidFill>
-            <a:srgbClr val="FFFFFF"/>
-          </a:solidFill>
-          <a:ln w="22860">
-            <a:solidFill>
-              <a:srgbClr val="2E7D6B"/>
-            </a:solidFill>
-          </a:ln>
-          <a:effectLst/>
-        </p:spPr>
-        <p:style>
-          <a:lnRef idx="1">
-            <a:schemeClr val="accent1"/>
-          </a:lnRef>
-          <a:fillRef idx="3">
-            <a:schemeClr val="accent1"/>
-          </a:fillRef>
-          <a:effectRef idx="2">
-            <a:schemeClr val="accent1"/>
-          </a:effectRef>
-          <a:fontRef idx="minor">
-            <a:schemeClr val="lt1"/>
-          </a:fontRef>
-        </p:style>
-        <p:txBody>
-          <a:bodyPr rtlCol="0" anchor="ctr"/>
-          <a:lstStyle/>
-          <a:p>
-            <a:pPr algn="ctr"/>
-          </a:p>
-        </p:txBody>
-      </p:sp>
-      <p:sp>
-        <p:nvSpPr>
-          <p:cNvPr id="9" name="TextBox 8"/>
-          <p:cNvSpPr txBox="1"/>
-          <p:nvPr/>
-        </p:nvSpPr>
-        <p:spPr>
-          <a:xfrm>
-            <a:off x="1371600" y="3081528"/>
-            <a:ext cx="9997135" cy="457200"/>
-          </a:xfrm>
-          <a:prstGeom prst="rect">
-            <a:avLst/>
-          </a:prstGeom>
-          <a:noFill/>
-        </p:spPr>
-        <p:txBody>
-          <a:bodyPr wrap="square" anchor="t" lIns="0" rIns="0" tIns="0" bIns="0">
-            <a:spAutoFit/>
-          </a:bodyPr>
-          <a:lstStyle/>
-          <a:p>
-            <a:pPr algn="l">
-              <a:lnSpc>
-                <a:spcPct val="110000"/>
-              </a:lnSpc>
-            </a:pPr>
-            <a:r>
-              <a:rPr sz="1600" b="1">
-                <a:solidFill>
-                  <a:srgbClr val="1C2A33"/>
-                </a:solidFill>
-                <a:latin typeface="微软雅黑"/>
-                <a:ea typeface="微软雅黑"/>
-                <a:cs typeface="微软雅黑"/>
-              </a:rPr>
-              <a:t/>
-            </a:r>
-          </a:p>
-        </p:txBody>
-      </p:sp>
-      <p:sp>
-        <p:nvSpPr>
-          <p:cNvPr id="10" name="TextBox 9"/>
-          <p:cNvSpPr txBox="1"/>
-          <p:nvPr/>
-        </p:nvSpPr>
-        <p:spPr>
-          <a:xfrm>
-            <a:off x="1371600" y="3520440"/>
-            <a:ext cx="9997135" cy="777240"/>
-          </a:xfrm>
-          <a:prstGeom prst="rect">
-            <a:avLst/>
-          </a:prstGeom>
-          <a:noFill/>
-        </p:spPr>
-        <p:txBody>
-          <a:bodyPr wrap="square" anchor="t" lIns="0" rIns="0" tIns="0" bIns="0">
-            <a:spAutoFit/>
-          </a:bodyPr>
-          <a:lstStyle/>
-          <a:p>
-            <a:pPr algn="l">
-              <a:lnSpc>
-                <a:spcPct val="128000"/>
-              </a:lnSpc>
-            </a:pPr>
-            <a:r>
-              <a:rPr sz="1200" b="0">
-                <a:solidFill>
-                  <a:srgbClr val="1C2A33"/>
-                </a:solidFill>
-                <a:latin typeface="楷体"/>
-                <a:ea typeface="楷体"/>
-                <a:cs typeface="楷体"/>
-              </a:rPr>
-              <a:t>【提高作业】从单元四篇课文中选一首诗词，仿其风格再写一首新诗（不同于课上的仿写），要求风格有明显差异。</a:t>
-            </a:r>
-          </a:p>
-        </p:txBody>
-      </p:sp>
-      <p:sp>
-        <p:nvSpPr>
-          <p:cNvPr id="11" name="TextBox 10"/>
+              <a:t>从单元四篇课文中选一首诗词，仿其风格再写一首新诗（不同于课上的仿写），要求风格有明显差异。 【——用】终稿评价标准：有意象+情感+修改痕迹=合格；意象新颖+情感真挚+修改到位=良好；意象与情感浑然一体+语言有个人风格=优秀。自评评价：能说出改了什么=合格；能说出为什么改=良好；能评价修改前后效果差异=优秀。</a:t>
+            </a:r>
+          </a:p>
+        </p:txBody>
+      </p:sp>
+      <p:sp>
+        <p:nvSpPr>
+          <p:cNvPr id="14" name="TextBox 13"/>
           <p:cNvSpPr txBox="1"/>
           <p:nvPr/>
         </p:nvSpPr>
@@ -8136,13 +9314,13 @@
             <a:r>
               <a:rPr sz="1300" b="1">
                 <a:solidFill>
-                  <a:srgbClr val="C8A86B"/>
+                  <a:srgbClr val="B23A2A"/>
                 </a:solidFill>
                 <a:latin typeface="微软雅黑"/>
                 <a:ea typeface="微软雅黑"/>
                 <a:cs typeface="微软雅黑"/>
               </a:rPr>
-              <a:t>本课小结</a:t>
+              <a:t>单元小结 · 反思引导</a:t>
             </a:r>
           </a:p>
         </p:txBody>
@@ -8157,6 +9335,550 @@
           <a:xfrm>
             <a:off x="640080" y="1097280"/>
             <a:ext cx="822960" cy="30480"/>
+          </a:xfrm>
+          <a:prstGeom prst="rect">
+            <a:avLst/>
+          </a:prstGeom>
+          <a:solidFill>
+            <a:srgbClr val="B23A2A"/>
+          </a:solidFill>
+          <a:ln>
+            <a:noFill/>
+          </a:ln>
+          <a:effectLst/>
+        </p:spPr>
+        <p:style>
+          <a:lnRef idx="1">
+            <a:schemeClr val="accent1"/>
+          </a:lnRef>
+          <a:fillRef idx="3">
+            <a:schemeClr val="accent1"/>
+          </a:fillRef>
+          <a:effectRef idx="2">
+            <a:schemeClr val="accent1"/>
+          </a:effectRef>
+          <a:fontRef idx="minor">
+            <a:schemeClr val="lt1"/>
+          </a:fontRef>
+        </p:style>
+        <p:txBody>
+          <a:bodyPr rtlCol="0" anchor="ctr"/>
+          <a:lstStyle/>
+          <a:p>
+            <a:pPr algn="ctr"/>
+          </a:p>
+        </p:txBody>
+      </p:sp>
+      <p:sp>
+        <p:nvSpPr>
+          <p:cNvPr id="5" name="TextBox 4"/>
+          <p:cNvSpPr txBox="1"/>
+          <p:nvPr/>
+        </p:nvSpPr>
+        <p:spPr>
+          <a:xfrm>
+            <a:off x="640080" y="1325880"/>
+            <a:ext cx="10911535" cy="640080"/>
+          </a:xfrm>
+          <a:prstGeom prst="rect">
+            <a:avLst/>
+          </a:prstGeom>
+          <a:noFill/>
+        </p:spPr>
+        <p:txBody>
+          <a:bodyPr wrap="square" anchor="t" lIns="0" rIns="0" tIns="0" bIns="0">
+            <a:spAutoFit/>
+          </a:bodyPr>
+          <a:lstStyle/>
+          <a:p>
+            <a:pPr algn="l">
+              <a:lnSpc>
+                <a:spcPct val="145000"/>
+              </a:lnSpc>
+              <a:spcAft>
+                <a:spcPts val="400"/>
+              </a:spcAft>
+            </a:pPr>
+            <a:r>
+              <a:rPr sz="2600" b="1">
+                <a:solidFill>
+                  <a:srgbClr val="1C2A33"/>
+                </a:solidFill>
+                <a:latin typeface="楷体"/>
+                <a:ea typeface="楷体"/>
+                <a:cs typeface="楷体"/>
+              </a:rPr>
+              <a:t>回望本单元：青春的价值</a:t>
+            </a:r>
+          </a:p>
+        </p:txBody>
+      </p:sp>
+      <p:sp>
+        <p:nvSpPr>
+          <p:cNvPr id="6" name="Rounded Rectangle 5"/>
+          <p:cNvSpPr/>
+          <p:nvPr/>
+        </p:nvSpPr>
+        <p:spPr>
+          <a:xfrm>
+            <a:off x="640080" y="2057400"/>
+            <a:ext cx="5227167" cy="4206240"/>
+          </a:xfrm>
+          <a:prstGeom prst="roundRect">
+            <a:avLst/>
+          </a:prstGeom>
+          <a:solidFill>
+            <a:srgbClr val="FFFFFF"/>
+          </a:solidFill>
+          <a:ln w="20320">
+            <a:solidFill>
+              <a:srgbClr val="2E7D6B"/>
+            </a:solidFill>
+          </a:ln>
+          <a:effectLst/>
+        </p:spPr>
+        <p:style>
+          <a:lnRef idx="1">
+            <a:schemeClr val="accent1"/>
+          </a:lnRef>
+          <a:fillRef idx="3">
+            <a:schemeClr val="accent1"/>
+          </a:fillRef>
+          <a:effectRef idx="2">
+            <a:schemeClr val="accent1"/>
+          </a:effectRef>
+          <a:fontRef idx="minor">
+            <a:schemeClr val="lt1"/>
+          </a:fontRef>
+        </p:style>
+        <p:txBody>
+          <a:bodyPr rtlCol="0" anchor="ctr"/>
+          <a:lstStyle/>
+          <a:p>
+            <a:pPr algn="ctr"/>
+          </a:p>
+        </p:txBody>
+      </p:sp>
+      <p:sp>
+        <p:nvSpPr>
+          <p:cNvPr id="7" name="TextBox 6"/>
+          <p:cNvSpPr txBox="1"/>
+          <p:nvPr/>
+        </p:nvSpPr>
+        <p:spPr>
+          <a:xfrm>
+            <a:off x="914400" y="2212848"/>
+            <a:ext cx="4678527" cy="457200"/>
+          </a:xfrm>
+          <a:prstGeom prst="rect">
+            <a:avLst/>
+          </a:prstGeom>
+          <a:noFill/>
+        </p:spPr>
+        <p:txBody>
+          <a:bodyPr wrap="square" anchor="t" lIns="0" rIns="0" tIns="0" bIns="0">
+            <a:spAutoFit/>
+          </a:bodyPr>
+          <a:lstStyle/>
+          <a:p>
+            <a:pPr algn="l">
+              <a:lnSpc>
+                <a:spcPct val="145000"/>
+              </a:lnSpc>
+              <a:spcAft>
+                <a:spcPts val="400"/>
+              </a:spcAft>
+            </a:pPr>
+            <a:r>
+              <a:rPr sz="1600" b="1">
+                <a:solidFill>
+                  <a:srgbClr val="2E7D6B"/>
+                </a:solidFill>
+                <a:latin typeface="楷体"/>
+                <a:ea typeface="楷体"/>
+                <a:cs typeface="楷体"/>
+              </a:rPr>
+              <a:t>反思引导</a:t>
+            </a:r>
+          </a:p>
+        </p:txBody>
+      </p:sp>
+      <p:sp>
+        <p:nvSpPr>
+          <p:cNvPr id="8" name="TextBox 7"/>
+          <p:cNvSpPr txBox="1"/>
+          <p:nvPr/>
+        </p:nvSpPr>
+        <p:spPr>
+          <a:xfrm>
+            <a:off x="914400" y="2743200"/>
+            <a:ext cx="4678527" cy="3383280"/>
+          </a:xfrm>
+          <a:prstGeom prst="rect">
+            <a:avLst/>
+          </a:prstGeom>
+          <a:noFill/>
+        </p:spPr>
+        <p:txBody>
+          <a:bodyPr wrap="square" anchor="t" lIns="0" rIns="0" tIns="0" bIns="0">
+            <a:spAutoFit/>
+          </a:bodyPr>
+          <a:lstStyle/>
+          <a:p>
+            <a:pPr algn="l">
+              <a:lnSpc>
+                <a:spcPct val="150000"/>
+              </a:lnSpc>
+              <a:spcAft>
+                <a:spcPts val="1200"/>
+              </a:spcAft>
+            </a:pPr>
+            <a:r>
+              <a:rPr sz="1450" b="0">
+                <a:solidFill>
+                  <a:srgbClr val="1C2A33"/>
+                </a:solidFill>
+                <a:latin typeface="楷体"/>
+                <a:ea typeface="楷体"/>
+                <a:cs typeface="楷体"/>
+              </a:rPr>
+              <a:t>回望本单元，哪一首诗或哪个人物最打动你？写下理由。</a:t>
+            </a:r>
+          </a:p>
+          <a:p>
+            <a:pPr algn="l">
+              <a:lnSpc>
+                <a:spcPct val="150000"/>
+              </a:lnSpc>
+              <a:spcAft>
+                <a:spcPts val="1200"/>
+              </a:spcAft>
+            </a:pPr>
+            <a:r>
+              <a:rPr sz="1450" b="0">
+                <a:solidFill>
+                  <a:srgbClr val="1C2A33"/>
+                </a:solidFill>
+                <a:latin typeface="楷体"/>
+                <a:ea typeface="楷体"/>
+                <a:cs typeface="楷体"/>
+              </a:rPr>
+              <a:t>用「意象」的眼光重读一段文字，你看到了什么？</a:t>
+            </a:r>
+          </a:p>
+          <a:p>
+            <a:pPr algn="l">
+              <a:lnSpc>
+                <a:spcPct val="150000"/>
+              </a:lnSpc>
+              <a:spcAft>
+                <a:spcPts val="1200"/>
+              </a:spcAft>
+            </a:pPr>
+            <a:r>
+              <a:rPr sz="1450" b="0">
+                <a:solidFill>
+                  <a:srgbClr val="1C2A33"/>
+                </a:solidFill>
+                <a:latin typeface="楷体"/>
+                <a:ea typeface="楷体"/>
+                <a:cs typeface="楷体"/>
+              </a:rPr>
+              <a:t>把今天学到的读法，带进下一次自主阅读。</a:t>
+            </a:r>
+          </a:p>
+        </p:txBody>
+      </p:sp>
+      <p:sp>
+        <p:nvSpPr>
+          <p:cNvPr id="9" name="Rounded Rectangle 8"/>
+          <p:cNvSpPr/>
+          <p:nvPr/>
+        </p:nvSpPr>
+        <p:spPr>
+          <a:xfrm>
+            <a:off x="6324447" y="2057400"/>
+            <a:ext cx="5227167" cy="4206240"/>
+          </a:xfrm>
+          <a:prstGeom prst="roundRect">
+            <a:avLst/>
+          </a:prstGeom>
+          <a:solidFill>
+            <a:srgbClr val="FFFFFF"/>
+          </a:solidFill>
+          <a:ln w="20320">
+            <a:solidFill>
+              <a:srgbClr val="C8A86B"/>
+            </a:solidFill>
+          </a:ln>
+          <a:effectLst/>
+        </p:spPr>
+        <p:style>
+          <a:lnRef idx="1">
+            <a:schemeClr val="accent1"/>
+          </a:lnRef>
+          <a:fillRef idx="3">
+            <a:schemeClr val="accent1"/>
+          </a:fillRef>
+          <a:effectRef idx="2">
+            <a:schemeClr val="accent1"/>
+          </a:effectRef>
+          <a:fontRef idx="minor">
+            <a:schemeClr val="lt1"/>
+          </a:fontRef>
+        </p:style>
+        <p:txBody>
+          <a:bodyPr rtlCol="0" anchor="ctr"/>
+          <a:lstStyle/>
+          <a:p>
+            <a:pPr algn="ctr"/>
+          </a:p>
+        </p:txBody>
+      </p:sp>
+      <p:sp>
+        <p:nvSpPr>
+          <p:cNvPr id="10" name="TextBox 9"/>
+          <p:cNvSpPr txBox="1"/>
+          <p:nvPr/>
+        </p:nvSpPr>
+        <p:spPr>
+          <a:xfrm>
+            <a:off x="6598767" y="2212848"/>
+            <a:ext cx="4678527" cy="457200"/>
+          </a:xfrm>
+          <a:prstGeom prst="rect">
+            <a:avLst/>
+          </a:prstGeom>
+          <a:noFill/>
+        </p:spPr>
+        <p:txBody>
+          <a:bodyPr wrap="square" anchor="t" lIns="0" rIns="0" tIns="0" bIns="0">
+            <a:spAutoFit/>
+          </a:bodyPr>
+          <a:lstStyle/>
+          <a:p>
+            <a:pPr algn="l">
+              <a:lnSpc>
+                <a:spcPct val="145000"/>
+              </a:lnSpc>
+              <a:spcAft>
+                <a:spcPts val="400"/>
+              </a:spcAft>
+            </a:pPr>
+            <a:r>
+              <a:rPr sz="1600" b="1">
+                <a:solidFill>
+                  <a:srgbClr val="C8A86B"/>
+                </a:solidFill>
+                <a:latin typeface="楷体"/>
+                <a:ea typeface="楷体"/>
+                <a:cs typeface="楷体"/>
+              </a:rPr>
+              <a:t>本单元核心</a:t>
+            </a:r>
+          </a:p>
+        </p:txBody>
+      </p:sp>
+      <p:sp>
+        <p:nvSpPr>
+          <p:cNvPr id="11" name="TextBox 10"/>
+          <p:cNvSpPr txBox="1"/>
+          <p:nvPr/>
+        </p:nvSpPr>
+        <p:spPr>
+          <a:xfrm>
+            <a:off x="6598767" y="2743200"/>
+            <a:ext cx="4678527" cy="3383280"/>
+          </a:xfrm>
+          <a:prstGeom prst="rect">
+            <a:avLst/>
+          </a:prstGeom>
+          <a:noFill/>
+        </p:spPr>
+        <p:txBody>
+          <a:bodyPr wrap="square" anchor="t" lIns="0" rIns="0" tIns="0" bIns="0">
+            <a:spAutoFit/>
+          </a:bodyPr>
+          <a:lstStyle/>
+          <a:p>
+            <a:pPr algn="l">
+              <a:lnSpc>
+                <a:spcPct val="140000"/>
+              </a:lnSpc>
+              <a:spcAft>
+                <a:spcPts val="200"/>
+              </a:spcAft>
+            </a:pPr>
+            <a:r>
+              <a:rPr sz="1450" b="1">
+                <a:solidFill>
+                  <a:srgbClr val="B23A2A"/>
+                </a:solidFill>
+                <a:latin typeface="微软雅黑"/>
+                <a:ea typeface="微软雅黑"/>
+                <a:cs typeface="微软雅黑"/>
+              </a:rPr>
+              <a:t>① 讲评三种典型</a:t>
+            </a:r>
+          </a:p>
+          <a:p>
+            <a:pPr algn="l">
+              <a:lnSpc>
+                <a:spcPct val="140000"/>
+              </a:lnSpc>
+              <a:spcAft>
+                <a:spcPts val="1000"/>
+              </a:spcAft>
+            </a:pPr>
+            <a:r>
+              <a:rPr sz="1300" b="0">
+                <a:solidFill>
+                  <a:srgbClr val="1C2A33"/>
+                </a:solidFill>
+                <a:latin typeface="楷体"/>
+                <a:ea typeface="楷体"/>
+                <a:cs typeface="楷体"/>
+              </a:rPr>
+              <a:t>意象清晰语言平淡型 / 情感强烈意象模糊型 / 意象情感俱佳型。</a:t>
+            </a:r>
+          </a:p>
+          <a:p>
+            <a:pPr algn="l">
+              <a:lnSpc>
+                <a:spcPct val="140000"/>
+              </a:lnSpc>
+              <a:spcAft>
+                <a:spcPts val="200"/>
+              </a:spcAft>
+            </a:pPr>
+            <a:r>
+              <a:rPr sz="1450" b="1">
+                <a:solidFill>
+                  <a:srgbClr val="B23A2A"/>
+                </a:solidFill>
+                <a:latin typeface="微软雅黑"/>
+                <a:ea typeface="微软雅黑"/>
+                <a:cs typeface="微软雅黑"/>
+              </a:rPr>
+              <a:t>② 修改三方向</a:t>
+            </a:r>
+          </a:p>
+          <a:p>
+            <a:pPr algn="l">
+              <a:lnSpc>
+                <a:spcPct val="140000"/>
+              </a:lnSpc>
+              <a:spcAft>
+                <a:spcPts val="1000"/>
+              </a:spcAft>
+            </a:pPr>
+            <a:r>
+              <a:rPr sz="1300" b="0">
+                <a:solidFill>
+                  <a:srgbClr val="1C2A33"/>
+                </a:solidFill>
+                <a:latin typeface="楷体"/>
+                <a:ea typeface="楷体"/>
+                <a:cs typeface="楷体"/>
+              </a:rPr>
+              <a:t>换意象（更准确）/调节奏（分行长短）/炼字（动词形容词）。</a:t>
+            </a:r>
+          </a:p>
+          <a:p>
+            <a:pPr algn="l">
+              <a:lnSpc>
+                <a:spcPct val="140000"/>
+              </a:lnSpc>
+              <a:spcAft>
+                <a:spcPts val="200"/>
+              </a:spcAft>
+            </a:pPr>
+            <a:r>
+              <a:rPr sz="1450" b="1">
+                <a:solidFill>
+                  <a:srgbClr val="B23A2A"/>
+                </a:solidFill>
+                <a:latin typeface="微软雅黑"/>
+                <a:ea typeface="微软雅黑"/>
+                <a:cs typeface="微软雅黑"/>
+              </a:rPr>
+              <a:t>③ 好诗三标准</a:t>
+            </a:r>
+          </a:p>
+          <a:p>
+            <a:pPr algn="l">
+              <a:lnSpc>
+                <a:spcPct val="140000"/>
+              </a:lnSpc>
+              <a:spcAft>
+                <a:spcPts val="1000"/>
+              </a:spcAft>
+            </a:pPr>
+            <a:r>
+              <a:rPr sz="1300" b="0">
+                <a:solidFill>
+                  <a:srgbClr val="1C2A33"/>
+                </a:solidFill>
+                <a:latin typeface="楷体"/>
+                <a:ea typeface="楷体"/>
+                <a:cs typeface="楷体"/>
+              </a:rPr>
+              <a:t>意象鲜明·情感真挚·语言有张力。</a:t>
+            </a:r>
+          </a:p>
+        </p:txBody>
+      </p:sp>
+      <p:sp>
+        <p:nvSpPr>
+          <p:cNvPr id="12" name="Rounded Rectangle 11"/>
+          <p:cNvSpPr/>
+          <p:nvPr/>
+        </p:nvSpPr>
+        <p:spPr>
+          <a:xfrm>
+            <a:off x="640080" y="5806440"/>
+            <a:ext cx="10911535" cy="640080"/>
+          </a:xfrm>
+          <a:prstGeom prst="roundRect">
+            <a:avLst/>
+          </a:prstGeom>
+          <a:solidFill>
+            <a:srgbClr val="1C2A33"/>
+          </a:solidFill>
+          <a:effectLst/>
+        </p:spPr>
+        <p:style>
+          <a:lnRef idx="1">
+            <a:schemeClr val="accent1"/>
+          </a:lnRef>
+          <a:fillRef idx="3">
+            <a:schemeClr val="accent1"/>
+          </a:fillRef>
+          <a:effectRef idx="2">
+            <a:schemeClr val="accent1"/>
+          </a:effectRef>
+          <a:fontRef idx="minor">
+            <a:schemeClr val="lt1"/>
+          </a:fontRef>
+        </p:style>
+        <p:txBody>
+          <a:bodyPr rtlCol="0" anchor="ctr"/>
+          <a:lstStyle/>
+          <a:p>
+            <a:pPr algn="ctr"/>
+          </a:p>
+        </p:txBody>
+      </p:sp>
+      <p:sp>
+        <p:nvSpPr>
+          <p:cNvPr id="13" name="Rectangle 12"/>
+          <p:cNvSpPr/>
+          <p:nvPr/>
+        </p:nvSpPr>
+        <p:spPr>
+          <a:xfrm>
+            <a:off x="914400" y="6035040"/>
+            <a:ext cx="54864" cy="279400"/>
           </a:xfrm>
           <a:prstGeom prst="rect">
             <a:avLst/>
@@ -8193,58 +9915,14 @@
       </p:sp>
       <p:sp>
         <p:nvSpPr>
-          <p:cNvPr id="5" name="Rectangle 4"/>
-          <p:cNvSpPr/>
-          <p:nvPr/>
-        </p:nvSpPr>
-        <p:spPr>
-          <a:xfrm>
-            <a:off x="640080" y="1737360"/>
-            <a:ext cx="54864" cy="431800"/>
-          </a:xfrm>
-          <a:prstGeom prst="rect">
-            <a:avLst/>
-          </a:prstGeom>
-          <a:solidFill>
-            <a:srgbClr val="C8A86B"/>
-          </a:solidFill>
-          <a:ln>
-            <a:noFill/>
-          </a:ln>
-          <a:effectLst/>
-        </p:spPr>
-        <p:style>
-          <a:lnRef idx="1">
-            <a:schemeClr val="accent1"/>
-          </a:lnRef>
-          <a:fillRef idx="3">
-            <a:schemeClr val="accent1"/>
-          </a:fillRef>
-          <a:effectRef idx="2">
-            <a:schemeClr val="accent1"/>
-          </a:effectRef>
-          <a:fontRef idx="minor">
-            <a:schemeClr val="lt1"/>
-          </a:fontRef>
-        </p:style>
-        <p:txBody>
-          <a:bodyPr rtlCol="0" anchor="ctr"/>
-          <a:lstStyle/>
-          <a:p>
-            <a:pPr algn="ctr"/>
-          </a:p>
-        </p:txBody>
-      </p:sp>
-      <p:sp>
-        <p:nvSpPr>
-          <p:cNvPr id="6" name="TextBox 5"/>
+          <p:cNvPr id="14" name="TextBox 13"/>
           <p:cNvSpPr txBox="1"/>
           <p:nvPr/>
         </p:nvSpPr>
         <p:spPr>
           <a:xfrm>
-            <a:off x="868680" y="1645920"/>
-            <a:ext cx="10682935" cy="2194560"/>
+            <a:off x="1143000" y="5943600"/>
+            <a:ext cx="10180015" cy="457200"/>
           </a:xfrm>
           <a:prstGeom prst="rect">
             <a:avLst/>
@@ -8259,43 +9937,29 @@
           <a:p>
             <a:pPr algn="l">
               <a:lnSpc>
-                <a:spcPct val="150000"/>
+                <a:spcPct val="140000"/>
               </a:lnSpc>
               <a:spcAft>
-                <a:spcPts val="1000"/>
-              </a:spcAft>
-            </a:pPr>
-            <a:r>
-              <a:rPr sz="2200" b="0">
-                <a:solidFill>
-                  <a:srgbClr val="1C2A33"/>
+                <a:spcPts val="400"/>
+              </a:spcAft>
+            </a:pPr>
+            <a:r>
+              <a:rPr sz="1350" b="0">
+                <a:solidFill>
+                  <a:srgbClr val="FFFFFF"/>
                 </a:solidFill>
                 <a:latin typeface="楷体"/>
                 <a:ea typeface="楷体"/>
                 <a:cs typeface="楷体"/>
               </a:rPr>
-              <a:t>本单元主题：青春的价值。把今天学到的方法带进下一篇——自己读、自己想、自己写。</a:t>
-            </a:r>
-          </a:p>
-          <a:p>
-            <a:pPr algn="l"/>
-            <a:r>
-              <a:rPr sz="1600" b="1">
-                <a:solidFill>
-                  <a:srgbClr val="B23A2A"/>
-                </a:solidFill>
-                <a:latin typeface="微软雅黑"/>
-                <a:ea typeface="微软雅黑"/>
-                <a:cs typeface="微软雅黑"/>
-              </a:rPr>
-              <a:t>方法迁移：圈关键信息 → 理事件脉络 → 析人物精神</a:t>
-            </a:r>
-          </a:p>
-        </p:txBody>
-      </p:sp>
-      <p:sp>
-        <p:nvSpPr>
-          <p:cNvPr id="7" name="TextBox 6"/>
+              <a:t>一条线：读 → 写 → 用；本单元的意义，在你自己的表达里。</a:t>
+            </a:r>
+          </a:p>
+        </p:txBody>
+      </p:sp>
+      <p:sp>
+        <p:nvSpPr>
+          <p:cNvPr id="15" name="TextBox 14"/>
           <p:cNvSpPr txBox="1"/>
           <p:nvPr/>
         </p:nvSpPr>
